--- a/static/ppts/G6_Sci_Plate_Boundaries.pptx
+++ b/static/ppts/G6_Sci_Plate_Boundaries.pptx
@@ -9,9 +9,10 @@
     <p:sldId id="257" r:id="rId3"/>
     <p:sldId id="258" r:id="rId4"/>
     <p:sldId id="259" r:id="rId5"/>
+    <p:sldId id="260" r:id="rId6"/>
   </p:sldIdLst>
   <p:notesMasterIdLst>
-    <p:notesMasterId r:id="rId6"/>
+    <p:notesMasterId r:id="rId7"/>
   </p:notesMasterIdLst>
   <p:sldSz cx="9144000" cy="5143500"/>
   <p:notesSz cx="5143500" cy="9144000"/>
@@ -811,6 +812,94 @@
 </p:notes>
 </file>
 
+<file path=ppt/notesSlides/notesSlide5.xml><?xml version="1.0" encoding="utf-8"?>
+<p:notes xmlns:a="http://schemas.openxmlformats.org/drawingml/2006/main" xmlns:r="http://schemas.openxmlformats.org/officeDocument/2006/relationships" xmlns:p="http://schemas.openxmlformats.org/presentationml/2006/main">
+  <p:cSld>
+    <p:spTree>
+      <p:nvGrpSpPr>
+        <p:cNvPr id="1" name=""/>
+        <p:cNvGrpSpPr/>
+        <p:nvPr/>
+      </p:nvGrpSpPr>
+      <p:grpSpPr>
+        <a:xfrm>
+          <a:off x="0" y="0"/>
+          <a:ext cx="0" cy="0"/>
+          <a:chOff x="0" y="0"/>
+          <a:chExt cx="0" cy="0"/>
+        </a:xfrm>
+      </p:grpSpPr>
+      <p:sp>
+        <p:nvSpPr>
+          <p:cNvPr id="2" name="Slide Image Placeholder 1"/>
+          <p:cNvSpPr>
+            <a:spLocks noGrp="1" noRot="1" noChangeAspect="1"/>
+          </p:cNvSpPr>
+          <p:nvPr>
+            <p:ph type="sldImg"/>
+          </p:nvPr>
+        </p:nvSpPr>
+        <p:spPr/>
+      </p:sp>
+      <p:sp>
+        <p:nvSpPr>
+          <p:cNvPr id="3" name="Notes Placeholder 2"/>
+          <p:cNvSpPr>
+            <a:spLocks noGrp="1"/>
+          </p:cNvSpPr>
+          <p:nvPr>
+            <p:ph type="body" idx="1"/>
+          </p:nvPr>
+        </p:nvSpPr>
+        <p:spPr/>
+        <p:txBody>
+          <a:bodyPr/>
+          <a:lstStyle/>
+          <a:p>
+            <a:r>
+              <a:rPr lang="en-US" dirty="0"/>
+              <a:t/>
+            </a:r>
+            <a:endParaRPr lang="en-US" dirty="0"/>
+          </a:p>
+        </p:txBody>
+      </p:sp>
+      <p:sp>
+        <p:nvSpPr>
+          <p:cNvPr id="4" name="Slide Number Placeholder 3"/>
+          <p:cNvSpPr>
+            <a:spLocks noGrp="1"/>
+          </p:cNvSpPr>
+          <p:nvPr>
+            <p:ph type="sldNum" sz="quarter" idx="10"/>
+          </p:nvPr>
+        </p:nvSpPr>
+        <p:spPr/>
+        <p:txBody>
+          <a:bodyPr/>
+          <a:lstStyle/>
+          <a:p>
+            <a:fld id="{F7021451-1387-4CA6-816F-3879F97B5CBC}" type="slidenum">
+              <a:rPr lang="en-US"/>
+              <a:t>5</a:t>
+            </a:fld>
+            <a:endParaRPr lang="en-US"/>
+          </a:p>
+        </p:txBody>
+      </p:sp>
+    </p:spTree>
+    <p:extLst>
+      <p:ext uri="{BB962C8B-B14F-4D97-AF65-F5344CB8AC3E}">
+        <p14:creationId xmlns:p14="http://schemas.microsoft.com/office/powerpoint/2010/main" val="1024086991"/>
+      </p:ext>
+    </p:extLst>
+  </p:cSld>
+  <p:clrMapOvr>
+    <a:masterClrMapping/>
+  </p:clrMapOvr>
+</p:notes>
+</file>
+
 <file path=ppt/slideLayouts/slideLayout1.xml><?xml version="1.0" encoding="utf-8"?>
 <p:sldLayout xmlns:a="http://schemas.openxmlformats.org/drawingml/2006/main" xmlns:r="http://schemas.openxmlformats.org/officeDocument/2006/relationships" xmlns:p="http://schemas.openxmlformats.org/presentationml/2006/main" preserve="1">
   <p:cSld name="DEFAULT">
@@ -1170,7 +1259,7 @@
         </p:nvSpPr>
         <p:spPr>
           <a:xfrm>
-            <a:off x="731520" y="1280160"/>
+            <a:off x="731520" y="1097280"/>
             <a:ext cx="7772400" cy="1371600"/>
           </a:xfrm>
           <a:prstGeom prst="rect">
@@ -1187,7 +1276,7 @@
               <a:buNone/>
             </a:pPr>
             <a:r>
-              <a:rPr lang="en-US" sz="3600" b="1" dirty="0">
+              <a:rPr lang="en-US" sz="4000" b="1" dirty="0">
                 <a:solidFill>
                   <a:srgbClr val="FFFFFF"/>
                 </a:solidFill>
@@ -1197,7 +1286,7 @@
               </a:rPr>
               <a:t>Plate Boundaries</a:t>
             </a:r>
-            <a:endParaRPr lang="en-US" sz="3600" dirty="0"/>
+            <a:endParaRPr lang="en-US" sz="4000" dirty="0"/>
           </a:p>
         </p:txBody>
       </p:sp>
@@ -1209,7 +1298,7 @@
         </p:nvSpPr>
         <p:spPr>
           <a:xfrm>
-            <a:off x="731520" y="2743200"/>
+            <a:off x="731520" y="2560320"/>
             <a:ext cx="7772400" cy="548640"/>
           </a:xfrm>
           <a:prstGeom prst="rect">
@@ -1228,13 +1317,13 @@
             <a:r>
               <a:rPr lang="en-US" sz="1600" dirty="0">
                 <a:solidFill>
-                  <a:srgbClr val="9B9690"/>
+                  <a:srgbClr val="E9C46A"/>
                 </a:solidFill>
                 <a:latin typeface="Calibri" pitchFamily="34" charset="0"/>
                 <a:ea typeface="Calibri" pitchFamily="34" charset="-122"/>
                 <a:cs typeface="Calibri" pitchFamily="34" charset="-120"/>
               </a:rPr>
-              <a:t>G6 Science · Earth Science</a:t>
+              <a:t>Grade 6 Science · Mr Zocchi</a:t>
             </a:r>
             <a:endParaRPr lang="en-US" sz="1600" dirty="0"/>
           </a:p>
@@ -1242,14 +1331,36 @@
       </p:sp>
       <p:sp>
         <p:nvSpPr>
-          <p:cNvPr id="5" name="Text 3"/>
-          <p:cNvSpPr/>
-          <p:nvPr/>
-        </p:nvSpPr>
-        <p:spPr>
-          <a:xfrm>
-            <a:off x="731520" y="4389120"/>
-            <a:ext cx="7772400" cy="457200"/>
+          <p:cNvPr id="5" name="Shape 3"/>
+          <p:cNvSpPr/>
+          <p:nvPr/>
+        </p:nvSpPr>
+        <p:spPr>
+          <a:xfrm>
+            <a:off x="731520" y="3474720"/>
+            <a:ext cx="2011680" cy="411480"/>
+          </a:xfrm>
+          <a:prstGeom prst="roundRect">
+            <a:avLst>
+              <a:gd name="adj" fmla="val 17778"/>
+            </a:avLst>
+          </a:prstGeom>
+          <a:solidFill>
+            <a:srgbClr val="2A9D8F"/>
+          </a:solidFill>
+          <a:ln/>
+        </p:spPr>
+      </p:sp>
+      <p:sp>
+        <p:nvSpPr>
+          <p:cNvPr id="6" name="Text 4"/>
+          <p:cNvSpPr/>
+          <p:nvPr/>
+        </p:nvSpPr>
+        <p:spPr>
+          <a:xfrm>
+            <a:off x="731520" y="3474720"/>
+            <a:ext cx="2011680" cy="411480"/>
           </a:xfrm>
           <a:prstGeom prst="rect">
             <a:avLst/>
@@ -1261,21 +1372,21 @@
           <a:bodyPr wrap="square" rtlCol="0" anchor="ctr"/>
           <a:lstStyle/>
           <a:p>
-            <a:pPr indent="0" marL="0">
+            <a:pPr algn="ctr" indent="0" marL="0">
               <a:buNone/>
             </a:pPr>
             <a:r>
-              <a:rPr lang="en-US" sz="1000" dirty="0">
-                <a:solidFill>
-                  <a:srgbClr val="6B6660"/>
+              <a:rPr lang="en-US" sz="1200" b="1" dirty="0">
+                <a:solidFill>
+                  <a:srgbClr val="FFFFFF"/>
                 </a:solidFill>
                 <a:latin typeface="Calibri" pitchFamily="34" charset="0"/>
                 <a:ea typeface="Calibri" pitchFamily="34" charset="-122"/>
                 <a:cs typeface="Calibri" pitchFamily="34" charset="-120"/>
               </a:rPr>
-              <a:t>Mr Zocchi · mrzocchi.com</a:t>
-            </a:r>
-            <a:endParaRPr lang="en-US" sz="1000" dirty="0"/>
+              <a:t>Term 3 · Earth Science</a:t>
+            </a:r>
+            <a:endParaRPr lang="en-US" sz="1200" dirty="0"/>
           </a:p>
         </p:txBody>
       </p:sp>
@@ -1293,7 +1404,7 @@
     <p:bg>
       <p:bgPr>
         <a:solidFill>
-          <a:srgbClr val="FFFFFF"/>
+          <a:srgbClr val="FAF8F5"/>
         </a:solidFill>
       </p:bgPr>
     </p:bg>
@@ -1339,8 +1450,8 @@
         </p:nvSpPr>
         <p:spPr>
           <a:xfrm>
-            <a:off x="548640" y="274320"/>
-            <a:ext cx="8046720" cy="640080"/>
+            <a:off x="7772400" y="4709160"/>
+            <a:ext cx="1097280" cy="320040"/>
           </a:xfrm>
           <a:prstGeom prst="rect">
             <a:avLst/>
@@ -1349,14 +1460,105 @@
           <a:ln/>
         </p:spPr>
         <p:txBody>
-          <a:bodyPr wrap="square" lIns="0" tIns="0" rIns="0" bIns="0" rtlCol="0" anchor="ctr"/>
+          <a:bodyPr wrap="square" rtlCol="0" anchor="ctr"/>
+          <a:lstStyle/>
+          <a:p>
+            <a:pPr algn="r" indent="0" marL="0">
+              <a:buNone/>
+            </a:pPr>
+            <a:r>
+              <a:rPr lang="en-US" sz="900" dirty="0">
+                <a:solidFill>
+                  <a:srgbClr val="6B6660"/>
+                </a:solidFill>
+                <a:latin typeface="Calibri" pitchFamily="34" charset="0"/>
+                <a:ea typeface="Calibri" pitchFamily="34" charset="-122"/>
+                <a:cs typeface="Calibri" pitchFamily="34" charset="-120"/>
+              </a:rPr>
+              <a:t>2 / 5</a:t>
+            </a:r>
+            <a:endParaRPr lang="en-US" sz="900" dirty="0"/>
+          </a:p>
+        </p:txBody>
+      </p:sp>
+      <p:sp>
+        <p:nvSpPr>
+          <p:cNvPr id="4" name="Shape 2"/>
+          <p:cNvSpPr/>
+          <p:nvPr/>
+        </p:nvSpPr>
+        <p:spPr>
+          <a:xfrm>
+            <a:off x="1371600" y="914400"/>
+            <a:ext cx="6400800" cy="3200400"/>
+          </a:xfrm>
+          <a:prstGeom prst="rect">
+            <a:avLst/>
+          </a:prstGeom>
+          <a:solidFill>
+            <a:srgbClr val="FFFFFF"/>
+          </a:solidFill>
+          <a:ln w="12700">
+            <a:solidFill>
+              <a:srgbClr val="E5E2DC"/>
+            </a:solidFill>
+            <a:prstDash val="solid"/>
+          </a:ln>
+          <a:effectLst>
+            <a:outerShdw sx="100000" sy="100000" kx="0" ky="0" algn="bl" rotWithShape="0" blurRad="50800" dist="25400" dir="8100000">
+              <a:srgbClr val="000000">
+                <a:alpha val="10000"/>
+              </a:srgbClr>
+            </a:outerShdw>
+          </a:effectLst>
+        </p:spPr>
+      </p:sp>
+      <p:sp>
+        <p:nvSpPr>
+          <p:cNvPr id="5" name="Shape 3"/>
+          <p:cNvSpPr/>
+          <p:nvPr/>
+        </p:nvSpPr>
+        <p:spPr>
+          <a:xfrm>
+            <a:off x="1371600" y="914400"/>
+            <a:ext cx="91440" cy="3200400"/>
+          </a:xfrm>
+          <a:prstGeom prst="rect">
+            <a:avLst/>
+          </a:prstGeom>
+          <a:solidFill>
+            <a:srgbClr val="2A9D8F"/>
+          </a:solidFill>
+          <a:ln/>
+        </p:spPr>
+      </p:sp>
+      <p:sp>
+        <p:nvSpPr>
+          <p:cNvPr id="6" name="Text 4"/>
+          <p:cNvSpPr/>
+          <p:nvPr/>
+        </p:nvSpPr>
+        <p:spPr>
+          <a:xfrm>
+            <a:off x="1828800" y="1097280"/>
+            <a:ext cx="5669280" cy="640080"/>
+          </a:xfrm>
+          <a:prstGeom prst="rect">
+            <a:avLst/>
+          </a:prstGeom>
+          <a:noFill/>
+          <a:ln/>
+        </p:spPr>
+        <p:txBody>
+          <a:bodyPr wrap="square" rtlCol="0" anchor="ctr"/>
           <a:lstStyle/>
           <a:p>
             <a:pPr indent="0" marL="0">
               <a:buNone/>
             </a:pPr>
             <a:r>
-              <a:rPr lang="en-US" sz="2600" b="1" dirty="0">
+              <a:rPr lang="en-US" sz="2400" b="1" dirty="0">
                 <a:solidFill>
                   <a:srgbClr val="1B2A4A"/>
                 </a:solidFill>
@@ -1366,20 +1568,20 @@
               </a:rPr>
               <a:t>Tectonic Plates</a:t>
             </a:r>
-            <a:endParaRPr lang="en-US" sz="2600" dirty="0"/>
-          </a:p>
-        </p:txBody>
-      </p:sp>
-      <p:sp>
-        <p:nvSpPr>
-          <p:cNvPr id="4" name="Text 2"/>
-          <p:cNvSpPr/>
-          <p:nvPr/>
-        </p:nvSpPr>
-        <p:spPr>
-          <a:xfrm>
-            <a:off x="548640" y="1097280"/>
-            <a:ext cx="8046720" cy="3474720"/>
+            <a:endParaRPr lang="en-US" sz="2400" dirty="0"/>
+          </a:p>
+        </p:txBody>
+      </p:sp>
+      <p:sp>
+        <p:nvSpPr>
+          <p:cNvPr id="7" name="Text 5"/>
+          <p:cNvSpPr/>
+          <p:nvPr/>
+        </p:nvSpPr>
+        <p:spPr>
+          <a:xfrm>
+            <a:off x="1828800" y="1828800"/>
+            <a:ext cx="5669280" cy="2011680"/>
           </a:xfrm>
           <a:prstGeom prst="rect">
             <a:avLst/>
@@ -1391,12 +1593,11 @@
           <a:bodyPr wrap="square" rtlCol="0" anchor="t"/>
           <a:lstStyle/>
           <a:p>
-            <a:pPr marL="342900" indent="-342900">
-              <a:spcAft>
-                <a:spcPts val="800"/>
-              </a:spcAft>
-              <a:buSzPct val="100000"/>
-              <a:buChar char="•"/>
+            <a:pPr indent="0" marL="0">
+              <a:lnSpc>
+                <a:spcPct val="130000"/>
+              </a:lnSpc>
+              <a:buNone/>
             </a:pPr>
             <a:r>
               <a:rPr lang="en-US" sz="1500" dirty="0">
@@ -1407,108 +1608,9 @@
                 <a:ea typeface="Calibri" pitchFamily="34" charset="-122"/>
                 <a:cs typeface="Calibri" pitchFamily="34" charset="-120"/>
               </a:rPr>
-              <a:t>Earth's crust is broken into large pieces called tectonic plates</a:t>
+              <a:t>The Earth's crust is broken into large pieces called tectonic plates. These plates float on the semi-liquid mantle and move slowly due to convection currents. Where plates meet, we get earthquakes, volcanoes, and mountains. There are three types of plate boundary.</a:t>
             </a:r>
             <a:endParaRPr lang="en-US" sz="1500" dirty="0"/>
-          </a:p>
-          <a:p>
-            <a:pPr marL="342900" indent="-342900">
-              <a:spcAft>
-                <a:spcPts val="800"/>
-              </a:spcAft>
-              <a:buSzPct val="100000"/>
-              <a:buChar char="•"/>
-            </a:pPr>
-            <a:r>
-              <a:rPr lang="en-US" sz="1500" dirty="0">
-                <a:solidFill>
-                  <a:srgbClr val="3D3A36"/>
-                </a:solidFill>
-                <a:latin typeface="Calibri" pitchFamily="34" charset="0"/>
-                <a:ea typeface="Calibri" pitchFamily="34" charset="-122"/>
-                <a:cs typeface="Calibri" pitchFamily="34" charset="-120"/>
-              </a:rPr>
-              <a:t>Plates float on the semi-liquid mantle below</a:t>
-            </a:r>
-            <a:endParaRPr lang="en-US" sz="1500" dirty="0"/>
-          </a:p>
-          <a:p>
-            <a:pPr marL="342900" indent="-342900">
-              <a:spcAft>
-                <a:spcPts val="800"/>
-              </a:spcAft>
-              <a:buSzPct val="100000"/>
-              <a:buChar char="•"/>
-            </a:pPr>
-            <a:r>
-              <a:rPr lang="en-US" sz="1500" dirty="0">
-                <a:solidFill>
-                  <a:srgbClr val="3D3A36"/>
-                </a:solidFill>
-                <a:latin typeface="Calibri" pitchFamily="34" charset="0"/>
-                <a:ea typeface="Calibri" pitchFamily="34" charset="-122"/>
-                <a:cs typeface="Calibri" pitchFamily="34" charset="-120"/>
-              </a:rPr>
-              <a:t>Plates move very slowly (a few cm per year)</a:t>
-            </a:r>
-            <a:endParaRPr lang="en-US" sz="1500" dirty="0"/>
-          </a:p>
-          <a:p>
-            <a:pPr marL="342900" indent="-342900">
-              <a:spcAft>
-                <a:spcPts val="800"/>
-              </a:spcAft>
-              <a:buSzPct val="100000"/>
-              <a:buChar char="•"/>
-            </a:pPr>
-            <a:r>
-              <a:rPr lang="en-US" sz="1500" dirty="0">
-                <a:solidFill>
-                  <a:srgbClr val="3D3A36"/>
-                </a:solidFill>
-                <a:latin typeface="Calibri" pitchFamily="34" charset="0"/>
-                <a:ea typeface="Calibri" pitchFamily="34" charset="-122"/>
-                <a:cs typeface="Calibri" pitchFamily="34" charset="-120"/>
-              </a:rPr>
-              <a:t>Where plates meet = plate boundaries → earthquakes + volcanoes</a:t>
-            </a:r>
-            <a:endParaRPr lang="en-US" sz="1500" dirty="0"/>
-          </a:p>
-        </p:txBody>
-      </p:sp>
-      <p:sp>
-        <p:nvSpPr>
-          <p:cNvPr id="5" name="Text 3"/>
-          <p:cNvSpPr/>
-          <p:nvPr/>
-        </p:nvSpPr>
-        <p:spPr>
-          <a:xfrm>
-            <a:off x="548640" y="4800600"/>
-            <a:ext cx="3657600" cy="274320"/>
-          </a:xfrm>
-          <a:prstGeom prst="rect">
-            <a:avLst/>
-          </a:prstGeom>
-          <a:noFill/>
-          <a:ln/>
-        </p:spPr>
-        <p:txBody>
-          <a:bodyPr wrap="square" rtlCol="0" anchor="ctr"/>
-          <a:lstStyle/>
-          <a:p>
-            <a:pPr indent="0" marL="0">
-              <a:buNone/>
-            </a:pPr>
-            <a:r>
-              <a:rPr lang="en-US" sz="800" dirty="0">
-                <a:solidFill>
-                  <a:srgbClr val="9B9690"/>
-                </a:solidFill>
-              </a:rPr>
-              <a:t>mrzocchi.com</a:t>
-            </a:r>
-            <a:endParaRPr lang="en-US" sz="800" dirty="0"/>
           </a:p>
         </p:txBody>
       </p:sp>
@@ -1572,8 +1674,8 @@
         </p:nvSpPr>
         <p:spPr>
           <a:xfrm>
-            <a:off x="548640" y="274320"/>
-            <a:ext cx="8046720" cy="640080"/>
+            <a:off x="7772400" y="4709160"/>
+            <a:ext cx="1097280" cy="320040"/>
           </a:xfrm>
           <a:prstGeom prst="rect">
             <a:avLst/>
@@ -1582,7 +1684,46 @@
           <a:ln/>
         </p:spPr>
         <p:txBody>
-          <a:bodyPr wrap="square" lIns="0" tIns="0" rIns="0" bIns="0" rtlCol="0" anchor="ctr"/>
+          <a:bodyPr wrap="square" rtlCol="0" anchor="ctr"/>
+          <a:lstStyle/>
+          <a:p>
+            <a:pPr algn="r" indent="0" marL="0">
+              <a:buNone/>
+            </a:pPr>
+            <a:r>
+              <a:rPr lang="en-US" sz="900" dirty="0">
+                <a:solidFill>
+                  <a:srgbClr val="6B6660"/>
+                </a:solidFill>
+                <a:latin typeface="Calibri" pitchFamily="34" charset="0"/>
+                <a:ea typeface="Calibri" pitchFamily="34" charset="-122"/>
+                <a:cs typeface="Calibri" pitchFamily="34" charset="-120"/>
+              </a:rPr>
+              <a:t>3 / 5</a:t>
+            </a:r>
+            <a:endParaRPr lang="en-US" sz="900" dirty="0"/>
+          </a:p>
+        </p:txBody>
+      </p:sp>
+      <p:sp>
+        <p:nvSpPr>
+          <p:cNvPr id="4" name="Text 2"/>
+          <p:cNvSpPr/>
+          <p:nvPr/>
+        </p:nvSpPr>
+        <p:spPr>
+          <a:xfrm>
+            <a:off x="457200" y="274320"/>
+            <a:ext cx="8229600" cy="640080"/>
+          </a:xfrm>
+          <a:prstGeom prst="rect">
+            <a:avLst/>
+          </a:prstGeom>
+          <a:noFill/>
+          <a:ln/>
+        </p:spPr>
+        <p:txBody>
+          <a:bodyPr wrap="square" rtlCol="0" anchor="ctr"/>
           <a:lstStyle/>
           <a:p>
             <a:pPr indent="0" marL="0">
@@ -1605,14 +1746,14 @@
       </p:sp>
       <p:sp>
         <p:nvSpPr>
-          <p:cNvPr id="4" name="Shape 2"/>
-          <p:cNvSpPr/>
-          <p:nvPr/>
-        </p:nvSpPr>
-        <p:spPr>
-          <a:xfrm>
-            <a:off x="548640" y="1097280"/>
-            <a:ext cx="3749040" cy="594360"/>
+          <p:cNvPr id="5" name="Shape 3"/>
+          <p:cNvSpPr/>
+          <p:nvPr/>
+        </p:nvSpPr>
+        <p:spPr>
+          <a:xfrm>
+            <a:off x="457200" y="1188720"/>
+            <a:ext cx="2560320" cy="1828800"/>
           </a:xfrm>
           <a:prstGeom prst="rect">
             <a:avLst/>
@@ -1620,7 +1761,12 @@
           <a:solidFill>
             <a:srgbClr val="FFFFFF"/>
           </a:solidFill>
-          <a:ln/>
+          <a:ln w="12700">
+            <a:solidFill>
+              <a:srgbClr val="E5E2DC"/>
+            </a:solidFill>
+            <a:prstDash val="solid"/>
+          </a:ln>
           <a:effectLst>
             <a:outerShdw sx="100000" sy="100000" kx="0" ky="0" algn="bl" rotWithShape="0" blurRad="50800" dist="25400" dir="8100000">
               <a:srgbClr val="000000">
@@ -1632,14 +1778,14 @@
       </p:sp>
       <p:sp>
         <p:nvSpPr>
-          <p:cNvPr id="5" name="Shape 3"/>
-          <p:cNvSpPr/>
-          <p:nvPr/>
-        </p:nvSpPr>
-        <p:spPr>
-          <a:xfrm>
-            <a:off x="548640" y="1097280"/>
-            <a:ext cx="54864" cy="594360"/>
+          <p:cNvPr id="6" name="Shape 4"/>
+          <p:cNvSpPr/>
+          <p:nvPr/>
+        </p:nvSpPr>
+        <p:spPr>
+          <a:xfrm>
+            <a:off x="457200" y="1188720"/>
+            <a:ext cx="2560320" cy="54864"/>
           </a:xfrm>
           <a:prstGeom prst="rect">
             <a:avLst/>
@@ -1652,14 +1798,14 @@
       </p:sp>
       <p:sp>
         <p:nvSpPr>
-          <p:cNvPr id="6" name="Text 4"/>
-          <p:cNvSpPr/>
-          <p:nvPr/>
-        </p:nvSpPr>
-        <p:spPr>
-          <a:xfrm>
-            <a:off x="685800" y="1143000"/>
-            <a:ext cx="3474720" cy="502920"/>
+          <p:cNvPr id="7" name="Text 5"/>
+          <p:cNvSpPr/>
+          <p:nvPr/>
+        </p:nvSpPr>
+        <p:spPr>
+          <a:xfrm>
+            <a:off x="594360" y="1325880"/>
+            <a:ext cx="2286000" cy="365760"/>
           </a:xfrm>
           <a:prstGeom prst="rect">
             <a:avLst/>
@@ -1675,41 +1821,69 @@
               <a:buNone/>
             </a:pPr>
             <a:r>
-              <a:rPr lang="en-US" sz="1200" b="1" dirty="0">
+              <a:rPr lang="en-US" sz="1400" b="1" dirty="0">
                 <a:solidFill>
                   <a:srgbClr val="1B2A4A"/>
                 </a:solidFill>
+                <a:latin typeface="Calibri" pitchFamily="34" charset="0"/>
+                <a:ea typeface="Calibri" pitchFamily="34" charset="-122"/>
+                <a:cs typeface="Calibri" pitchFamily="34" charset="-120"/>
               </a:rPr>
               <a:t>Divergent</a:t>
             </a:r>
-            <a:endParaRPr lang="en-US" sz="1200" dirty="0"/>
-          </a:p>
+            <a:endParaRPr lang="en-US" sz="1400" dirty="0"/>
+          </a:p>
+        </p:txBody>
+      </p:sp>
+      <p:sp>
+        <p:nvSpPr>
+          <p:cNvPr id="8" name="Text 6"/>
+          <p:cNvSpPr/>
+          <p:nvPr/>
+        </p:nvSpPr>
+        <p:spPr>
+          <a:xfrm>
+            <a:off x="594360" y="1737360"/>
+            <a:ext cx="2286000" cy="1097280"/>
+          </a:xfrm>
+          <a:prstGeom prst="rect">
+            <a:avLst/>
+          </a:prstGeom>
+          <a:noFill/>
+          <a:ln/>
+        </p:spPr>
+        <p:txBody>
+          <a:bodyPr wrap="square" rtlCol="0" anchor="t"/>
+          <a:lstStyle/>
           <a:p>
             <a:pPr indent="0" marL="0">
               <a:buNone/>
             </a:pPr>
             <a:r>
-              <a:rPr lang="en-US" sz="1000" dirty="0">
-                <a:solidFill>
-                  <a:srgbClr val="6B6660"/>
-                </a:solidFill>
-              </a:rPr>
-              <a:t>Plates move APART → magma rises → new crust forms</a:t>
-            </a:r>
-            <a:endParaRPr lang="en-US" sz="1200" dirty="0"/>
-          </a:p>
-        </p:txBody>
-      </p:sp>
-      <p:sp>
-        <p:nvSpPr>
-          <p:cNvPr id="7" name="Shape 5"/>
-          <p:cNvSpPr/>
-          <p:nvPr/>
-        </p:nvSpPr>
-        <p:spPr>
-          <a:xfrm>
-            <a:off x="4480560" y="1097280"/>
-            <a:ext cx="3749040" cy="594360"/>
+              <a:rPr lang="en-US" sz="1100" dirty="0">
+                <a:solidFill>
+                  <a:srgbClr val="3D3A36"/>
+                </a:solidFill>
+                <a:latin typeface="Calibri" pitchFamily="34" charset="0"/>
+                <a:ea typeface="Calibri" pitchFamily="34" charset="-122"/>
+                <a:cs typeface="Calibri" pitchFamily="34" charset="-120"/>
+              </a:rPr>
+              <a:t>Plates move APART. Magma rises to fill the gap, creating new crust. Example: Mid-Atlantic Ridge. Features: rift valleys, volcanic islands, sea-floor spreading.</a:t>
+            </a:r>
+            <a:endParaRPr lang="en-US" sz="1100" dirty="0"/>
+          </a:p>
+        </p:txBody>
+      </p:sp>
+      <p:sp>
+        <p:nvSpPr>
+          <p:cNvPr id="9" name="Shape 7"/>
+          <p:cNvSpPr/>
+          <p:nvPr/>
+        </p:nvSpPr>
+        <p:spPr>
+          <a:xfrm>
+            <a:off x="3291840" y="1188720"/>
+            <a:ext cx="2560320" cy="1828800"/>
           </a:xfrm>
           <a:prstGeom prst="rect">
             <a:avLst/>
@@ -1717,7 +1891,12 @@
           <a:solidFill>
             <a:srgbClr val="FFFFFF"/>
           </a:solidFill>
-          <a:ln/>
+          <a:ln w="12700">
+            <a:solidFill>
+              <a:srgbClr val="E5E2DC"/>
+            </a:solidFill>
+            <a:prstDash val="solid"/>
+          </a:ln>
           <a:effectLst>
             <a:outerShdw sx="100000" sy="100000" kx="0" ky="0" algn="bl" rotWithShape="0" blurRad="50800" dist="25400" dir="8100000">
               <a:srgbClr val="000000">
@@ -1729,14 +1908,14 @@
       </p:sp>
       <p:sp>
         <p:nvSpPr>
-          <p:cNvPr id="8" name="Shape 6"/>
-          <p:cNvSpPr/>
-          <p:nvPr/>
-        </p:nvSpPr>
-        <p:spPr>
-          <a:xfrm>
-            <a:off x="4480560" y="1097280"/>
-            <a:ext cx="54864" cy="594360"/>
+          <p:cNvPr id="10" name="Shape 8"/>
+          <p:cNvSpPr/>
+          <p:nvPr/>
+        </p:nvSpPr>
+        <p:spPr>
+          <a:xfrm>
+            <a:off x="3291840" y="1188720"/>
+            <a:ext cx="2560320" cy="54864"/>
           </a:xfrm>
           <a:prstGeom prst="rect">
             <a:avLst/>
@@ -1749,14 +1928,14 @@
       </p:sp>
       <p:sp>
         <p:nvSpPr>
-          <p:cNvPr id="9" name="Text 7"/>
-          <p:cNvSpPr/>
-          <p:nvPr/>
-        </p:nvSpPr>
-        <p:spPr>
-          <a:xfrm>
-            <a:off x="4617720" y="1143000"/>
-            <a:ext cx="3474720" cy="502920"/>
+          <p:cNvPr id="11" name="Text 9"/>
+          <p:cNvSpPr/>
+          <p:nvPr/>
+        </p:nvSpPr>
+        <p:spPr>
+          <a:xfrm>
+            <a:off x="3429000" y="1325880"/>
+            <a:ext cx="2286000" cy="365760"/>
           </a:xfrm>
           <a:prstGeom prst="rect">
             <a:avLst/>
@@ -1772,41 +1951,69 @@
               <a:buNone/>
             </a:pPr>
             <a:r>
-              <a:rPr lang="en-US" sz="1200" b="1" dirty="0">
+              <a:rPr lang="en-US" sz="1400" b="1" dirty="0">
                 <a:solidFill>
                   <a:srgbClr val="1B2A4A"/>
                 </a:solidFill>
+                <a:latin typeface="Calibri" pitchFamily="34" charset="0"/>
+                <a:ea typeface="Calibri" pitchFamily="34" charset="-122"/>
+                <a:cs typeface="Calibri" pitchFamily="34" charset="-120"/>
               </a:rPr>
               <a:t>Convergent</a:t>
             </a:r>
-            <a:endParaRPr lang="en-US" sz="1200" dirty="0"/>
-          </a:p>
+            <a:endParaRPr lang="en-US" sz="1400" dirty="0"/>
+          </a:p>
+        </p:txBody>
+      </p:sp>
+      <p:sp>
+        <p:nvSpPr>
+          <p:cNvPr id="12" name="Text 10"/>
+          <p:cNvSpPr/>
+          <p:nvPr/>
+        </p:nvSpPr>
+        <p:spPr>
+          <a:xfrm>
+            <a:off x="3429000" y="1737360"/>
+            <a:ext cx="2286000" cy="1097280"/>
+          </a:xfrm>
+          <a:prstGeom prst="rect">
+            <a:avLst/>
+          </a:prstGeom>
+          <a:noFill/>
+          <a:ln/>
+        </p:spPr>
+        <p:txBody>
+          <a:bodyPr wrap="square" rtlCol="0" anchor="t"/>
+          <a:lstStyle/>
           <a:p>
             <a:pPr indent="0" marL="0">
               <a:buNone/>
             </a:pPr>
             <a:r>
-              <a:rPr lang="en-US" sz="1000" dirty="0">
-                <a:solidFill>
-                  <a:srgbClr val="6B6660"/>
-                </a:solidFill>
-              </a:rPr>
-              <a:t>Plates push TOGETHER → one sinks (subduction) → mountains/volcanoes</a:t>
-            </a:r>
-            <a:endParaRPr lang="en-US" sz="1200" dirty="0"/>
-          </a:p>
-        </p:txBody>
-      </p:sp>
-      <p:sp>
-        <p:nvSpPr>
-          <p:cNvPr id="10" name="Shape 8"/>
-          <p:cNvSpPr/>
-          <p:nvPr/>
-        </p:nvSpPr>
-        <p:spPr>
-          <a:xfrm>
-            <a:off x="548640" y="1828800"/>
-            <a:ext cx="3749040" cy="594360"/>
+              <a:rPr lang="en-US" sz="1100" dirty="0">
+                <a:solidFill>
+                  <a:srgbClr val="3D3A36"/>
+                </a:solidFill>
+                <a:latin typeface="Calibri" pitchFamily="34" charset="0"/>
+                <a:ea typeface="Calibri" pitchFamily="34" charset="-122"/>
+                <a:cs typeface="Calibri" pitchFamily="34" charset="-120"/>
+              </a:rPr>
+              <a:t>Plates push TOGETHER. If oceanic meets continental, the denser oceanic plate subducts (sinks under). Creates deep trenches, mountains, and explosive volcanoes.</a:t>
+            </a:r>
+            <a:endParaRPr lang="en-US" sz="1100" dirty="0"/>
+          </a:p>
+        </p:txBody>
+      </p:sp>
+      <p:sp>
+        <p:nvSpPr>
+          <p:cNvPr id="13" name="Shape 11"/>
+          <p:cNvSpPr/>
+          <p:nvPr/>
+        </p:nvSpPr>
+        <p:spPr>
+          <a:xfrm>
+            <a:off x="6126480" y="1188720"/>
+            <a:ext cx="2560320" cy="1828800"/>
           </a:xfrm>
           <a:prstGeom prst="rect">
             <a:avLst/>
@@ -1814,7 +2021,12 @@
           <a:solidFill>
             <a:srgbClr val="FFFFFF"/>
           </a:solidFill>
-          <a:ln/>
+          <a:ln w="12700">
+            <a:solidFill>
+              <a:srgbClr val="E5E2DC"/>
+            </a:solidFill>
+            <a:prstDash val="solid"/>
+          </a:ln>
           <a:effectLst>
             <a:outerShdw sx="100000" sy="100000" kx="0" ky="0" algn="bl" rotWithShape="0" blurRad="50800" dist="25400" dir="8100000">
               <a:srgbClr val="000000">
@@ -1826,14 +2038,14 @@
       </p:sp>
       <p:sp>
         <p:nvSpPr>
-          <p:cNvPr id="11" name="Shape 9"/>
-          <p:cNvSpPr/>
-          <p:nvPr/>
-        </p:nvSpPr>
-        <p:spPr>
-          <a:xfrm>
-            <a:off x="548640" y="1828800"/>
-            <a:ext cx="54864" cy="594360"/>
+          <p:cNvPr id="14" name="Shape 12"/>
+          <p:cNvSpPr/>
+          <p:nvPr/>
+        </p:nvSpPr>
+        <p:spPr>
+          <a:xfrm>
+            <a:off x="6126480" y="1188720"/>
+            <a:ext cx="2560320" cy="54864"/>
           </a:xfrm>
           <a:prstGeom prst="rect">
             <a:avLst/>
@@ -1846,14 +2058,14 @@
       </p:sp>
       <p:sp>
         <p:nvSpPr>
-          <p:cNvPr id="12" name="Text 10"/>
-          <p:cNvSpPr/>
-          <p:nvPr/>
-        </p:nvSpPr>
-        <p:spPr>
-          <a:xfrm>
-            <a:off x="685800" y="1874520"/>
-            <a:ext cx="3474720" cy="502920"/>
+          <p:cNvPr id="15" name="Text 13"/>
+          <p:cNvSpPr/>
+          <p:nvPr/>
+        </p:nvSpPr>
+        <p:spPr>
+          <a:xfrm>
+            <a:off x="6263640" y="1325880"/>
+            <a:ext cx="2286000" cy="365760"/>
           </a:xfrm>
           <a:prstGeom prst="rect">
             <a:avLst/>
@@ -1869,355 +2081,56 @@
               <a:buNone/>
             </a:pPr>
             <a:r>
-              <a:rPr lang="en-US" sz="1200" b="1" dirty="0">
+              <a:rPr lang="en-US" sz="1400" b="1" dirty="0">
                 <a:solidFill>
                   <a:srgbClr val="1B2A4A"/>
                 </a:solidFill>
+                <a:latin typeface="Calibri" pitchFamily="34" charset="0"/>
+                <a:ea typeface="Calibri" pitchFamily="34" charset="-122"/>
+                <a:cs typeface="Calibri" pitchFamily="34" charset="-120"/>
               </a:rPr>
               <a:t>Transform</a:t>
             </a:r>
-            <a:endParaRPr lang="en-US" sz="1200" dirty="0"/>
-          </a:p>
+            <a:endParaRPr lang="en-US" sz="1400" dirty="0"/>
+          </a:p>
+        </p:txBody>
+      </p:sp>
+      <p:sp>
+        <p:nvSpPr>
+          <p:cNvPr id="16" name="Text 14"/>
+          <p:cNvSpPr/>
+          <p:nvPr/>
+        </p:nvSpPr>
+        <p:spPr>
+          <a:xfrm>
+            <a:off x="6263640" y="1737360"/>
+            <a:ext cx="2286000" cy="1097280"/>
+          </a:xfrm>
+          <a:prstGeom prst="rect">
+            <a:avLst/>
+          </a:prstGeom>
+          <a:noFill/>
+          <a:ln/>
+        </p:spPr>
+        <p:txBody>
+          <a:bodyPr wrap="square" rtlCol="0" anchor="t"/>
+          <a:lstStyle/>
           <a:p>
             <a:pPr indent="0" marL="0">
               <a:buNone/>
             </a:pPr>
             <a:r>
-              <a:rPr lang="en-US" sz="1000" dirty="0">
-                <a:solidFill>
-                  <a:srgbClr val="6B6660"/>
-                </a:solidFill>
-              </a:rPr>
-              <a:t>Plates slide PAST each other → friction → earthquakes, no volcanoes</a:t>
-            </a:r>
-            <a:endParaRPr lang="en-US" sz="1200" dirty="0"/>
-          </a:p>
-        </p:txBody>
-      </p:sp>
-      <p:sp>
-        <p:nvSpPr>
-          <p:cNvPr id="13" name="Shape 11"/>
-          <p:cNvSpPr/>
-          <p:nvPr/>
-        </p:nvSpPr>
-        <p:spPr>
-          <a:xfrm>
-            <a:off x="4480560" y="1828800"/>
-            <a:ext cx="3749040" cy="594360"/>
-          </a:xfrm>
-          <a:prstGeom prst="rect">
-            <a:avLst/>
-          </a:prstGeom>
-          <a:solidFill>
-            <a:srgbClr val="FFFFFF"/>
-          </a:solidFill>
-          <a:ln/>
-          <a:effectLst>
-            <a:outerShdw sx="100000" sy="100000" kx="0" ky="0" algn="bl" rotWithShape="0" blurRad="50800" dist="25400" dir="8100000">
-              <a:srgbClr val="000000">
-                <a:alpha val="10000"/>
-              </a:srgbClr>
-            </a:outerShdw>
-          </a:effectLst>
-        </p:spPr>
-      </p:sp>
-      <p:sp>
-        <p:nvSpPr>
-          <p:cNvPr id="14" name="Shape 12"/>
-          <p:cNvSpPr/>
-          <p:nvPr/>
-        </p:nvSpPr>
-        <p:spPr>
-          <a:xfrm>
-            <a:off x="4480560" y="1828800"/>
-            <a:ext cx="54864" cy="594360"/>
-          </a:xfrm>
-          <a:prstGeom prst="rect">
-            <a:avLst/>
-          </a:prstGeom>
-          <a:solidFill>
-            <a:srgbClr val="2A9D8F"/>
-          </a:solidFill>
-          <a:ln/>
-        </p:spPr>
-      </p:sp>
-      <p:sp>
-        <p:nvSpPr>
-          <p:cNvPr id="15" name="Text 13"/>
-          <p:cNvSpPr/>
-          <p:nvPr/>
-        </p:nvSpPr>
-        <p:spPr>
-          <a:xfrm>
-            <a:off x="4617720" y="1874520"/>
-            <a:ext cx="3474720" cy="502920"/>
-          </a:xfrm>
-          <a:prstGeom prst="rect">
-            <a:avLst/>
-          </a:prstGeom>
-          <a:noFill/>
-          <a:ln/>
-        </p:spPr>
-        <p:txBody>
-          <a:bodyPr wrap="square" rtlCol="0" anchor="ctr"/>
-          <a:lstStyle/>
-          <a:p>
-            <a:pPr indent="0" marL="0">
-              <a:buNone/>
-            </a:pPr>
-            <a:r>
-              <a:rPr lang="en-US" sz="1200" b="1" dirty="0">
-                <a:solidFill>
-                  <a:srgbClr val="1B2A4A"/>
-                </a:solidFill>
-              </a:rPr>
-              <a:t>Subduction</a:t>
-            </a:r>
-            <a:endParaRPr lang="en-US" sz="1200" dirty="0"/>
-          </a:p>
-          <a:p>
-            <a:pPr indent="0" marL="0">
-              <a:buNone/>
-            </a:pPr>
-            <a:r>
-              <a:rPr lang="en-US" sz="1000" dirty="0">
-                <a:solidFill>
-                  <a:srgbClr val="6B6660"/>
-                </a:solidFill>
-              </a:rPr>
-              <a:t>Denser oceanic plate sinks beneath continental plate</a:t>
-            </a:r>
-            <a:endParaRPr lang="en-US" sz="1200" dirty="0"/>
-          </a:p>
-        </p:txBody>
-      </p:sp>
-      <p:sp>
-        <p:nvSpPr>
-          <p:cNvPr id="16" name="Shape 14"/>
-          <p:cNvSpPr/>
-          <p:nvPr/>
-        </p:nvSpPr>
-        <p:spPr>
-          <a:xfrm>
-            <a:off x="548640" y="2560320"/>
-            <a:ext cx="3749040" cy="594360"/>
-          </a:xfrm>
-          <a:prstGeom prst="rect">
-            <a:avLst/>
-          </a:prstGeom>
-          <a:solidFill>
-            <a:srgbClr val="FFFFFF"/>
-          </a:solidFill>
-          <a:ln/>
-          <a:effectLst>
-            <a:outerShdw sx="100000" sy="100000" kx="0" ky="0" algn="bl" rotWithShape="0" blurRad="50800" dist="25400" dir="8100000">
-              <a:srgbClr val="000000">
-                <a:alpha val="10000"/>
-              </a:srgbClr>
-            </a:outerShdw>
-          </a:effectLst>
-        </p:spPr>
-      </p:sp>
-      <p:sp>
-        <p:nvSpPr>
-          <p:cNvPr id="17" name="Shape 15"/>
-          <p:cNvSpPr/>
-          <p:nvPr/>
-        </p:nvSpPr>
-        <p:spPr>
-          <a:xfrm>
-            <a:off x="548640" y="2560320"/>
-            <a:ext cx="54864" cy="594360"/>
-          </a:xfrm>
-          <a:prstGeom prst="rect">
-            <a:avLst/>
-          </a:prstGeom>
-          <a:solidFill>
-            <a:srgbClr val="2A9D8F"/>
-          </a:solidFill>
-          <a:ln/>
-        </p:spPr>
-      </p:sp>
-      <p:sp>
-        <p:nvSpPr>
-          <p:cNvPr id="18" name="Text 16"/>
-          <p:cNvSpPr/>
-          <p:nvPr/>
-        </p:nvSpPr>
-        <p:spPr>
-          <a:xfrm>
-            <a:off x="685800" y="2606040"/>
-            <a:ext cx="3474720" cy="502920"/>
-          </a:xfrm>
-          <a:prstGeom prst="rect">
-            <a:avLst/>
-          </a:prstGeom>
-          <a:noFill/>
-          <a:ln/>
-        </p:spPr>
-        <p:txBody>
-          <a:bodyPr wrap="square" rtlCol="0" anchor="ctr"/>
-          <a:lstStyle/>
-          <a:p>
-            <a:pPr indent="0" marL="0">
-              <a:buNone/>
-            </a:pPr>
-            <a:r>
-              <a:rPr lang="en-US" sz="1200" b="1" dirty="0">
-                <a:solidFill>
-                  <a:srgbClr val="1B2A4A"/>
-                </a:solidFill>
-              </a:rPr>
-              <a:t>Mid-ocean ridge</a:t>
-            </a:r>
-            <a:endParaRPr lang="en-US" sz="1200" dirty="0"/>
-          </a:p>
-          <a:p>
-            <a:pPr indent="0" marL="0">
-              <a:buNone/>
-            </a:pPr>
-            <a:r>
-              <a:rPr lang="en-US" sz="1000" dirty="0">
-                <a:solidFill>
-                  <a:srgbClr val="6B6660"/>
-                </a:solidFill>
-              </a:rPr>
-              <a:t>Underwater mountain range formed at divergent boundary</a:t>
-            </a:r>
-            <a:endParaRPr lang="en-US" sz="1200" dirty="0"/>
-          </a:p>
-        </p:txBody>
-      </p:sp>
-      <p:sp>
-        <p:nvSpPr>
-          <p:cNvPr id="19" name="Shape 17"/>
-          <p:cNvSpPr/>
-          <p:nvPr/>
-        </p:nvSpPr>
-        <p:spPr>
-          <a:xfrm>
-            <a:off x="4480560" y="2560320"/>
-            <a:ext cx="3749040" cy="594360"/>
-          </a:xfrm>
-          <a:prstGeom prst="rect">
-            <a:avLst/>
-          </a:prstGeom>
-          <a:solidFill>
-            <a:srgbClr val="FFFFFF"/>
-          </a:solidFill>
-          <a:ln/>
-          <a:effectLst>
-            <a:outerShdw sx="100000" sy="100000" kx="0" ky="0" algn="bl" rotWithShape="0" blurRad="50800" dist="25400" dir="8100000">
-              <a:srgbClr val="000000">
-                <a:alpha val="10000"/>
-              </a:srgbClr>
-            </a:outerShdw>
-          </a:effectLst>
-        </p:spPr>
-      </p:sp>
-      <p:sp>
-        <p:nvSpPr>
-          <p:cNvPr id="20" name="Shape 18"/>
-          <p:cNvSpPr/>
-          <p:nvPr/>
-        </p:nvSpPr>
-        <p:spPr>
-          <a:xfrm>
-            <a:off x="4480560" y="2560320"/>
-            <a:ext cx="54864" cy="594360"/>
-          </a:xfrm>
-          <a:prstGeom prst="rect">
-            <a:avLst/>
-          </a:prstGeom>
-          <a:solidFill>
-            <a:srgbClr val="2A9D8F"/>
-          </a:solidFill>
-          <a:ln/>
-        </p:spPr>
-      </p:sp>
-      <p:sp>
-        <p:nvSpPr>
-          <p:cNvPr id="21" name="Text 19"/>
-          <p:cNvSpPr/>
-          <p:nvPr/>
-        </p:nvSpPr>
-        <p:spPr>
-          <a:xfrm>
-            <a:off x="4617720" y="2606040"/>
-            <a:ext cx="3474720" cy="502920"/>
-          </a:xfrm>
-          <a:prstGeom prst="rect">
-            <a:avLst/>
-          </a:prstGeom>
-          <a:noFill/>
-          <a:ln/>
-        </p:spPr>
-        <p:txBody>
-          <a:bodyPr wrap="square" rtlCol="0" anchor="ctr"/>
-          <a:lstStyle/>
-          <a:p>
-            <a:pPr indent="0" marL="0">
-              <a:buNone/>
-            </a:pPr>
-            <a:r>
-              <a:rPr lang="en-US" sz="1200" b="1" dirty="0">
-                <a:solidFill>
-                  <a:srgbClr val="1B2A4A"/>
-                </a:solidFill>
-              </a:rPr>
-              <a:t>Ring of Fire</a:t>
-            </a:r>
-            <a:endParaRPr lang="en-US" sz="1200" dirty="0"/>
-          </a:p>
-          <a:p>
-            <a:pPr indent="0" marL="0">
-              <a:buNone/>
-            </a:pPr>
-            <a:r>
-              <a:rPr lang="en-US" sz="1000" dirty="0">
-                <a:solidFill>
-                  <a:srgbClr val="6B6660"/>
-                </a:solidFill>
-              </a:rPr>
-              <a:t>Zone of volcanoes/earthquakes around the Pacific Ocean</a:t>
-            </a:r>
-            <a:endParaRPr lang="en-US" sz="1200" dirty="0"/>
-          </a:p>
-        </p:txBody>
-      </p:sp>
-      <p:sp>
-        <p:nvSpPr>
-          <p:cNvPr id="22" name="Text 20"/>
-          <p:cNvSpPr/>
-          <p:nvPr/>
-        </p:nvSpPr>
-        <p:spPr>
-          <a:xfrm>
-            <a:off x="548640" y="4800600"/>
-            <a:ext cx="3657600" cy="274320"/>
-          </a:xfrm>
-          <a:prstGeom prst="rect">
-            <a:avLst/>
-          </a:prstGeom>
-          <a:noFill/>
-          <a:ln/>
-        </p:spPr>
-        <p:txBody>
-          <a:bodyPr wrap="square" rtlCol="0" anchor="ctr"/>
-          <a:lstStyle/>
-          <a:p>
-            <a:pPr indent="0" marL="0">
-              <a:buNone/>
-            </a:pPr>
-            <a:r>
-              <a:rPr lang="en-US" sz="800" dirty="0">
-                <a:solidFill>
-                  <a:srgbClr val="9B9690"/>
-                </a:solidFill>
-              </a:rPr>
-              <a:t>mrzocchi.com</a:t>
-            </a:r>
-            <a:endParaRPr lang="en-US" sz="800" dirty="0"/>
+              <a:rPr lang="en-US" sz="1100" dirty="0">
+                <a:solidFill>
+                  <a:srgbClr val="3D3A36"/>
+                </a:solidFill>
+                <a:latin typeface="Calibri" pitchFamily="34" charset="0"/>
+                <a:ea typeface="Calibri" pitchFamily="34" charset="-122"/>
+                <a:cs typeface="Calibri" pitchFamily="34" charset="-120"/>
+              </a:rPr>
+              <a:t>Plates slide PAST each other. No crust is created or destroyed. Friction causes powerful earthquakes. Example: San Andreas Fault, California.</a:t>
+            </a:r>
+            <a:endParaRPr lang="en-US" sz="1100" dirty="0"/>
           </a:p>
         </p:txBody>
       </p:sp>
@@ -2232,6 +2145,466 @@
 <file path=ppt/slides/slide4.xml><?xml version="1.0" encoding="utf-8"?>
 <p:sld xmlns:a="http://schemas.openxmlformats.org/drawingml/2006/main" xmlns:r="http://schemas.openxmlformats.org/officeDocument/2006/relationships" xmlns:p="http://schemas.openxmlformats.org/presentationml/2006/main">
   <p:cSld name="Slide 4">
+    <p:bg>
+      <p:bgPr>
+        <a:solidFill>
+          <a:srgbClr val="FAF8F5"/>
+        </a:solidFill>
+      </p:bgPr>
+    </p:bg>
+    <p:spTree>
+      <p:nvGrpSpPr>
+        <p:cNvPr id="1" name=""/>
+        <p:cNvGrpSpPr/>
+        <p:nvPr/>
+      </p:nvGrpSpPr>
+      <p:grpSpPr>
+        <a:xfrm>
+          <a:off x="0" y="0"/>
+          <a:ext cx="0" cy="0"/>
+          <a:chOff x="0" y="0"/>
+          <a:chExt cx="0" cy="0"/>
+        </a:xfrm>
+      </p:grpSpPr>
+      <p:sp>
+        <p:nvSpPr>
+          <p:cNvPr id="2" name="Shape 0"/>
+          <p:cNvSpPr/>
+          <p:nvPr/>
+        </p:nvSpPr>
+        <p:spPr>
+          <a:xfrm>
+            <a:off x="0" y="0"/>
+            <a:ext cx="9144000" cy="54864"/>
+          </a:xfrm>
+          <a:prstGeom prst="rect">
+            <a:avLst/>
+          </a:prstGeom>
+          <a:solidFill>
+            <a:srgbClr val="2A9D8F"/>
+          </a:solidFill>
+          <a:ln/>
+        </p:spPr>
+      </p:sp>
+      <p:sp>
+        <p:nvSpPr>
+          <p:cNvPr id="3" name="Text 1"/>
+          <p:cNvSpPr/>
+          <p:nvPr/>
+        </p:nvSpPr>
+        <p:spPr>
+          <a:xfrm>
+            <a:off x="7772400" y="4709160"/>
+            <a:ext cx="1097280" cy="320040"/>
+          </a:xfrm>
+          <a:prstGeom prst="rect">
+            <a:avLst/>
+          </a:prstGeom>
+          <a:noFill/>
+          <a:ln/>
+        </p:spPr>
+        <p:txBody>
+          <a:bodyPr wrap="square" rtlCol="0" anchor="ctr"/>
+          <a:lstStyle/>
+          <a:p>
+            <a:pPr algn="r" indent="0" marL="0">
+              <a:buNone/>
+            </a:pPr>
+            <a:r>
+              <a:rPr lang="en-US" sz="900" dirty="0">
+                <a:solidFill>
+                  <a:srgbClr val="6B6660"/>
+                </a:solidFill>
+                <a:latin typeface="Calibri" pitchFamily="34" charset="0"/>
+                <a:ea typeface="Calibri" pitchFamily="34" charset="-122"/>
+                <a:cs typeface="Calibri" pitchFamily="34" charset="-120"/>
+              </a:rPr>
+              <a:t>4 / 5</a:t>
+            </a:r>
+            <a:endParaRPr lang="en-US" sz="900" dirty="0"/>
+          </a:p>
+        </p:txBody>
+      </p:sp>
+      <p:sp>
+        <p:nvSpPr>
+          <p:cNvPr id="4" name="Text 2"/>
+          <p:cNvSpPr/>
+          <p:nvPr/>
+        </p:nvSpPr>
+        <p:spPr>
+          <a:xfrm>
+            <a:off x="457200" y="274320"/>
+            <a:ext cx="8229600" cy="640080"/>
+          </a:xfrm>
+          <a:prstGeom prst="rect">
+            <a:avLst/>
+          </a:prstGeom>
+          <a:noFill/>
+          <a:ln/>
+        </p:spPr>
+        <p:txBody>
+          <a:bodyPr wrap="square" rtlCol="0" anchor="ctr"/>
+          <a:lstStyle/>
+          <a:p>
+            <a:pPr indent="0" marL="0">
+              <a:buNone/>
+            </a:pPr>
+            <a:r>
+              <a:rPr lang="en-US" sz="2600" b="1" dirty="0">
+                <a:solidFill>
+                  <a:srgbClr val="1B2A4A"/>
+                </a:solidFill>
+                <a:latin typeface="Georgia" pitchFamily="34" charset="0"/>
+                <a:ea typeface="Georgia" pitchFamily="34" charset="-122"/>
+                <a:cs typeface="Georgia" pitchFamily="34" charset="-120"/>
+              </a:rPr>
+              <a:t>Convergent Boundaries in Detail</a:t>
+            </a:r>
+            <a:endParaRPr lang="en-US" sz="2600" dirty="0"/>
+          </a:p>
+        </p:txBody>
+      </p:sp>
+      <p:sp>
+        <p:nvSpPr>
+          <p:cNvPr id="5" name="Text 3"/>
+          <p:cNvSpPr/>
+          <p:nvPr/>
+        </p:nvSpPr>
+        <p:spPr>
+          <a:xfrm>
+            <a:off x="457200" y="1188720"/>
+            <a:ext cx="3840480" cy="3474720"/>
+          </a:xfrm>
+          <a:prstGeom prst="rect">
+            <a:avLst/>
+          </a:prstGeom>
+          <a:noFill/>
+          <a:ln/>
+        </p:spPr>
+        <p:txBody>
+          <a:bodyPr wrap="square" rtlCol="0" anchor="t"/>
+          <a:lstStyle/>
+          <a:p>
+            <a:pPr marL="342900" indent="-342900">
+              <a:spcAft>
+                <a:spcPts val="600"/>
+              </a:spcAft>
+              <a:buSzPct val="100000"/>
+              <a:buChar char="•"/>
+            </a:pPr>
+            <a:r>
+              <a:rPr lang="en-US" sz="1400" dirty="0">
+                <a:solidFill>
+                  <a:srgbClr val="3D3A36"/>
+                </a:solidFill>
+                <a:latin typeface="Calibri" pitchFamily="34" charset="0"/>
+                <a:ea typeface="Calibri" pitchFamily="34" charset="-122"/>
+                <a:cs typeface="Calibri" pitchFamily="34" charset="-120"/>
+              </a:rPr>
+              <a:t>Ocean-ocean: one subducts → volcanic island arc (e.g. Japan)</a:t>
+            </a:r>
+            <a:endParaRPr lang="en-US" sz="1400" dirty="0"/>
+          </a:p>
+          <a:p>
+            <a:pPr marL="342900" indent="-342900">
+              <a:spcAft>
+                <a:spcPts val="600"/>
+              </a:spcAft>
+              <a:buSzPct val="100000"/>
+              <a:buChar char="•"/>
+            </a:pPr>
+            <a:r>
+              <a:rPr lang="en-US" sz="1400" dirty="0">
+                <a:solidFill>
+                  <a:srgbClr val="3D3A36"/>
+                </a:solidFill>
+                <a:latin typeface="Calibri" pitchFamily="34" charset="0"/>
+                <a:ea typeface="Calibri" pitchFamily="34" charset="-122"/>
+                <a:cs typeface="Calibri" pitchFamily="34" charset="-120"/>
+              </a:rPr>
+              <a:t>Ocean-continent: ocean subducts → coastal mountains + volcanoes (e.g. Andes)</a:t>
+            </a:r>
+            <a:endParaRPr lang="en-US" sz="1400" dirty="0"/>
+          </a:p>
+          <a:p>
+            <a:pPr marL="342900" indent="-342900">
+              <a:spcAft>
+                <a:spcPts val="600"/>
+              </a:spcAft>
+              <a:buSzPct val="100000"/>
+              <a:buChar char="•"/>
+            </a:pPr>
+            <a:r>
+              <a:rPr lang="en-US" sz="1400" dirty="0">
+                <a:solidFill>
+                  <a:srgbClr val="3D3A36"/>
+                </a:solidFill>
+                <a:latin typeface="Calibri" pitchFamily="34" charset="0"/>
+                <a:ea typeface="Calibri" pitchFamily="34" charset="-122"/>
+                <a:cs typeface="Calibri" pitchFamily="34" charset="-120"/>
+              </a:rPr>
+              <a:t>Continent-continent: neither subducts → fold mountains (e.g. Himalayas)</a:t>
+            </a:r>
+            <a:endParaRPr lang="en-US" sz="1400" dirty="0"/>
+          </a:p>
+          <a:p>
+            <a:pPr marL="342900" indent="-342900">
+              <a:spcAft>
+                <a:spcPts val="600"/>
+              </a:spcAft>
+              <a:buSzPct val="100000"/>
+              <a:buChar char="•"/>
+            </a:pPr>
+            <a:r>
+              <a:rPr lang="en-US" sz="1400" dirty="0">
+                <a:solidFill>
+                  <a:srgbClr val="3D3A36"/>
+                </a:solidFill>
+                <a:latin typeface="Calibri" pitchFamily="34" charset="0"/>
+                <a:ea typeface="Calibri" pitchFamily="34" charset="-122"/>
+                <a:cs typeface="Calibri" pitchFamily="34" charset="-120"/>
+              </a:rPr>
+              <a:t>Subduction creates deep ocean trenches</a:t>
+            </a:r>
+            <a:endParaRPr lang="en-US" sz="1400" dirty="0"/>
+          </a:p>
+          <a:p>
+            <a:pPr marL="342900" indent="-342900">
+              <a:spcAft>
+                <a:spcPts val="600"/>
+              </a:spcAft>
+              <a:buSzPct val="100000"/>
+              <a:buChar char="•"/>
+            </a:pPr>
+            <a:r>
+              <a:rPr lang="en-US" sz="1400" dirty="0">
+                <a:solidFill>
+                  <a:srgbClr val="3D3A36"/>
+                </a:solidFill>
+                <a:latin typeface="Calibri" pitchFamily="34" charset="0"/>
+                <a:ea typeface="Calibri" pitchFamily="34" charset="-122"/>
+                <a:cs typeface="Calibri" pitchFamily="34" charset="-120"/>
+              </a:rPr>
+              <a:t>Melting subducted plate creates magma → volcanoes</a:t>
+            </a:r>
+            <a:endParaRPr lang="en-US" sz="1400" dirty="0"/>
+          </a:p>
+        </p:txBody>
+      </p:sp>
+      <p:sp>
+        <p:nvSpPr>
+          <p:cNvPr id="6" name="Shape 4"/>
+          <p:cNvSpPr/>
+          <p:nvPr/>
+        </p:nvSpPr>
+        <p:spPr>
+          <a:xfrm>
+            <a:off x="4846320" y="1188720"/>
+            <a:ext cx="3840480" cy="3474720"/>
+          </a:xfrm>
+          <a:prstGeom prst="rect">
+            <a:avLst/>
+          </a:prstGeom>
+          <a:solidFill>
+            <a:srgbClr val="FFFFFF"/>
+          </a:solidFill>
+          <a:ln w="12700">
+            <a:solidFill>
+              <a:srgbClr val="E5E2DC"/>
+            </a:solidFill>
+            <a:prstDash val="solid"/>
+          </a:ln>
+          <a:effectLst>
+            <a:outerShdw sx="100000" sy="100000" kx="0" ky="0" algn="bl" rotWithShape="0" blurRad="50800" dist="25400" dir="8100000">
+              <a:srgbClr val="000000">
+                <a:alpha val="10000"/>
+              </a:srgbClr>
+            </a:outerShdw>
+          </a:effectLst>
+        </p:spPr>
+      </p:sp>
+      <p:sp>
+        <p:nvSpPr>
+          <p:cNvPr id="7" name="Shape 5"/>
+          <p:cNvSpPr/>
+          <p:nvPr/>
+        </p:nvSpPr>
+        <p:spPr>
+          <a:xfrm>
+            <a:off x="4846320" y="1188720"/>
+            <a:ext cx="3840480" cy="54864"/>
+          </a:xfrm>
+          <a:prstGeom prst="rect">
+            <a:avLst/>
+          </a:prstGeom>
+          <a:solidFill>
+            <a:srgbClr val="2A9D8F"/>
+          </a:solidFill>
+          <a:ln/>
+        </p:spPr>
+      </p:sp>
+      <p:sp>
+        <p:nvSpPr>
+          <p:cNvPr id="8" name="Text 6"/>
+          <p:cNvSpPr/>
+          <p:nvPr/>
+        </p:nvSpPr>
+        <p:spPr>
+          <a:xfrm>
+            <a:off x="5120640" y="1371600"/>
+            <a:ext cx="3291840" cy="3108960"/>
+          </a:xfrm>
+          <a:prstGeom prst="rect">
+            <a:avLst/>
+          </a:prstGeom>
+          <a:noFill/>
+          <a:ln/>
+        </p:spPr>
+        <p:txBody>
+          <a:bodyPr wrap="square" rtlCol="0" anchor="t"/>
+          <a:lstStyle/>
+          <a:p>
+            <a:pPr indent="0" marL="0">
+              <a:spcAft>
+                <a:spcPts val="400"/>
+              </a:spcAft>
+              <a:buNone/>
+            </a:pPr>
+            <a:r>
+              <a:rPr lang="en-US" sz="1600" b="1" dirty="0">
+                <a:solidFill>
+                  <a:srgbClr val="1B2A4A"/>
+                </a:solidFill>
+                <a:latin typeface="Calibri" pitchFamily="34" charset="0"/>
+                <a:ea typeface="Calibri" pitchFamily="34" charset="-122"/>
+                <a:cs typeface="Calibri" pitchFamily="34" charset="-120"/>
+              </a:rPr>
+              <a:t>The Ring of Fire</a:t>
+            </a:r>
+            <a:endParaRPr lang="en-US" sz="1600" dirty="0"/>
+          </a:p>
+          <a:p>
+            <a:pPr indent="0" marL="0">
+              <a:spcAft>
+                <a:spcPts val="400"/>
+              </a:spcAft>
+              <a:buNone/>
+            </a:pPr>
+            <a:endParaRPr lang="en-US" sz="1600" dirty="0"/>
+          </a:p>
+          <a:p>
+            <a:pPr indent="0" marL="0">
+              <a:spcAft>
+                <a:spcPts val="400"/>
+              </a:spcAft>
+              <a:buNone/>
+            </a:pPr>
+            <a:r>
+              <a:rPr lang="en-US" sz="1300" dirty="0">
+                <a:solidFill>
+                  <a:srgbClr val="3D3A36"/>
+                </a:solidFill>
+                <a:latin typeface="Calibri" pitchFamily="34" charset="0"/>
+                <a:ea typeface="Calibri" pitchFamily="34" charset="-122"/>
+                <a:cs typeface="Calibri" pitchFamily="34" charset="-120"/>
+              </a:rPr>
+              <a:t>Circle of volcanoes and earthquake zones around the Pacific Ocean</a:t>
+            </a:r>
+            <a:endParaRPr lang="en-US" sz="1600" dirty="0"/>
+          </a:p>
+          <a:p>
+            <a:pPr indent="0" marL="0">
+              <a:spcAft>
+                <a:spcPts val="400"/>
+              </a:spcAft>
+              <a:buNone/>
+            </a:pPr>
+            <a:r>
+              <a:rPr lang="en-US" sz="1300" dirty="0">
+                <a:solidFill>
+                  <a:srgbClr val="3D3A36"/>
+                </a:solidFill>
+                <a:latin typeface="Calibri" pitchFamily="34" charset="0"/>
+                <a:ea typeface="Calibri" pitchFamily="34" charset="-122"/>
+                <a:cs typeface="Calibri" pitchFamily="34" charset="-120"/>
+              </a:rPr>
+              <a:t>~75% of world's active volcanoes</a:t>
+            </a:r>
+            <a:endParaRPr lang="en-US" sz="1600" dirty="0"/>
+          </a:p>
+          <a:p>
+            <a:pPr indent="0" marL="0">
+              <a:spcAft>
+                <a:spcPts val="400"/>
+              </a:spcAft>
+              <a:buNone/>
+            </a:pPr>
+            <a:r>
+              <a:rPr lang="en-US" sz="1300" dirty="0">
+                <a:solidFill>
+                  <a:srgbClr val="3D3A36"/>
+                </a:solidFill>
+                <a:latin typeface="Calibri" pitchFamily="34" charset="0"/>
+                <a:ea typeface="Calibri" pitchFamily="34" charset="-122"/>
+                <a:cs typeface="Calibri" pitchFamily="34" charset="-120"/>
+              </a:rPr>
+              <a:t>~90% of world's earthquakes</a:t>
+            </a:r>
+            <a:endParaRPr lang="en-US" sz="1600" dirty="0"/>
+          </a:p>
+          <a:p>
+            <a:pPr indent="0" marL="0">
+              <a:spcAft>
+                <a:spcPts val="400"/>
+              </a:spcAft>
+              <a:buNone/>
+            </a:pPr>
+            <a:r>
+              <a:rPr lang="en-US" sz="1300" dirty="0">
+                <a:solidFill>
+                  <a:srgbClr val="3D3A36"/>
+                </a:solidFill>
+                <a:latin typeface="Calibri" pitchFamily="34" charset="0"/>
+                <a:ea typeface="Calibri" pitchFamily="34" charset="-122"/>
+                <a:cs typeface="Calibri" pitchFamily="34" charset="-120"/>
+              </a:rPr>
+              <a:t>Caused by multiple convergent and transform boundaries</a:t>
+            </a:r>
+            <a:endParaRPr lang="en-US" sz="1600" dirty="0"/>
+          </a:p>
+          <a:p>
+            <a:pPr indent="0" marL="0">
+              <a:spcAft>
+                <a:spcPts val="400"/>
+              </a:spcAft>
+              <a:buNone/>
+            </a:pPr>
+            <a:r>
+              <a:rPr lang="en-US" sz="1300" dirty="0">
+                <a:solidFill>
+                  <a:srgbClr val="3D3A36"/>
+                </a:solidFill>
+                <a:latin typeface="Calibri" pitchFamily="34" charset="0"/>
+                <a:ea typeface="Calibri" pitchFamily="34" charset="-122"/>
+                <a:cs typeface="Calibri" pitchFamily="34" charset="-120"/>
+              </a:rPr>
+              <a:t>Countries affected: Japan, Indonesia, Chile, New Zealand, USA (west coast)</a:t>
+            </a:r>
+            <a:endParaRPr lang="en-US" sz="1600" dirty="0"/>
+          </a:p>
+        </p:txBody>
+      </p:sp>
+    </p:spTree>
+  </p:cSld>
+  <p:clrMapOvr>
+    <a:masterClrMapping/>
+  </p:clrMapOvr>
+</p:sld>
+</file>
+
+<file path=ppt/slides/slide5.xml><?xml version="1.0" encoding="utf-8"?>
+<p:sld xmlns:a="http://schemas.openxmlformats.org/drawingml/2006/main" xmlns:r="http://schemas.openxmlformats.org/officeDocument/2006/relationships" xmlns:p="http://schemas.openxmlformats.org/presentationml/2006/main">
+  <p:cSld name="Slide 5">
     <p:bg>
       <p:bgPr>
         <a:solidFill>
@@ -2262,13 +2635,13 @@
         <p:spPr>
           <a:xfrm>
             <a:off x="0" y="0"/>
-            <a:ext cx="9144000" cy="54864"/>
-          </a:xfrm>
-          <a:prstGeom prst="rect">
-            <a:avLst/>
-          </a:prstGeom>
-          <a:solidFill>
-            <a:srgbClr val="2A9D8F"/>
+            <a:ext cx="109728" cy="5143500"/>
+          </a:xfrm>
+          <a:prstGeom prst="rect">
+            <a:avLst/>
+          </a:prstGeom>
+          <a:solidFill>
+            <a:srgbClr val="E9C46A"/>
           </a:solidFill>
           <a:ln/>
         </p:spPr>
@@ -2281,8 +2654,8 @@
         </p:nvSpPr>
         <p:spPr>
           <a:xfrm>
-            <a:off x="548640" y="457200"/>
-            <a:ext cx="8046720" cy="640080"/>
+            <a:off x="731520" y="457200"/>
+            <a:ext cx="7772400" cy="731520"/>
           </a:xfrm>
           <a:prstGeom prst="rect">
             <a:avLst/>
@@ -2298,7 +2671,7 @@
               <a:buNone/>
             </a:pPr>
             <a:r>
-              <a:rPr lang="en-US" sz="2800" b="1" dirty="0">
+              <a:rPr lang="en-US" sz="3200" b="1" dirty="0">
                 <a:solidFill>
                   <a:srgbClr val="FFFFFF"/>
                 </a:solidFill>
@@ -2308,7 +2681,7 @@
               </a:rPr>
               <a:t>Key Takeaways</a:t>
             </a:r>
-            <a:endParaRPr lang="en-US" sz="2800" dirty="0"/>
+            <a:endParaRPr lang="en-US" sz="3200" dirty="0"/>
           </a:p>
         </p:txBody>
       </p:sp>
@@ -2320,8 +2693,8 @@
         </p:nvSpPr>
         <p:spPr>
           <a:xfrm>
-            <a:off x="731520" y="1371600"/>
-            <a:ext cx="7680960" cy="3200400"/>
+            <a:off x="731520" y="1463040"/>
+            <a:ext cx="7772400" cy="3200400"/>
           </a:xfrm>
           <a:prstGeom prst="rect">
             <a:avLst/>
@@ -2341,7 +2714,7 @@
               <a:buChar char="•"/>
             </a:pPr>
             <a:r>
-              <a:rPr lang="en-US" sz="1600" dirty="0">
+              <a:rPr lang="en-US" sz="1500" dirty="0">
                 <a:solidFill>
                   <a:srgbClr val="CADCFC"/>
                 </a:solidFill>
@@ -2349,9 +2722,9 @@
                 <a:ea typeface="Calibri" pitchFamily="34" charset="-122"/>
                 <a:cs typeface="Calibri" pitchFamily="34" charset="-120"/>
               </a:rPr>
-              <a:t>Three boundary types: divergent (apart), convergent (together), transform (past)</a:t>
-            </a:r>
-            <a:endParaRPr lang="en-US" sz="1600" dirty="0"/>
+              <a:t>Three boundaries: divergent (apart), convergent (together), transform (sideways)</a:t>
+            </a:r>
+            <a:endParaRPr lang="en-US" sz="1500" dirty="0"/>
           </a:p>
           <a:p>
             <a:pPr marL="342900" indent="-342900">
@@ -2362,7 +2735,7 @@
               <a:buChar char="•"/>
             </a:pPr>
             <a:r>
-              <a:rPr lang="en-US" sz="1600" dirty="0">
+              <a:rPr lang="en-US" sz="1500" dirty="0">
                 <a:solidFill>
                   <a:srgbClr val="CADCFC"/>
                 </a:solidFill>
@@ -2370,9 +2743,9 @@
                 <a:ea typeface="Calibri" pitchFamily="34" charset="-122"/>
                 <a:cs typeface="Calibri" pitchFamily="34" charset="-120"/>
               </a:rPr>
-              <a:t>Divergent = new crust; Convergent = subduction/mountains; Transform = earthquakes</a:t>
-            </a:r>
-            <a:endParaRPr lang="en-US" sz="1600" dirty="0"/>
+              <a:t>Divergent: new crust formed from rising magma</a:t>
+            </a:r>
+            <a:endParaRPr lang="en-US" sz="1500" dirty="0"/>
           </a:p>
           <a:p>
             <a:pPr marL="342900" indent="-342900">
@@ -2383,7 +2756,7 @@
               <a:buChar char="•"/>
             </a:pPr>
             <a:r>
-              <a:rPr lang="en-US" sz="1600" dirty="0">
+              <a:rPr lang="en-US" sz="1500" dirty="0">
                 <a:solidFill>
                   <a:srgbClr val="CADCFC"/>
                 </a:solidFill>
@@ -2391,9 +2764,9 @@
                 <a:ea typeface="Calibri" pitchFamily="34" charset="-122"/>
                 <a:cs typeface="Calibri" pitchFamily="34" charset="-120"/>
               </a:rPr>
-              <a:t>The Ring of Fire circles the Pacific Ocean (75% of world's volcanoes)</a:t>
-            </a:r>
-            <a:endParaRPr lang="en-US" sz="1600" dirty="0"/>
+              <a:t>Convergent: subduction (one plate sinks under another)</a:t>
+            </a:r>
+            <a:endParaRPr lang="en-US" sz="1500" dirty="0"/>
           </a:p>
           <a:p>
             <a:pPr marL="342900" indent="-342900">
@@ -2404,7 +2777,7 @@
               <a:buChar char="•"/>
             </a:pPr>
             <a:r>
-              <a:rPr lang="en-US" sz="1600" dirty="0">
+              <a:rPr lang="en-US" sz="1500" dirty="0">
                 <a:solidFill>
                   <a:srgbClr val="CADCFC"/>
                 </a:solidFill>
@@ -2412,9 +2785,30 @@
                 <a:ea typeface="Calibri" pitchFamily="34" charset="-122"/>
                 <a:cs typeface="Calibri" pitchFamily="34" charset="-120"/>
               </a:rPr>
-              <a:t>Plate movement is driven by convection currents in the mantle</a:t>
-            </a:r>
-            <a:endParaRPr lang="en-US" sz="1600" dirty="0"/>
+              <a:t>Transform: friction causes earthquakes, no volcanoes</a:t>
+            </a:r>
+            <a:endParaRPr lang="en-US" sz="1500" dirty="0"/>
+          </a:p>
+          <a:p>
+            <a:pPr marL="342900" indent="-342900">
+              <a:spcAft>
+                <a:spcPts val="1000"/>
+              </a:spcAft>
+              <a:buSzPct val="100000"/>
+              <a:buChar char="•"/>
+            </a:pPr>
+            <a:r>
+              <a:rPr lang="en-US" sz="1500" dirty="0">
+                <a:solidFill>
+                  <a:srgbClr val="CADCFC"/>
+                </a:solidFill>
+                <a:latin typeface="Calibri" pitchFamily="34" charset="0"/>
+                <a:ea typeface="Calibri" pitchFamily="34" charset="-122"/>
+                <a:cs typeface="Calibri" pitchFamily="34" charset="-120"/>
+              </a:rPr>
+              <a:t>Ring of Fire: ~75% volcanoes, ~90% earthquakes around the Pacific</a:t>
+            </a:r>
+            <a:endParaRPr lang="en-US" sz="1500" dirty="0"/>
           </a:p>
         </p:txBody>
       </p:sp>
@@ -2426,8 +2820,8 @@
         </p:nvSpPr>
         <p:spPr>
           <a:xfrm>
-            <a:off x="548640" y="4572000"/>
-            <a:ext cx="3657600" cy="274320"/>
+            <a:off x="731520" y="4572000"/>
+            <a:ext cx="7772400" cy="365760"/>
           </a:xfrm>
           <a:prstGeom prst="rect">
             <a:avLst/>
@@ -2443,14 +2837,17 @@
               <a:buNone/>
             </a:pPr>
             <a:r>
-              <a:rPr lang="en-US" sz="1000" dirty="0">
-                <a:solidFill>
-                  <a:srgbClr val="6B6660"/>
-                </a:solidFill>
+              <a:rPr lang="en-US" sz="1100" dirty="0">
+                <a:solidFill>
+                  <a:srgbClr val="E9C46A"/>
+                </a:solidFill>
+                <a:latin typeface="Calibri" pitchFamily="34" charset="0"/>
+                <a:ea typeface="Calibri" pitchFamily="34" charset="-122"/>
+                <a:cs typeface="Calibri" pitchFamily="34" charset="-120"/>
               </a:rPr>
               <a:t>mrzocchi.com</a:t>
             </a:r>
-            <a:endParaRPr lang="en-US" sz="1000" dirty="0"/>
+            <a:endParaRPr lang="en-US" sz="1100" dirty="0"/>
           </a:p>
         </p:txBody>
       </p:sp>

--- a/static/ppts/G6_Sci_Plate_Boundaries.pptx
+++ b/static/ppts/G6_Sci_Plate_Boundaries.pptx
@@ -10,9 +10,13 @@
     <p:sldId id="258" r:id="rId4"/>
     <p:sldId id="259" r:id="rId5"/>
     <p:sldId id="260" r:id="rId6"/>
+    <p:sldId id="261" r:id="rId7"/>
+    <p:sldId id="262" r:id="rId8"/>
+    <p:sldId id="263" r:id="rId9"/>
+    <p:sldId id="264" r:id="rId10"/>
   </p:sldIdLst>
   <p:notesMasterIdLst>
-    <p:notesMasterId r:id="rId7"/>
+    <p:notesMasterId r:id="rId11"/>
   </p:notesMasterIdLst>
   <p:sldSz cx="9144000" cy="5143500"/>
   <p:notesSz cx="5143500" cy="9144000"/>
@@ -900,6 +904,358 @@
 </p:notes>
 </file>
 
+<file path=ppt/notesSlides/notesSlide6.xml><?xml version="1.0" encoding="utf-8"?>
+<p:notes xmlns:a="http://schemas.openxmlformats.org/drawingml/2006/main" xmlns:r="http://schemas.openxmlformats.org/officeDocument/2006/relationships" xmlns:p="http://schemas.openxmlformats.org/presentationml/2006/main">
+  <p:cSld>
+    <p:spTree>
+      <p:nvGrpSpPr>
+        <p:cNvPr id="1" name=""/>
+        <p:cNvGrpSpPr/>
+        <p:nvPr/>
+      </p:nvGrpSpPr>
+      <p:grpSpPr>
+        <a:xfrm>
+          <a:off x="0" y="0"/>
+          <a:ext cx="0" cy="0"/>
+          <a:chOff x="0" y="0"/>
+          <a:chExt cx="0" cy="0"/>
+        </a:xfrm>
+      </p:grpSpPr>
+      <p:sp>
+        <p:nvSpPr>
+          <p:cNvPr id="2" name="Slide Image Placeholder 1"/>
+          <p:cNvSpPr>
+            <a:spLocks noGrp="1" noRot="1" noChangeAspect="1"/>
+          </p:cNvSpPr>
+          <p:nvPr>
+            <p:ph type="sldImg"/>
+          </p:nvPr>
+        </p:nvSpPr>
+        <p:spPr/>
+      </p:sp>
+      <p:sp>
+        <p:nvSpPr>
+          <p:cNvPr id="3" name="Notes Placeholder 2"/>
+          <p:cNvSpPr>
+            <a:spLocks noGrp="1"/>
+          </p:cNvSpPr>
+          <p:nvPr>
+            <p:ph type="body" idx="1"/>
+          </p:nvPr>
+        </p:nvSpPr>
+        <p:spPr/>
+        <p:txBody>
+          <a:bodyPr/>
+          <a:lstStyle/>
+          <a:p>
+            <a:r>
+              <a:rPr lang="en-US" dirty="0"/>
+              <a:t/>
+            </a:r>
+            <a:endParaRPr lang="en-US" dirty="0"/>
+          </a:p>
+        </p:txBody>
+      </p:sp>
+      <p:sp>
+        <p:nvSpPr>
+          <p:cNvPr id="4" name="Slide Number Placeholder 3"/>
+          <p:cNvSpPr>
+            <a:spLocks noGrp="1"/>
+          </p:cNvSpPr>
+          <p:nvPr>
+            <p:ph type="sldNum" sz="quarter" idx="10"/>
+          </p:nvPr>
+        </p:nvSpPr>
+        <p:spPr/>
+        <p:txBody>
+          <a:bodyPr/>
+          <a:lstStyle/>
+          <a:p>
+            <a:fld id="{F7021451-1387-4CA6-816F-3879F97B5CBC}" type="slidenum">
+              <a:rPr lang="en-US"/>
+              <a:t>6</a:t>
+            </a:fld>
+            <a:endParaRPr lang="en-US"/>
+          </a:p>
+        </p:txBody>
+      </p:sp>
+    </p:spTree>
+    <p:extLst>
+      <p:ext uri="{BB962C8B-B14F-4D97-AF65-F5344CB8AC3E}">
+        <p14:creationId xmlns:p14="http://schemas.microsoft.com/office/powerpoint/2010/main" val="1024086991"/>
+      </p:ext>
+    </p:extLst>
+  </p:cSld>
+  <p:clrMapOvr>
+    <a:masterClrMapping/>
+  </p:clrMapOvr>
+</p:notes>
+</file>
+
+<file path=ppt/notesSlides/notesSlide7.xml><?xml version="1.0" encoding="utf-8"?>
+<p:notes xmlns:a="http://schemas.openxmlformats.org/drawingml/2006/main" xmlns:r="http://schemas.openxmlformats.org/officeDocument/2006/relationships" xmlns:p="http://schemas.openxmlformats.org/presentationml/2006/main">
+  <p:cSld>
+    <p:spTree>
+      <p:nvGrpSpPr>
+        <p:cNvPr id="1" name=""/>
+        <p:cNvGrpSpPr/>
+        <p:nvPr/>
+      </p:nvGrpSpPr>
+      <p:grpSpPr>
+        <a:xfrm>
+          <a:off x="0" y="0"/>
+          <a:ext cx="0" cy="0"/>
+          <a:chOff x="0" y="0"/>
+          <a:chExt cx="0" cy="0"/>
+        </a:xfrm>
+      </p:grpSpPr>
+      <p:sp>
+        <p:nvSpPr>
+          <p:cNvPr id="2" name="Slide Image Placeholder 1"/>
+          <p:cNvSpPr>
+            <a:spLocks noGrp="1" noRot="1" noChangeAspect="1"/>
+          </p:cNvSpPr>
+          <p:nvPr>
+            <p:ph type="sldImg"/>
+          </p:nvPr>
+        </p:nvSpPr>
+        <p:spPr/>
+      </p:sp>
+      <p:sp>
+        <p:nvSpPr>
+          <p:cNvPr id="3" name="Notes Placeholder 2"/>
+          <p:cNvSpPr>
+            <a:spLocks noGrp="1"/>
+          </p:cNvSpPr>
+          <p:nvPr>
+            <p:ph type="body" idx="1"/>
+          </p:nvPr>
+        </p:nvSpPr>
+        <p:spPr/>
+        <p:txBody>
+          <a:bodyPr/>
+          <a:lstStyle/>
+          <a:p>
+            <a:r>
+              <a:rPr lang="en-US" dirty="0"/>
+              <a:t/>
+            </a:r>
+            <a:endParaRPr lang="en-US" dirty="0"/>
+          </a:p>
+        </p:txBody>
+      </p:sp>
+      <p:sp>
+        <p:nvSpPr>
+          <p:cNvPr id="4" name="Slide Number Placeholder 3"/>
+          <p:cNvSpPr>
+            <a:spLocks noGrp="1"/>
+          </p:cNvSpPr>
+          <p:nvPr>
+            <p:ph type="sldNum" sz="quarter" idx="10"/>
+          </p:nvPr>
+        </p:nvSpPr>
+        <p:spPr/>
+        <p:txBody>
+          <a:bodyPr/>
+          <a:lstStyle/>
+          <a:p>
+            <a:fld id="{F7021451-1387-4CA6-816F-3879F97B5CBC}" type="slidenum">
+              <a:rPr lang="en-US"/>
+              <a:t>7</a:t>
+            </a:fld>
+            <a:endParaRPr lang="en-US"/>
+          </a:p>
+        </p:txBody>
+      </p:sp>
+    </p:spTree>
+    <p:extLst>
+      <p:ext uri="{BB962C8B-B14F-4D97-AF65-F5344CB8AC3E}">
+        <p14:creationId xmlns:p14="http://schemas.microsoft.com/office/powerpoint/2010/main" val="1024086991"/>
+      </p:ext>
+    </p:extLst>
+  </p:cSld>
+  <p:clrMapOvr>
+    <a:masterClrMapping/>
+  </p:clrMapOvr>
+</p:notes>
+</file>
+
+<file path=ppt/notesSlides/notesSlide8.xml><?xml version="1.0" encoding="utf-8"?>
+<p:notes xmlns:a="http://schemas.openxmlformats.org/drawingml/2006/main" xmlns:r="http://schemas.openxmlformats.org/officeDocument/2006/relationships" xmlns:p="http://schemas.openxmlformats.org/presentationml/2006/main">
+  <p:cSld>
+    <p:spTree>
+      <p:nvGrpSpPr>
+        <p:cNvPr id="1" name=""/>
+        <p:cNvGrpSpPr/>
+        <p:nvPr/>
+      </p:nvGrpSpPr>
+      <p:grpSpPr>
+        <a:xfrm>
+          <a:off x="0" y="0"/>
+          <a:ext cx="0" cy="0"/>
+          <a:chOff x="0" y="0"/>
+          <a:chExt cx="0" cy="0"/>
+        </a:xfrm>
+      </p:grpSpPr>
+      <p:sp>
+        <p:nvSpPr>
+          <p:cNvPr id="2" name="Slide Image Placeholder 1"/>
+          <p:cNvSpPr>
+            <a:spLocks noGrp="1" noRot="1" noChangeAspect="1"/>
+          </p:cNvSpPr>
+          <p:nvPr>
+            <p:ph type="sldImg"/>
+          </p:nvPr>
+        </p:nvSpPr>
+        <p:spPr/>
+      </p:sp>
+      <p:sp>
+        <p:nvSpPr>
+          <p:cNvPr id="3" name="Notes Placeholder 2"/>
+          <p:cNvSpPr>
+            <a:spLocks noGrp="1"/>
+          </p:cNvSpPr>
+          <p:nvPr>
+            <p:ph type="body" idx="1"/>
+          </p:nvPr>
+        </p:nvSpPr>
+        <p:spPr/>
+        <p:txBody>
+          <a:bodyPr/>
+          <a:lstStyle/>
+          <a:p>
+            <a:r>
+              <a:rPr lang="en-US" dirty="0"/>
+              <a:t/>
+            </a:r>
+            <a:endParaRPr lang="en-US" dirty="0"/>
+          </a:p>
+        </p:txBody>
+      </p:sp>
+      <p:sp>
+        <p:nvSpPr>
+          <p:cNvPr id="4" name="Slide Number Placeholder 3"/>
+          <p:cNvSpPr>
+            <a:spLocks noGrp="1"/>
+          </p:cNvSpPr>
+          <p:nvPr>
+            <p:ph type="sldNum" sz="quarter" idx="10"/>
+          </p:nvPr>
+        </p:nvSpPr>
+        <p:spPr/>
+        <p:txBody>
+          <a:bodyPr/>
+          <a:lstStyle/>
+          <a:p>
+            <a:fld id="{F7021451-1387-4CA6-816F-3879F97B5CBC}" type="slidenum">
+              <a:rPr lang="en-US"/>
+              <a:t>8</a:t>
+            </a:fld>
+            <a:endParaRPr lang="en-US"/>
+          </a:p>
+        </p:txBody>
+      </p:sp>
+    </p:spTree>
+    <p:extLst>
+      <p:ext uri="{BB962C8B-B14F-4D97-AF65-F5344CB8AC3E}">
+        <p14:creationId xmlns:p14="http://schemas.microsoft.com/office/powerpoint/2010/main" val="1024086991"/>
+      </p:ext>
+    </p:extLst>
+  </p:cSld>
+  <p:clrMapOvr>
+    <a:masterClrMapping/>
+  </p:clrMapOvr>
+</p:notes>
+</file>
+
+<file path=ppt/notesSlides/notesSlide9.xml><?xml version="1.0" encoding="utf-8"?>
+<p:notes xmlns:a="http://schemas.openxmlformats.org/drawingml/2006/main" xmlns:r="http://schemas.openxmlformats.org/officeDocument/2006/relationships" xmlns:p="http://schemas.openxmlformats.org/presentationml/2006/main">
+  <p:cSld>
+    <p:spTree>
+      <p:nvGrpSpPr>
+        <p:cNvPr id="1" name=""/>
+        <p:cNvGrpSpPr/>
+        <p:nvPr/>
+      </p:nvGrpSpPr>
+      <p:grpSpPr>
+        <a:xfrm>
+          <a:off x="0" y="0"/>
+          <a:ext cx="0" cy="0"/>
+          <a:chOff x="0" y="0"/>
+          <a:chExt cx="0" cy="0"/>
+        </a:xfrm>
+      </p:grpSpPr>
+      <p:sp>
+        <p:nvSpPr>
+          <p:cNvPr id="2" name="Slide Image Placeholder 1"/>
+          <p:cNvSpPr>
+            <a:spLocks noGrp="1" noRot="1" noChangeAspect="1"/>
+          </p:cNvSpPr>
+          <p:nvPr>
+            <p:ph type="sldImg"/>
+          </p:nvPr>
+        </p:nvSpPr>
+        <p:spPr/>
+      </p:sp>
+      <p:sp>
+        <p:nvSpPr>
+          <p:cNvPr id="3" name="Notes Placeholder 2"/>
+          <p:cNvSpPr>
+            <a:spLocks noGrp="1"/>
+          </p:cNvSpPr>
+          <p:nvPr>
+            <p:ph type="body" idx="1"/>
+          </p:nvPr>
+        </p:nvSpPr>
+        <p:spPr/>
+        <p:txBody>
+          <a:bodyPr/>
+          <a:lstStyle/>
+          <a:p>
+            <a:r>
+              <a:rPr lang="en-US" dirty="0"/>
+              <a:t/>
+            </a:r>
+            <a:endParaRPr lang="en-US" dirty="0"/>
+          </a:p>
+        </p:txBody>
+      </p:sp>
+      <p:sp>
+        <p:nvSpPr>
+          <p:cNvPr id="4" name="Slide Number Placeholder 3"/>
+          <p:cNvSpPr>
+            <a:spLocks noGrp="1"/>
+          </p:cNvSpPr>
+          <p:nvPr>
+            <p:ph type="sldNum" sz="quarter" idx="10"/>
+          </p:nvPr>
+        </p:nvSpPr>
+        <p:spPr/>
+        <p:txBody>
+          <a:bodyPr/>
+          <a:lstStyle/>
+          <a:p>
+            <a:fld id="{F7021451-1387-4CA6-816F-3879F97B5CBC}" type="slidenum">
+              <a:rPr lang="en-US"/>
+              <a:t>9</a:t>
+            </a:fld>
+            <a:endParaRPr lang="en-US"/>
+          </a:p>
+        </p:txBody>
+      </p:sp>
+    </p:spTree>
+    <p:extLst>
+      <p:ext uri="{BB962C8B-B14F-4D97-AF65-F5344CB8AC3E}">
+        <p14:creationId xmlns:p14="http://schemas.microsoft.com/office/powerpoint/2010/main" val="1024086991"/>
+      </p:ext>
+    </p:extLst>
+  </p:cSld>
+  <p:clrMapOvr>
+    <a:masterClrMapping/>
+  </p:clrMapOvr>
+</p:notes>
+</file>
+
 <file path=ppt/slideLayouts/slideLayout1.xml><?xml version="1.0" encoding="utf-8"?>
 <p:sldLayout xmlns:a="http://schemas.openxmlformats.org/drawingml/2006/main" xmlns:r="http://schemas.openxmlformats.org/officeDocument/2006/relationships" xmlns:p="http://schemas.openxmlformats.org/presentationml/2006/main" preserve="1">
   <p:cSld name="DEFAULT">
@@ -1210,13 +1566,6 @@
 <file path=ppt/slides/slide1.xml><?xml version="1.0" encoding="utf-8"?>
 <p:sld xmlns:a="http://schemas.openxmlformats.org/drawingml/2006/main" xmlns:r="http://schemas.openxmlformats.org/officeDocument/2006/relationships" xmlns:p="http://schemas.openxmlformats.org/presentationml/2006/main">
   <p:cSld name="Slide 1">
-    <p:bg>
-      <p:bgPr>
-        <a:solidFill>
-          <a:srgbClr val="1B2A4A"/>
-        </a:solidFill>
-      </p:bgPr>
-    </p:bg>
     <p:spTree>
       <p:nvGrpSpPr>
         <p:cNvPr id="1" name=""/>
@@ -1240,7 +1589,27 @@
         <p:spPr>
           <a:xfrm>
             <a:off x="0" y="0"/>
-            <a:ext cx="109728" cy="5143500"/>
+            <a:ext cx="9144000" cy="5143500"/>
+          </a:xfrm>
+          <a:prstGeom prst="rect">
+            <a:avLst/>
+          </a:prstGeom>
+          <a:solidFill>
+            <a:srgbClr val="1B2A4A"/>
+          </a:solidFill>
+          <a:ln/>
+        </p:spPr>
+      </p:sp>
+      <p:sp>
+        <p:nvSpPr>
+          <p:cNvPr id="3" name="Shape 1"/>
+          <p:cNvSpPr/>
+          <p:nvPr/>
+        </p:nvSpPr>
+        <p:spPr>
+          <a:xfrm>
+            <a:off x="0" y="4777740"/>
+            <a:ext cx="9144000" cy="365760"/>
           </a:xfrm>
           <a:prstGeom prst="rect">
             <a:avLst/>
@@ -1253,14 +1622,14 @@
       </p:sp>
       <p:sp>
         <p:nvSpPr>
-          <p:cNvPr id="3" name="Text 1"/>
+          <p:cNvPr id="4" name="Text 2"/>
           <p:cNvSpPr/>
           <p:nvPr/>
         </p:nvSpPr>
         <p:spPr>
           <a:xfrm>
             <a:off x="731520" y="1097280"/>
-            <a:ext cx="7772400" cy="1371600"/>
+            <a:ext cx="7680960" cy="457200"/>
           </a:xfrm>
           <a:prstGeom prst="rect">
             <a:avLst/>
@@ -1270,6 +1639,45 @@
         </p:spPr>
         <p:txBody>
           <a:bodyPr wrap="square" rtlCol="0" anchor="ctr"/>
+          <a:lstStyle/>
+          <a:p>
+            <a:pPr indent="0" marL="0">
+              <a:buNone/>
+            </a:pPr>
+            <a:r>
+              <a:rPr lang="en-US" sz="1400" b="1" spc="400" kern="0" dirty="0">
+                <a:solidFill>
+                  <a:srgbClr val="2A9D8F"/>
+                </a:solidFill>
+                <a:latin typeface="Calibri" pitchFamily="34" charset="0"/>
+                <a:ea typeface="Calibri" pitchFamily="34" charset="-122"/>
+                <a:cs typeface="Calibri" pitchFamily="34" charset="-120"/>
+              </a:rPr>
+              <a:t>GRADE 6 SCIENCE</a:t>
+            </a:r>
+            <a:endParaRPr lang="en-US" sz="1400" dirty="0"/>
+          </a:p>
+        </p:txBody>
+      </p:sp>
+      <p:sp>
+        <p:nvSpPr>
+          <p:cNvPr id="5" name="Text 3"/>
+          <p:cNvSpPr/>
+          <p:nvPr/>
+        </p:nvSpPr>
+        <p:spPr>
+          <a:xfrm>
+            <a:off x="731520" y="1645920"/>
+            <a:ext cx="7680960" cy="1463040"/>
+          </a:xfrm>
+          <a:prstGeom prst="rect">
+            <a:avLst/>
+          </a:prstGeom>
+          <a:noFill/>
+          <a:ln/>
+        </p:spPr>
+        <p:txBody>
+          <a:bodyPr wrap="square" rtlCol="0" anchor="t"/>
           <a:lstStyle/>
           <a:p>
             <a:pPr indent="0" marL="0">
@@ -1292,14 +1700,14 @@
       </p:sp>
       <p:sp>
         <p:nvSpPr>
-          <p:cNvPr id="4" name="Text 2"/>
-          <p:cNvSpPr/>
-          <p:nvPr/>
-        </p:nvSpPr>
-        <p:spPr>
-          <a:xfrm>
-            <a:off x="731520" y="2560320"/>
-            <a:ext cx="7772400" cy="548640"/>
+          <p:cNvPr id="6" name="Text 4"/>
+          <p:cNvSpPr/>
+          <p:nvPr/>
+        </p:nvSpPr>
+        <p:spPr>
+          <a:xfrm>
+            <a:off x="731520" y="3200400"/>
+            <a:ext cx="7680960" cy="548640"/>
           </a:xfrm>
           <a:prstGeom prst="rect">
             <a:avLst/>
@@ -1315,15 +1723,15 @@
               <a:buNone/>
             </a:pPr>
             <a:r>
-              <a:rPr lang="en-US" sz="1600" dirty="0">
-                <a:solidFill>
-                  <a:srgbClr val="E9C46A"/>
+              <a:rPr lang="en-US" sz="1600" i="1" dirty="0">
+                <a:solidFill>
+                  <a:srgbClr val="9B9690"/>
                 </a:solidFill>
                 <a:latin typeface="Calibri" pitchFamily="34" charset="0"/>
                 <a:ea typeface="Calibri" pitchFamily="34" charset="-122"/>
                 <a:cs typeface="Calibri" pitchFamily="34" charset="-120"/>
               </a:rPr>
-              <a:t>Grade 6 Science · Mr Zocchi</a:t>
+              <a:t>Where plates meet, things happen</a:t>
             </a:r>
             <a:endParaRPr lang="en-US" sz="1600" dirty="0"/>
           </a:p>
@@ -1331,36 +1739,14 @@
       </p:sp>
       <p:sp>
         <p:nvSpPr>
-          <p:cNvPr id="5" name="Shape 3"/>
-          <p:cNvSpPr/>
-          <p:nvPr/>
-        </p:nvSpPr>
-        <p:spPr>
-          <a:xfrm>
-            <a:off x="731520" y="3474720"/>
-            <a:ext cx="2011680" cy="411480"/>
-          </a:xfrm>
-          <a:prstGeom prst="roundRect">
-            <a:avLst>
-              <a:gd name="adj" fmla="val 17778"/>
-            </a:avLst>
-          </a:prstGeom>
-          <a:solidFill>
-            <a:srgbClr val="2A9D8F"/>
-          </a:solidFill>
-          <a:ln/>
-        </p:spPr>
-      </p:sp>
-      <p:sp>
-        <p:nvSpPr>
-          <p:cNvPr id="6" name="Text 4"/>
-          <p:cNvSpPr/>
-          <p:nvPr/>
-        </p:nvSpPr>
-        <p:spPr>
-          <a:xfrm>
-            <a:off x="731520" y="3474720"/>
-            <a:ext cx="2011680" cy="411480"/>
+          <p:cNvPr id="7" name="Text 5"/>
+          <p:cNvSpPr/>
+          <p:nvPr/>
+        </p:nvSpPr>
+        <p:spPr>
+          <a:xfrm>
+            <a:off x="731520" y="4206240"/>
+            <a:ext cx="3657600" cy="365760"/>
           </a:xfrm>
           <a:prstGeom prst="rect">
             <a:avLst/>
@@ -1372,19 +1758,19 @@
           <a:bodyPr wrap="square" rtlCol="0" anchor="ctr"/>
           <a:lstStyle/>
           <a:p>
-            <a:pPr algn="ctr" indent="0" marL="0">
+            <a:pPr indent="0" marL="0">
               <a:buNone/>
             </a:pPr>
             <a:r>
-              <a:rPr lang="en-US" sz="1200" b="1" dirty="0">
-                <a:solidFill>
-                  <a:srgbClr val="FFFFFF"/>
+              <a:rPr lang="en-US" sz="1200" dirty="0">
+                <a:solidFill>
+                  <a:srgbClr val="6B6660"/>
                 </a:solidFill>
                 <a:latin typeface="Calibri" pitchFamily="34" charset="0"/>
                 <a:ea typeface="Calibri" pitchFamily="34" charset="-122"/>
                 <a:cs typeface="Calibri" pitchFamily="34" charset="-120"/>
               </a:rPr>
-              <a:t>Term 3 · Earth Science</a:t>
+              <a:t>Mr Zocchi</a:t>
             </a:r>
             <a:endParaRPr lang="en-US" sz="1200" dirty="0"/>
           </a:p>
@@ -1401,13 +1787,6 @@
 <file path=ppt/slides/slide2.xml><?xml version="1.0" encoding="utf-8"?>
 <p:sld xmlns:a="http://schemas.openxmlformats.org/drawingml/2006/main" xmlns:r="http://schemas.openxmlformats.org/officeDocument/2006/relationships" xmlns:p="http://schemas.openxmlformats.org/presentationml/2006/main">
   <p:cSld name="Slide 2">
-    <p:bg>
-      <p:bgPr>
-        <a:solidFill>
-          <a:srgbClr val="FAF8F5"/>
-        </a:solidFill>
-      </p:bgPr>
-    </p:bg>
     <p:spTree>
       <p:nvGrpSpPr>
         <p:cNvPr id="1" name=""/>
@@ -1431,13 +1810,13 @@
         <p:spPr>
           <a:xfrm>
             <a:off x="0" y="0"/>
-            <a:ext cx="9144000" cy="54864"/>
-          </a:xfrm>
-          <a:prstGeom prst="rect">
-            <a:avLst/>
-          </a:prstGeom>
-          <a:solidFill>
-            <a:srgbClr val="2A9D8F"/>
+            <a:ext cx="9144000" cy="5143500"/>
+          </a:xfrm>
+          <a:prstGeom prst="rect">
+            <a:avLst/>
+          </a:prstGeom>
+          <a:solidFill>
+            <a:srgbClr val="111D35"/>
           </a:solidFill>
           <a:ln/>
         </p:spPr>
@@ -1450,8 +1829,8 @@
         </p:nvSpPr>
         <p:spPr>
           <a:xfrm>
-            <a:off x="7772400" y="4709160"/>
-            <a:ext cx="1097280" cy="320040"/>
+            <a:off x="6858000" y="182880"/>
+            <a:ext cx="2286000" cy="2743200"/>
           </a:xfrm>
           <a:prstGeom prst="rect">
             <a:avLst/>
@@ -1463,86 +1842,75 @@
           <a:bodyPr wrap="square" rtlCol="0" anchor="ctr"/>
           <a:lstStyle/>
           <a:p>
-            <a:pPr algn="r" indent="0" marL="0">
+            <a:pPr algn="ctr" indent="0" marL="0">
               <a:buNone/>
             </a:pPr>
             <a:r>
-              <a:rPr lang="en-US" sz="900" dirty="0">
-                <a:solidFill>
-                  <a:srgbClr val="6B6660"/>
+              <a:rPr lang="en-US" sz="16000" b="1" dirty="0">
+                <a:solidFill>
+                  <a:srgbClr val="2A9D8F">
+                    <a:alpha val="80000"/>
+                  </a:srgbClr>
+                </a:solidFill>
+                <a:latin typeface="Georgia" pitchFamily="34" charset="0"/>
+                <a:ea typeface="Georgia" pitchFamily="34" charset="-122"/>
+                <a:cs typeface="Georgia" pitchFamily="34" charset="-120"/>
+              </a:rPr>
+              <a:t>?</a:t>
+            </a:r>
+            <a:endParaRPr lang="en-US" sz="16000" dirty="0"/>
+          </a:p>
+        </p:txBody>
+      </p:sp>
+      <p:sp>
+        <p:nvSpPr>
+          <p:cNvPr id="4" name="Text 2"/>
+          <p:cNvSpPr/>
+          <p:nvPr/>
+        </p:nvSpPr>
+        <p:spPr>
+          <a:xfrm>
+            <a:off x="731520" y="548640"/>
+            <a:ext cx="2743200" cy="365760"/>
+          </a:xfrm>
+          <a:prstGeom prst="rect">
+            <a:avLst/>
+          </a:prstGeom>
+          <a:noFill/>
+          <a:ln/>
+        </p:spPr>
+        <p:txBody>
+          <a:bodyPr wrap="square" rtlCol="0" anchor="ctr"/>
+          <a:lstStyle/>
+          <a:p>
+            <a:pPr indent="0" marL="0">
+              <a:buNone/>
+            </a:pPr>
+            <a:r>
+              <a:rPr lang="en-US" sz="1200" b="1" spc="400" kern="0" dirty="0">
+                <a:solidFill>
+                  <a:srgbClr val="2A9D8F"/>
                 </a:solidFill>
                 <a:latin typeface="Calibri" pitchFamily="34" charset="0"/>
                 <a:ea typeface="Calibri" pitchFamily="34" charset="-122"/>
                 <a:cs typeface="Calibri" pitchFamily="34" charset="-120"/>
               </a:rPr>
-              <a:t>2 / 5</a:t>
-            </a:r>
-            <a:endParaRPr lang="en-US" sz="900" dirty="0"/>
-          </a:p>
-        </p:txBody>
-      </p:sp>
-      <p:sp>
-        <p:nvSpPr>
-          <p:cNvPr id="4" name="Shape 2"/>
-          <p:cNvSpPr/>
-          <p:nvPr/>
-        </p:nvSpPr>
-        <p:spPr>
-          <a:xfrm>
-            <a:off x="1371600" y="914400"/>
-            <a:ext cx="6400800" cy="3200400"/>
-          </a:xfrm>
-          <a:prstGeom prst="rect">
-            <a:avLst/>
-          </a:prstGeom>
-          <a:solidFill>
-            <a:srgbClr val="FFFFFF"/>
-          </a:solidFill>
-          <a:ln w="12700">
-            <a:solidFill>
-              <a:srgbClr val="E5E2DC"/>
-            </a:solidFill>
-            <a:prstDash val="solid"/>
-          </a:ln>
-          <a:effectLst>
-            <a:outerShdw sx="100000" sy="100000" kx="0" ky="0" algn="bl" rotWithShape="0" blurRad="50800" dist="25400" dir="8100000">
-              <a:srgbClr val="000000">
-                <a:alpha val="10000"/>
-              </a:srgbClr>
-            </a:outerShdw>
-          </a:effectLst>
-        </p:spPr>
-      </p:sp>
-      <p:sp>
-        <p:nvSpPr>
-          <p:cNvPr id="5" name="Shape 3"/>
-          <p:cNvSpPr/>
-          <p:nvPr/>
-        </p:nvSpPr>
-        <p:spPr>
-          <a:xfrm>
-            <a:off x="1371600" y="914400"/>
-            <a:ext cx="91440" cy="3200400"/>
-          </a:xfrm>
-          <a:prstGeom prst="rect">
-            <a:avLst/>
-          </a:prstGeom>
-          <a:solidFill>
-            <a:srgbClr val="2A9D8F"/>
-          </a:solidFill>
-          <a:ln/>
-        </p:spPr>
-      </p:sp>
-      <p:sp>
-        <p:nvSpPr>
-          <p:cNvPr id="6" name="Text 4"/>
-          <p:cNvSpPr/>
-          <p:nvPr/>
-        </p:nvSpPr>
-        <p:spPr>
-          <a:xfrm>
-            <a:off x="1828800" y="1097280"/>
-            <a:ext cx="5669280" cy="640080"/>
+              <a:t>INQUIRY</a:t>
+            </a:r>
+            <a:endParaRPr lang="en-US" sz="1200" dirty="0"/>
+          </a:p>
+        </p:txBody>
+      </p:sp>
+      <p:sp>
+        <p:nvSpPr>
+          <p:cNvPr id="5" name="Text 3"/>
+          <p:cNvSpPr/>
+          <p:nvPr/>
+        </p:nvSpPr>
+        <p:spPr>
+          <a:xfrm>
+            <a:off x="731520" y="1005840"/>
+            <a:ext cx="6858000" cy="1463040"/>
           </a:xfrm>
           <a:prstGeom prst="rect">
             <a:avLst/>
@@ -1551,37 +1919,37 @@
           <a:ln/>
         </p:spPr>
         <p:txBody>
-          <a:bodyPr wrap="square" rtlCol="0" anchor="ctr"/>
+          <a:bodyPr wrap="square" rtlCol="0" anchor="t"/>
           <a:lstStyle/>
           <a:p>
             <a:pPr indent="0" marL="0">
               <a:buNone/>
             </a:pPr>
             <a:r>
-              <a:rPr lang="en-US" sz="2400" b="1" dirty="0">
-                <a:solidFill>
-                  <a:srgbClr val="1B2A4A"/>
+              <a:rPr lang="en-US" sz="2800" b="1" dirty="0">
+                <a:solidFill>
+                  <a:srgbClr val="FFFFFF"/>
                 </a:solidFill>
                 <a:latin typeface="Georgia" pitchFamily="34" charset="0"/>
                 <a:ea typeface="Georgia" pitchFamily="34" charset="-122"/>
                 <a:cs typeface="Georgia" pitchFamily="34" charset="-120"/>
               </a:rPr>
-              <a:t>Tectonic Plates</a:t>
-            </a:r>
-            <a:endParaRPr lang="en-US" sz="2400" dirty="0"/>
-          </a:p>
-        </p:txBody>
-      </p:sp>
-      <p:sp>
-        <p:nvSpPr>
-          <p:cNvPr id="7" name="Text 5"/>
-          <p:cNvSpPr/>
-          <p:nvPr/>
-        </p:nvSpPr>
-        <p:spPr>
-          <a:xfrm>
-            <a:off x="1828800" y="1828800"/>
-            <a:ext cx="5669280" cy="2011680"/>
+              <a:t>Why does Japan have so many earthquakes, but Germany almost none?</a:t>
+            </a:r>
+            <a:endParaRPr lang="en-US" sz="2800" dirty="0"/>
+          </a:p>
+        </p:txBody>
+      </p:sp>
+      <p:sp>
+        <p:nvSpPr>
+          <p:cNvPr id="6" name="Text 4"/>
+          <p:cNvSpPr/>
+          <p:nvPr/>
+        </p:nvSpPr>
+        <p:spPr>
+          <a:xfrm>
+            <a:off x="731520" y="2560320"/>
+            <a:ext cx="6858000" cy="548640"/>
           </a:xfrm>
           <a:prstGeom prst="rect">
             <a:avLst/>
@@ -1590,27 +1958,168 @@
           <a:ln/>
         </p:spPr>
         <p:txBody>
-          <a:bodyPr wrap="square" rtlCol="0" anchor="t"/>
+          <a:bodyPr wrap="square" rtlCol="0" anchor="ctr"/>
           <a:lstStyle/>
           <a:p>
             <a:pPr indent="0" marL="0">
-              <a:lnSpc>
-                <a:spcPct val="130000"/>
-              </a:lnSpc>
               <a:buNone/>
             </a:pPr>
             <a:r>
-              <a:rPr lang="en-US" sz="1500" dirty="0">
-                <a:solidFill>
-                  <a:srgbClr val="3D3A36"/>
+              <a:rPr lang="en-US" sz="1400" i="1" dirty="0">
+                <a:solidFill>
+                  <a:srgbClr val="9B9690"/>
                 </a:solidFill>
                 <a:latin typeface="Calibri" pitchFamily="34" charset="0"/>
                 <a:ea typeface="Calibri" pitchFamily="34" charset="-122"/>
                 <a:cs typeface="Calibri" pitchFamily="34" charset="-120"/>
               </a:rPr>
-              <a:t>The Earth's crust is broken into large pieces called tectonic plates. These plates float on the semi-liquid mantle and move slowly due to convection currents. Where plates meet, we get earthquakes, volcanoes, and mountains. There are three types of plate boundary.</a:t>
-            </a:r>
-            <a:endParaRPr lang="en-US" sz="1500" dirty="0"/>
+              <a:t>Japan sits on FOUR tectonic plates. Germany sits in the middle of one.</a:t>
+            </a:r>
+            <a:endParaRPr lang="en-US" sz="1400" dirty="0"/>
+          </a:p>
+        </p:txBody>
+      </p:sp>
+      <p:sp>
+        <p:nvSpPr>
+          <p:cNvPr id="7" name="Shape 5"/>
+          <p:cNvSpPr/>
+          <p:nvPr/>
+        </p:nvSpPr>
+        <p:spPr>
+          <a:xfrm>
+            <a:off x="548640" y="3200400"/>
+            <a:ext cx="7315200" cy="1645920"/>
+          </a:xfrm>
+          <a:prstGeom prst="rect">
+            <a:avLst/>
+          </a:prstGeom>
+          <a:solidFill>
+            <a:srgbClr val="243660"/>
+          </a:solidFill>
+          <a:ln/>
+        </p:spPr>
+      </p:sp>
+      <p:sp>
+        <p:nvSpPr>
+          <p:cNvPr id="8" name="Text 6"/>
+          <p:cNvSpPr/>
+          <p:nvPr/>
+        </p:nvSpPr>
+        <p:spPr>
+          <a:xfrm>
+            <a:off x="731520" y="3246120"/>
+            <a:ext cx="3657600" cy="320040"/>
+          </a:xfrm>
+          <a:prstGeom prst="rect">
+            <a:avLst/>
+          </a:prstGeom>
+          <a:noFill/>
+          <a:ln/>
+        </p:spPr>
+        <p:txBody>
+          <a:bodyPr wrap="square" rtlCol="0" anchor="ctr"/>
+          <a:lstStyle/>
+          <a:p>
+            <a:pPr indent="0" marL="0">
+              <a:buNone/>
+            </a:pPr>
+            <a:r>
+              <a:rPr lang="en-US" sz="1100" b="1" spc="200" kern="0" dirty="0">
+                <a:solidFill>
+                  <a:srgbClr val="2A9D8F"/>
+                </a:solidFill>
+                <a:latin typeface="Calibri" pitchFamily="34" charset="0"/>
+                <a:ea typeface="Calibri" pitchFamily="34" charset="-122"/>
+                <a:cs typeface="Calibri" pitchFamily="34" charset="-120"/>
+              </a:rPr>
+              <a:t>Think — Pair — Share</a:t>
+            </a:r>
+            <a:endParaRPr lang="en-US" sz="1100" dirty="0"/>
+          </a:p>
+        </p:txBody>
+      </p:sp>
+      <p:sp>
+        <p:nvSpPr>
+          <p:cNvPr id="9" name="Text 7"/>
+          <p:cNvSpPr/>
+          <p:nvPr/>
+        </p:nvSpPr>
+        <p:spPr>
+          <a:xfrm>
+            <a:off x="731520" y="3566160"/>
+            <a:ext cx="6949440" cy="1188720"/>
+          </a:xfrm>
+          <a:prstGeom prst="rect">
+            <a:avLst/>
+          </a:prstGeom>
+          <a:noFill/>
+          <a:ln/>
+        </p:spPr>
+        <p:txBody>
+          <a:bodyPr wrap="square" rtlCol="0" anchor="ctr"/>
+          <a:lstStyle/>
+          <a:p>
+            <a:pPr marL="342900" indent="-342900">
+              <a:spcAft>
+                <a:spcPts val="600"/>
+              </a:spcAft>
+              <a:buSzPct val="100000"/>
+              <a:buChar char="•"/>
+            </a:pPr>
+            <a:r>
+              <a:rPr lang="en-US" sz="1400" dirty="0">
+                <a:solidFill>
+                  <a:srgbClr val="E5E2DC"/>
+                </a:solidFill>
+                <a:latin typeface="Calibri" pitchFamily="34" charset="0"/>
+                <a:ea typeface="Calibri" pitchFamily="34" charset="-122"/>
+                <a:cs typeface="Calibri" pitchFamily="34" charset="-120"/>
+              </a:rPr>
+              <a:t>What is different about where these countries sit on a plate map?</a:t>
+            </a:r>
+            <a:endParaRPr lang="en-US" sz="1400" dirty="0"/>
+          </a:p>
+          <a:p>
+            <a:pPr marL="342900" indent="-342900">
+              <a:spcAft>
+                <a:spcPts val="600"/>
+              </a:spcAft>
+              <a:buSzPct val="100000"/>
+              <a:buChar char="•"/>
+            </a:pPr>
+            <a:r>
+              <a:rPr lang="en-US" sz="1400" dirty="0">
+                <a:solidFill>
+                  <a:srgbClr val="E5E2DC"/>
+                </a:solidFill>
+                <a:latin typeface="Calibri" pitchFamily="34" charset="0"/>
+                <a:ea typeface="Calibri" pitchFamily="34" charset="-122"/>
+                <a:cs typeface="Calibri" pitchFamily="34" charset="-120"/>
+              </a:rPr>
+              <a:t>What happens where two plates touch?</a:t>
+            </a:r>
+            <a:endParaRPr lang="en-US" sz="1400" dirty="0"/>
+          </a:p>
+          <a:p>
+            <a:pPr marL="342900" indent="-342900">
+              <a:spcAft>
+                <a:spcPts val="600"/>
+              </a:spcAft>
+              <a:buSzPct val="100000"/>
+              <a:buChar char="•"/>
+            </a:pPr>
+            <a:r>
+              <a:rPr lang="en-US" sz="1400" dirty="0">
+                <a:solidFill>
+                  <a:srgbClr val="E5E2DC"/>
+                </a:solidFill>
+                <a:latin typeface="Calibri" pitchFamily="34" charset="0"/>
+                <a:ea typeface="Calibri" pitchFamily="34" charset="-122"/>
+                <a:cs typeface="Calibri" pitchFamily="34" charset="-120"/>
+              </a:rPr>
+              <a:t>Is Nanjing near a plate boundary?</a:t>
+            </a:r>
+            <a:endParaRPr lang="en-US" sz="1400" dirty="0"/>
           </a:p>
         </p:txBody>
       </p:sp>
@@ -1655,7 +2164,27 @@
         <p:spPr>
           <a:xfrm>
             <a:off x="0" y="0"/>
-            <a:ext cx="9144000" cy="54864"/>
+            <a:ext cx="9144000" cy="822960"/>
+          </a:xfrm>
+          <a:prstGeom prst="rect">
+            <a:avLst/>
+          </a:prstGeom>
+          <a:solidFill>
+            <a:srgbClr val="FFFFFF"/>
+          </a:solidFill>
+          <a:ln/>
+        </p:spPr>
+      </p:sp>
+      <p:sp>
+        <p:nvSpPr>
+          <p:cNvPr id="3" name="Shape 1"/>
+          <p:cNvSpPr/>
+          <p:nvPr/>
+        </p:nvSpPr>
+        <p:spPr>
+          <a:xfrm>
+            <a:off x="0" y="795528"/>
+            <a:ext cx="9144000" cy="27432"/>
           </a:xfrm>
           <a:prstGeom prst="rect">
             <a:avLst/>
@@ -1668,14 +2197,14 @@
       </p:sp>
       <p:sp>
         <p:nvSpPr>
-          <p:cNvPr id="3" name="Text 1"/>
-          <p:cNvSpPr/>
-          <p:nvPr/>
-        </p:nvSpPr>
-        <p:spPr>
-          <a:xfrm>
-            <a:off x="7772400" y="4709160"/>
-            <a:ext cx="1097280" cy="320040"/>
+          <p:cNvPr id="4" name="Text 2"/>
+          <p:cNvSpPr/>
+          <p:nvPr/>
+        </p:nvSpPr>
+        <p:spPr>
+          <a:xfrm>
+            <a:off x="640080" y="91440"/>
+            <a:ext cx="7863840" cy="640080"/>
           </a:xfrm>
           <a:prstGeom prst="rect">
             <a:avLst/>
@@ -1684,93 +2213,155 @@
           <a:ln/>
         </p:spPr>
         <p:txBody>
+          <a:bodyPr wrap="square" lIns="0" tIns="0" rIns="0" bIns="0" rtlCol="0" anchor="ctr"/>
+          <a:lstStyle/>
+          <a:p>
+            <a:pPr indent="0" marL="0">
+              <a:buNone/>
+            </a:pPr>
+            <a:r>
+              <a:rPr lang="en-US" sz="2200" b="1" dirty="0">
+                <a:solidFill>
+                  <a:srgbClr val="1B2A4A"/>
+                </a:solidFill>
+                <a:latin typeface="Georgia" pitchFamily="34" charset="0"/>
+                <a:ea typeface="Georgia" pitchFamily="34" charset="-122"/>
+                <a:cs typeface="Georgia" pitchFamily="34" charset="-120"/>
+              </a:rPr>
+              <a:t>Three Types of Boundary</a:t>
+            </a:r>
+            <a:endParaRPr lang="en-US" sz="2200" dirty="0"/>
+          </a:p>
+        </p:txBody>
+      </p:sp>
+      <p:sp>
+        <p:nvSpPr>
+          <p:cNvPr id="5" name="Text 3"/>
+          <p:cNvSpPr/>
+          <p:nvPr/>
+        </p:nvSpPr>
+        <p:spPr>
+          <a:xfrm>
+            <a:off x="640080" y="1005840"/>
+            <a:ext cx="7863840" cy="2926080"/>
+          </a:xfrm>
+          <a:prstGeom prst="rect">
+            <a:avLst/>
+          </a:prstGeom>
+          <a:noFill/>
+          <a:ln/>
+        </p:spPr>
+        <p:txBody>
           <a:bodyPr wrap="square" rtlCol="0" anchor="ctr"/>
           <a:lstStyle/>
           <a:p>
-            <a:pPr algn="r" indent="0" marL="0">
-              <a:buNone/>
-            </a:pPr>
-            <a:r>
-              <a:rPr lang="en-US" sz="900" dirty="0">
-                <a:solidFill>
-                  <a:srgbClr val="6B6660"/>
+            <a:pPr marL="342900" indent="-342900">
+              <a:spcAft>
+                <a:spcPts val="800"/>
+              </a:spcAft>
+              <a:buSzPct val="100000"/>
+              <a:buChar char="•"/>
+            </a:pPr>
+            <a:r>
+              <a:rPr lang="en-US" sz="1600" dirty="0">
+                <a:solidFill>
+                  <a:srgbClr val="3D3A36"/>
                 </a:solidFill>
                 <a:latin typeface="Calibri" pitchFamily="34" charset="0"/>
                 <a:ea typeface="Calibri" pitchFamily="34" charset="-122"/>
                 <a:cs typeface="Calibri" pitchFamily="34" charset="-120"/>
               </a:rPr>
-              <a:t>3 / 5</a:t>
-            </a:r>
-            <a:endParaRPr lang="en-US" sz="900" dirty="0"/>
-          </a:p>
-        </p:txBody>
-      </p:sp>
-      <p:sp>
-        <p:nvSpPr>
-          <p:cNvPr id="4" name="Text 2"/>
-          <p:cNvSpPr/>
-          <p:nvPr/>
-        </p:nvSpPr>
-        <p:spPr>
-          <a:xfrm>
-            <a:off x="457200" y="274320"/>
-            <a:ext cx="8229600" cy="640080"/>
-          </a:xfrm>
-          <a:prstGeom prst="rect">
-            <a:avLst/>
-          </a:prstGeom>
-          <a:noFill/>
-          <a:ln/>
-        </p:spPr>
-        <p:txBody>
-          <a:bodyPr wrap="square" rtlCol="0" anchor="ctr"/>
-          <a:lstStyle/>
-          <a:p>
-            <a:pPr indent="0" marL="0">
-              <a:buNone/>
-            </a:pPr>
-            <a:r>
-              <a:rPr lang="en-US" sz="2600" b="1" dirty="0">
-                <a:solidFill>
-                  <a:srgbClr val="1B2A4A"/>
-                </a:solidFill>
-                <a:latin typeface="Georgia" pitchFamily="34" charset="0"/>
-                <a:ea typeface="Georgia" pitchFamily="34" charset="-122"/>
-                <a:cs typeface="Georgia" pitchFamily="34" charset="-120"/>
-              </a:rPr>
-              <a:t>Three Types of Boundary</a:t>
-            </a:r>
-            <a:endParaRPr lang="en-US" sz="2600" dirty="0"/>
-          </a:p>
-        </p:txBody>
-      </p:sp>
-      <p:sp>
-        <p:nvSpPr>
-          <p:cNvPr id="5" name="Shape 3"/>
-          <p:cNvSpPr/>
-          <p:nvPr/>
-        </p:nvSpPr>
-        <p:spPr>
-          <a:xfrm>
-            <a:off x="457200" y="1188720"/>
-            <a:ext cx="2560320" cy="1828800"/>
-          </a:xfrm>
-          <a:prstGeom prst="rect">
-            <a:avLst/>
-          </a:prstGeom>
-          <a:solidFill>
-            <a:srgbClr val="FFFFFF"/>
-          </a:solidFill>
-          <a:ln w="12700">
-            <a:solidFill>
-              <a:srgbClr val="E5E2DC"/>
-            </a:solidFill>
-            <a:prstDash val="solid"/>
-          </a:ln>
+              <a:t>Convergent — plates move TOWARD each other (collision).</a:t>
+            </a:r>
+            <a:endParaRPr lang="en-US" sz="1600" dirty="0"/>
+          </a:p>
+          <a:p>
+            <a:pPr marL="342900" indent="-342900">
+              <a:spcAft>
+                <a:spcPts val="800"/>
+              </a:spcAft>
+              <a:buSzPct val="100000"/>
+              <a:buChar char="•"/>
+            </a:pPr>
+            <a:r>
+              <a:rPr lang="en-US" sz="1600" dirty="0">
+                <a:solidFill>
+                  <a:srgbClr val="3D3A36"/>
+                </a:solidFill>
+                <a:latin typeface="Calibri" pitchFamily="34" charset="0"/>
+                <a:ea typeface="Calibri" pitchFamily="34" charset="-122"/>
+                <a:cs typeface="Calibri" pitchFamily="34" charset="-120"/>
+              </a:rPr>
+              <a:t>Divergent — plates move AWAY from each other (spreading).</a:t>
+            </a:r>
+            <a:endParaRPr lang="en-US" sz="1600" dirty="0"/>
+          </a:p>
+          <a:p>
+            <a:pPr marL="342900" indent="-342900">
+              <a:spcAft>
+                <a:spcPts val="800"/>
+              </a:spcAft>
+              <a:buSzPct val="100000"/>
+              <a:buChar char="•"/>
+            </a:pPr>
+            <a:r>
+              <a:rPr lang="en-US" sz="1600" dirty="0">
+                <a:solidFill>
+                  <a:srgbClr val="3D3A36"/>
+                </a:solidFill>
+                <a:latin typeface="Calibri" pitchFamily="34" charset="0"/>
+                <a:ea typeface="Calibri" pitchFamily="34" charset="-122"/>
+                <a:cs typeface="Calibri" pitchFamily="34" charset="-120"/>
+              </a:rPr>
+              <a:t>Transform — plates slide PAST each other (grinding).</a:t>
+            </a:r>
+            <a:endParaRPr lang="en-US" sz="1600" dirty="0"/>
+          </a:p>
+          <a:p>
+            <a:pPr marL="342900" indent="-342900">
+              <a:spcAft>
+                <a:spcPts val="800"/>
+              </a:spcAft>
+              <a:buSzPct val="100000"/>
+              <a:buChar char="•"/>
+            </a:pPr>
+            <a:r>
+              <a:rPr lang="en-US" sz="1600" dirty="0">
+                <a:solidFill>
+                  <a:srgbClr val="3D3A36"/>
+                </a:solidFill>
+                <a:latin typeface="Calibri" pitchFamily="34" charset="0"/>
+                <a:ea typeface="Calibri" pitchFamily="34" charset="-122"/>
+                <a:cs typeface="Calibri" pitchFamily="34" charset="-120"/>
+              </a:rPr>
+              <a:t>Most earthquakes and volcanoes happen at plate boundaries.</a:t>
+            </a:r>
+            <a:endParaRPr lang="en-US" sz="1600" dirty="0"/>
+          </a:p>
+        </p:txBody>
+      </p:sp>
+      <p:sp>
+        <p:nvSpPr>
+          <p:cNvPr id="6" name="Shape 4"/>
+          <p:cNvSpPr/>
+          <p:nvPr/>
+        </p:nvSpPr>
+        <p:spPr>
+          <a:xfrm>
+            <a:off x="640080" y="4114800"/>
+            <a:ext cx="7863840" cy="731520"/>
+          </a:xfrm>
+          <a:prstGeom prst="rect">
+            <a:avLst/>
+          </a:prstGeom>
+          <a:solidFill>
+            <a:srgbClr val="E8F5F3"/>
+          </a:solidFill>
+          <a:ln/>
           <a:effectLst>
-            <a:outerShdw sx="100000" sy="100000" kx="0" ky="0" algn="bl" rotWithShape="0" blurRad="50800" dist="25400" dir="8100000">
+            <a:outerShdw sx="100000" sy="100000" kx="0" ky="0" algn="bl" rotWithShape="0" blurRad="76200" dist="25400" dir="8100000">
               <a:srgbClr val="000000">
-                <a:alpha val="10000"/>
+                <a:alpha val="12000"/>
               </a:srgbClr>
             </a:outerShdw>
           </a:effectLst>
@@ -1778,14 +2369,14 @@
       </p:sp>
       <p:sp>
         <p:nvSpPr>
-          <p:cNvPr id="6" name="Shape 4"/>
-          <p:cNvSpPr/>
-          <p:nvPr/>
-        </p:nvSpPr>
-        <p:spPr>
-          <a:xfrm>
-            <a:off x="457200" y="1188720"/>
-            <a:ext cx="2560320" cy="54864"/>
+          <p:cNvPr id="7" name="Shape 5"/>
+          <p:cNvSpPr/>
+          <p:nvPr/>
+        </p:nvSpPr>
+        <p:spPr>
+          <a:xfrm>
+            <a:off x="640080" y="4114800"/>
+            <a:ext cx="64008" cy="731520"/>
           </a:xfrm>
           <a:prstGeom prst="rect">
             <a:avLst/>
@@ -1798,14 +2389,14 @@
       </p:sp>
       <p:sp>
         <p:nvSpPr>
-          <p:cNvPr id="7" name="Text 5"/>
-          <p:cNvSpPr/>
-          <p:nvPr/>
-        </p:nvSpPr>
-        <p:spPr>
-          <a:xfrm>
-            <a:off x="594360" y="1325880"/>
-            <a:ext cx="2286000" cy="365760"/>
+          <p:cNvPr id="8" name="Text 6"/>
+          <p:cNvSpPr/>
+          <p:nvPr/>
+        </p:nvSpPr>
+        <p:spPr>
+          <a:xfrm>
+            <a:off x="914400" y="4160520"/>
+            <a:ext cx="7406640" cy="640080"/>
           </a:xfrm>
           <a:prstGeom prst="rect">
             <a:avLst/>
@@ -1821,316 +2412,17 @@
               <a:buNone/>
             </a:pPr>
             <a:r>
-              <a:rPr lang="en-US" sz="1400" b="1" dirty="0">
-                <a:solidFill>
-                  <a:srgbClr val="1B2A4A"/>
+              <a:rPr lang="en-US" sz="1300" i="1" dirty="0">
+                <a:solidFill>
+                  <a:srgbClr val="3D3A36"/>
                 </a:solidFill>
                 <a:latin typeface="Calibri" pitchFamily="34" charset="0"/>
                 <a:ea typeface="Calibri" pitchFamily="34" charset="-122"/>
                 <a:cs typeface="Calibri" pitchFamily="34" charset="-120"/>
               </a:rPr>
-              <a:t>Divergent</a:t>
-            </a:r>
-            <a:endParaRPr lang="en-US" sz="1400" dirty="0"/>
-          </a:p>
-        </p:txBody>
-      </p:sp>
-      <p:sp>
-        <p:nvSpPr>
-          <p:cNvPr id="8" name="Text 6"/>
-          <p:cNvSpPr/>
-          <p:nvPr/>
-        </p:nvSpPr>
-        <p:spPr>
-          <a:xfrm>
-            <a:off x="594360" y="1737360"/>
-            <a:ext cx="2286000" cy="1097280"/>
-          </a:xfrm>
-          <a:prstGeom prst="rect">
-            <a:avLst/>
-          </a:prstGeom>
-          <a:noFill/>
-          <a:ln/>
-        </p:spPr>
-        <p:txBody>
-          <a:bodyPr wrap="square" rtlCol="0" anchor="t"/>
-          <a:lstStyle/>
-          <a:p>
-            <a:pPr indent="0" marL="0">
-              <a:buNone/>
-            </a:pPr>
-            <a:r>
-              <a:rPr lang="en-US" sz="1100" dirty="0">
-                <a:solidFill>
-                  <a:srgbClr val="3D3A36"/>
-                </a:solidFill>
-                <a:latin typeface="Calibri" pitchFamily="34" charset="0"/>
-                <a:ea typeface="Calibri" pitchFamily="34" charset="-122"/>
-                <a:cs typeface="Calibri" pitchFamily="34" charset="-120"/>
-              </a:rPr>
-              <a:t>Plates move APART. Magma rises to fill the gap, creating new crust. Example: Mid-Atlantic Ridge. Features: rift valleys, volcanic islands, sea-floor spreading.</a:t>
-            </a:r>
-            <a:endParaRPr lang="en-US" sz="1100" dirty="0"/>
-          </a:p>
-        </p:txBody>
-      </p:sp>
-      <p:sp>
-        <p:nvSpPr>
-          <p:cNvPr id="9" name="Shape 7"/>
-          <p:cNvSpPr/>
-          <p:nvPr/>
-        </p:nvSpPr>
-        <p:spPr>
-          <a:xfrm>
-            <a:off x="3291840" y="1188720"/>
-            <a:ext cx="2560320" cy="1828800"/>
-          </a:xfrm>
-          <a:prstGeom prst="rect">
-            <a:avLst/>
-          </a:prstGeom>
-          <a:solidFill>
-            <a:srgbClr val="FFFFFF"/>
-          </a:solidFill>
-          <a:ln w="12700">
-            <a:solidFill>
-              <a:srgbClr val="E5E2DC"/>
-            </a:solidFill>
-            <a:prstDash val="solid"/>
-          </a:ln>
-          <a:effectLst>
-            <a:outerShdw sx="100000" sy="100000" kx="0" ky="0" algn="bl" rotWithShape="0" blurRad="50800" dist="25400" dir="8100000">
-              <a:srgbClr val="000000">
-                <a:alpha val="10000"/>
-              </a:srgbClr>
-            </a:outerShdw>
-          </a:effectLst>
-        </p:spPr>
-      </p:sp>
-      <p:sp>
-        <p:nvSpPr>
-          <p:cNvPr id="10" name="Shape 8"/>
-          <p:cNvSpPr/>
-          <p:nvPr/>
-        </p:nvSpPr>
-        <p:spPr>
-          <a:xfrm>
-            <a:off x="3291840" y="1188720"/>
-            <a:ext cx="2560320" cy="54864"/>
-          </a:xfrm>
-          <a:prstGeom prst="rect">
-            <a:avLst/>
-          </a:prstGeom>
-          <a:solidFill>
-            <a:srgbClr val="2A9D8F"/>
-          </a:solidFill>
-          <a:ln/>
-        </p:spPr>
-      </p:sp>
-      <p:sp>
-        <p:nvSpPr>
-          <p:cNvPr id="11" name="Text 9"/>
-          <p:cNvSpPr/>
-          <p:nvPr/>
-        </p:nvSpPr>
-        <p:spPr>
-          <a:xfrm>
-            <a:off x="3429000" y="1325880"/>
-            <a:ext cx="2286000" cy="365760"/>
-          </a:xfrm>
-          <a:prstGeom prst="rect">
-            <a:avLst/>
-          </a:prstGeom>
-          <a:noFill/>
-          <a:ln/>
-        </p:spPr>
-        <p:txBody>
-          <a:bodyPr wrap="square" rtlCol="0" anchor="ctr"/>
-          <a:lstStyle/>
-          <a:p>
-            <a:pPr indent="0" marL="0">
-              <a:buNone/>
-            </a:pPr>
-            <a:r>
-              <a:rPr lang="en-US" sz="1400" b="1" dirty="0">
-                <a:solidFill>
-                  <a:srgbClr val="1B2A4A"/>
-                </a:solidFill>
-                <a:latin typeface="Calibri" pitchFamily="34" charset="0"/>
-                <a:ea typeface="Calibri" pitchFamily="34" charset="-122"/>
-                <a:cs typeface="Calibri" pitchFamily="34" charset="-120"/>
-              </a:rPr>
-              <a:t>Convergent</a:t>
-            </a:r>
-            <a:endParaRPr lang="en-US" sz="1400" dirty="0"/>
-          </a:p>
-        </p:txBody>
-      </p:sp>
-      <p:sp>
-        <p:nvSpPr>
-          <p:cNvPr id="12" name="Text 10"/>
-          <p:cNvSpPr/>
-          <p:nvPr/>
-        </p:nvSpPr>
-        <p:spPr>
-          <a:xfrm>
-            <a:off x="3429000" y="1737360"/>
-            <a:ext cx="2286000" cy="1097280"/>
-          </a:xfrm>
-          <a:prstGeom prst="rect">
-            <a:avLst/>
-          </a:prstGeom>
-          <a:noFill/>
-          <a:ln/>
-        </p:spPr>
-        <p:txBody>
-          <a:bodyPr wrap="square" rtlCol="0" anchor="t"/>
-          <a:lstStyle/>
-          <a:p>
-            <a:pPr indent="0" marL="0">
-              <a:buNone/>
-            </a:pPr>
-            <a:r>
-              <a:rPr lang="en-US" sz="1100" dirty="0">
-                <a:solidFill>
-                  <a:srgbClr val="3D3A36"/>
-                </a:solidFill>
-                <a:latin typeface="Calibri" pitchFamily="34" charset="0"/>
-                <a:ea typeface="Calibri" pitchFamily="34" charset="-122"/>
-                <a:cs typeface="Calibri" pitchFamily="34" charset="-120"/>
-              </a:rPr>
-              <a:t>Plates push TOGETHER. If oceanic meets continental, the denser oceanic plate subducts (sinks under). Creates deep trenches, mountains, and explosive volcanoes.</a:t>
-            </a:r>
-            <a:endParaRPr lang="en-US" sz="1100" dirty="0"/>
-          </a:p>
-        </p:txBody>
-      </p:sp>
-      <p:sp>
-        <p:nvSpPr>
-          <p:cNvPr id="13" name="Shape 11"/>
-          <p:cNvSpPr/>
-          <p:nvPr/>
-        </p:nvSpPr>
-        <p:spPr>
-          <a:xfrm>
-            <a:off x="6126480" y="1188720"/>
-            <a:ext cx="2560320" cy="1828800"/>
-          </a:xfrm>
-          <a:prstGeom prst="rect">
-            <a:avLst/>
-          </a:prstGeom>
-          <a:solidFill>
-            <a:srgbClr val="FFFFFF"/>
-          </a:solidFill>
-          <a:ln w="12700">
-            <a:solidFill>
-              <a:srgbClr val="E5E2DC"/>
-            </a:solidFill>
-            <a:prstDash val="solid"/>
-          </a:ln>
-          <a:effectLst>
-            <a:outerShdw sx="100000" sy="100000" kx="0" ky="0" algn="bl" rotWithShape="0" blurRad="50800" dist="25400" dir="8100000">
-              <a:srgbClr val="000000">
-                <a:alpha val="10000"/>
-              </a:srgbClr>
-            </a:outerShdw>
-          </a:effectLst>
-        </p:spPr>
-      </p:sp>
-      <p:sp>
-        <p:nvSpPr>
-          <p:cNvPr id="14" name="Shape 12"/>
-          <p:cNvSpPr/>
-          <p:nvPr/>
-        </p:nvSpPr>
-        <p:spPr>
-          <a:xfrm>
-            <a:off x="6126480" y="1188720"/>
-            <a:ext cx="2560320" cy="54864"/>
-          </a:xfrm>
-          <a:prstGeom prst="rect">
-            <a:avLst/>
-          </a:prstGeom>
-          <a:solidFill>
-            <a:srgbClr val="2A9D8F"/>
-          </a:solidFill>
-          <a:ln/>
-        </p:spPr>
-      </p:sp>
-      <p:sp>
-        <p:nvSpPr>
-          <p:cNvPr id="15" name="Text 13"/>
-          <p:cNvSpPr/>
-          <p:nvPr/>
-        </p:nvSpPr>
-        <p:spPr>
-          <a:xfrm>
-            <a:off x="6263640" y="1325880"/>
-            <a:ext cx="2286000" cy="365760"/>
-          </a:xfrm>
-          <a:prstGeom prst="rect">
-            <a:avLst/>
-          </a:prstGeom>
-          <a:noFill/>
-          <a:ln/>
-        </p:spPr>
-        <p:txBody>
-          <a:bodyPr wrap="square" rtlCol="0" anchor="ctr"/>
-          <a:lstStyle/>
-          <a:p>
-            <a:pPr indent="0" marL="0">
-              <a:buNone/>
-            </a:pPr>
-            <a:r>
-              <a:rPr lang="en-US" sz="1400" b="1" dirty="0">
-                <a:solidFill>
-                  <a:srgbClr val="1B2A4A"/>
-                </a:solidFill>
-                <a:latin typeface="Calibri" pitchFamily="34" charset="0"/>
-                <a:ea typeface="Calibri" pitchFamily="34" charset="-122"/>
-                <a:cs typeface="Calibri" pitchFamily="34" charset="-120"/>
-              </a:rPr>
-              <a:t>Transform</a:t>
-            </a:r>
-            <a:endParaRPr lang="en-US" sz="1400" dirty="0"/>
-          </a:p>
-        </p:txBody>
-      </p:sp>
-      <p:sp>
-        <p:nvSpPr>
-          <p:cNvPr id="16" name="Text 14"/>
-          <p:cNvSpPr/>
-          <p:nvPr/>
-        </p:nvSpPr>
-        <p:spPr>
-          <a:xfrm>
-            <a:off x="6263640" y="1737360"/>
-            <a:ext cx="2286000" cy="1097280"/>
-          </a:xfrm>
-          <a:prstGeom prst="rect">
-            <a:avLst/>
-          </a:prstGeom>
-          <a:noFill/>
-          <a:ln/>
-        </p:spPr>
-        <p:txBody>
-          <a:bodyPr wrap="square" rtlCol="0" anchor="t"/>
-          <a:lstStyle/>
-          <a:p>
-            <a:pPr indent="0" marL="0">
-              <a:buNone/>
-            </a:pPr>
-            <a:r>
-              <a:rPr lang="en-US" sz="1100" dirty="0">
-                <a:solidFill>
-                  <a:srgbClr val="3D3A36"/>
-                </a:solidFill>
-                <a:latin typeface="Calibri" pitchFamily="34" charset="0"/>
-                <a:ea typeface="Calibri" pitchFamily="34" charset="-122"/>
-                <a:cs typeface="Calibri" pitchFamily="34" charset="-120"/>
-              </a:rPr>
-              <a:t>Plates slide PAST each other. No crust is created or destroyed. Friction causes powerful earthquakes. Example: San Andreas Fault, California.</a:t>
-            </a:r>
-            <a:endParaRPr lang="en-US" sz="1100" dirty="0"/>
+              <a:t>The boundary type determines what landforms are created.</a:t>
+            </a:r>
+            <a:endParaRPr lang="en-US" sz="1300" dirty="0"/>
           </a:p>
         </p:txBody>
       </p:sp>
@@ -2175,7 +2467,27 @@
         <p:spPr>
           <a:xfrm>
             <a:off x="0" y="0"/>
-            <a:ext cx="9144000" cy="54864"/>
+            <a:ext cx="9144000" cy="822960"/>
+          </a:xfrm>
+          <a:prstGeom prst="rect">
+            <a:avLst/>
+          </a:prstGeom>
+          <a:solidFill>
+            <a:srgbClr val="FFFFFF"/>
+          </a:solidFill>
+          <a:ln/>
+        </p:spPr>
+      </p:sp>
+      <p:sp>
+        <p:nvSpPr>
+          <p:cNvPr id="3" name="Shape 1"/>
+          <p:cNvSpPr/>
+          <p:nvPr/>
+        </p:nvSpPr>
+        <p:spPr>
+          <a:xfrm>
+            <a:off x="0" y="795528"/>
+            <a:ext cx="9144000" cy="27432"/>
           </a:xfrm>
           <a:prstGeom prst="rect">
             <a:avLst/>
@@ -2188,14 +2500,14 @@
       </p:sp>
       <p:sp>
         <p:nvSpPr>
-          <p:cNvPr id="3" name="Text 1"/>
-          <p:cNvSpPr/>
-          <p:nvPr/>
-        </p:nvSpPr>
-        <p:spPr>
-          <a:xfrm>
-            <a:off x="7772400" y="4709160"/>
-            <a:ext cx="1097280" cy="320040"/>
+          <p:cNvPr id="4" name="Text 2"/>
+          <p:cNvSpPr/>
+          <p:nvPr/>
+        </p:nvSpPr>
+        <p:spPr>
+          <a:xfrm>
+            <a:off x="640080" y="91440"/>
+            <a:ext cx="7863840" cy="640080"/>
           </a:xfrm>
           <a:prstGeom prst="rect">
             <a:avLst/>
@@ -2204,37 +2516,123 @@
           <a:ln/>
         </p:spPr>
         <p:txBody>
+          <a:bodyPr wrap="square" lIns="0" tIns="0" rIns="0" bIns="0" rtlCol="0" anchor="ctr"/>
+          <a:lstStyle/>
+          <a:p>
+            <a:pPr indent="0" marL="0">
+              <a:buNone/>
+            </a:pPr>
+            <a:r>
+              <a:rPr lang="en-US" sz="2200" b="1" dirty="0">
+                <a:solidFill>
+                  <a:srgbClr val="1B2A4A"/>
+                </a:solidFill>
+                <a:latin typeface="Georgia" pitchFamily="34" charset="0"/>
+                <a:ea typeface="Georgia" pitchFamily="34" charset="-122"/>
+                <a:cs typeface="Georgia" pitchFamily="34" charset="-120"/>
+              </a:rPr>
+              <a:t>Convergent Boundaries</a:t>
+            </a:r>
+            <a:endParaRPr lang="en-US" sz="2200" dirty="0"/>
+          </a:p>
+        </p:txBody>
+      </p:sp>
+      <p:sp>
+        <p:nvSpPr>
+          <p:cNvPr id="5" name="Shape 3"/>
+          <p:cNvSpPr/>
+          <p:nvPr/>
+        </p:nvSpPr>
+        <p:spPr>
+          <a:xfrm>
+            <a:off x="457200" y="1005840"/>
+            <a:ext cx="3931920" cy="3657600"/>
+          </a:xfrm>
+          <a:prstGeom prst="rect">
+            <a:avLst/>
+          </a:prstGeom>
+          <a:solidFill>
+            <a:srgbClr val="FFFFFF"/>
+          </a:solidFill>
+          <a:ln/>
+          <a:effectLst>
+            <a:outerShdw sx="100000" sy="100000" kx="0" ky="0" algn="bl" rotWithShape="0" blurRad="76200" dist="25400" dir="8100000">
+              <a:srgbClr val="000000">
+                <a:alpha val="12000"/>
+              </a:srgbClr>
+            </a:outerShdw>
+          </a:effectLst>
+        </p:spPr>
+      </p:sp>
+      <p:sp>
+        <p:nvSpPr>
+          <p:cNvPr id="6" name="Shape 4"/>
+          <p:cNvSpPr/>
+          <p:nvPr/>
+        </p:nvSpPr>
+        <p:spPr>
+          <a:xfrm>
+            <a:off x="457200" y="1005840"/>
+            <a:ext cx="3931920" cy="64008"/>
+          </a:xfrm>
+          <a:prstGeom prst="rect">
+            <a:avLst/>
+          </a:prstGeom>
+          <a:solidFill>
+            <a:srgbClr val="2A9D8F"/>
+          </a:solidFill>
+          <a:ln/>
+        </p:spPr>
+      </p:sp>
+      <p:sp>
+        <p:nvSpPr>
+          <p:cNvPr id="7" name="Text 5"/>
+          <p:cNvSpPr/>
+          <p:nvPr/>
+        </p:nvSpPr>
+        <p:spPr>
+          <a:xfrm>
+            <a:off x="640080" y="1188720"/>
+            <a:ext cx="3566160" cy="457200"/>
+          </a:xfrm>
+          <a:prstGeom prst="rect">
+            <a:avLst/>
+          </a:prstGeom>
+          <a:noFill/>
+          <a:ln/>
+        </p:spPr>
+        <p:txBody>
           <a:bodyPr wrap="square" rtlCol="0" anchor="ctr"/>
           <a:lstStyle/>
           <a:p>
-            <a:pPr algn="r" indent="0" marL="0">
+            <a:pPr indent="0" marL="0">
               <a:buNone/>
             </a:pPr>
             <a:r>
-              <a:rPr lang="en-US" sz="900" dirty="0">
-                <a:solidFill>
-                  <a:srgbClr val="6B6660"/>
+              <a:rPr lang="en-US" sz="1600" b="1" dirty="0">
+                <a:solidFill>
+                  <a:srgbClr val="2A9D8F"/>
                 </a:solidFill>
                 <a:latin typeface="Calibri" pitchFamily="34" charset="0"/>
                 <a:ea typeface="Calibri" pitchFamily="34" charset="-122"/>
                 <a:cs typeface="Calibri" pitchFamily="34" charset="-120"/>
               </a:rPr>
-              <a:t>4 / 5</a:t>
-            </a:r>
-            <a:endParaRPr lang="en-US" sz="900" dirty="0"/>
-          </a:p>
-        </p:txBody>
-      </p:sp>
-      <p:sp>
-        <p:nvSpPr>
-          <p:cNvPr id="4" name="Text 2"/>
-          <p:cNvSpPr/>
-          <p:nvPr/>
-        </p:nvSpPr>
-        <p:spPr>
-          <a:xfrm>
-            <a:off x="457200" y="274320"/>
-            <a:ext cx="8229600" cy="640080"/>
+              <a:t>What Happens</a:t>
+            </a:r>
+            <a:endParaRPr lang="en-US" sz="1600" dirty="0"/>
+          </a:p>
+        </p:txBody>
+      </p:sp>
+      <p:sp>
+        <p:nvSpPr>
+          <p:cNvPr id="8" name="Text 6"/>
+          <p:cNvSpPr/>
+          <p:nvPr/>
+        </p:nvSpPr>
+        <p:spPr>
+          <a:xfrm>
+            <a:off x="640080" y="1691640"/>
+            <a:ext cx="3566160" cy="2743200"/>
           </a:xfrm>
           <a:prstGeom prst="rect">
             <a:avLst/>
@@ -2244,45 +2642,6 @@
         </p:spPr>
         <p:txBody>
           <a:bodyPr wrap="square" rtlCol="0" anchor="ctr"/>
-          <a:lstStyle/>
-          <a:p>
-            <a:pPr indent="0" marL="0">
-              <a:buNone/>
-            </a:pPr>
-            <a:r>
-              <a:rPr lang="en-US" sz="2600" b="1" dirty="0">
-                <a:solidFill>
-                  <a:srgbClr val="1B2A4A"/>
-                </a:solidFill>
-                <a:latin typeface="Georgia" pitchFamily="34" charset="0"/>
-                <a:ea typeface="Georgia" pitchFamily="34" charset="-122"/>
-                <a:cs typeface="Georgia" pitchFamily="34" charset="-120"/>
-              </a:rPr>
-              <a:t>Convergent Boundaries in Detail</a:t>
-            </a:r>
-            <a:endParaRPr lang="en-US" sz="2600" dirty="0"/>
-          </a:p>
-        </p:txBody>
-      </p:sp>
-      <p:sp>
-        <p:nvSpPr>
-          <p:cNvPr id="5" name="Text 3"/>
-          <p:cNvSpPr/>
-          <p:nvPr/>
-        </p:nvSpPr>
-        <p:spPr>
-          <a:xfrm>
-            <a:off x="457200" y="1188720"/>
-            <a:ext cx="3840480" cy="3474720"/>
-          </a:xfrm>
-          <a:prstGeom prst="rect">
-            <a:avLst/>
-          </a:prstGeom>
-          <a:noFill/>
-          <a:ln/>
-        </p:spPr>
-        <p:txBody>
-          <a:bodyPr wrap="square" rtlCol="0" anchor="t"/>
           <a:lstStyle/>
           <a:p>
             <a:pPr marL="342900" indent="-342900">
@@ -2301,7 +2660,7 @@
                 <a:ea typeface="Calibri" pitchFamily="34" charset="-122"/>
                 <a:cs typeface="Calibri" pitchFamily="34" charset="-120"/>
               </a:rPr>
-              <a:t>Ocean-ocean: one subducts → volcanic island arc (e.g. Japan)</a:t>
+              <a:t>Two plates push together.</a:t>
             </a:r>
             <a:endParaRPr lang="en-US" sz="1400" dirty="0"/>
           </a:p>
@@ -2322,7 +2681,7 @@
                 <a:ea typeface="Calibri" pitchFamily="34" charset="-122"/>
                 <a:cs typeface="Calibri" pitchFamily="34" charset="-120"/>
               </a:rPr>
-              <a:t>Ocean-continent: ocean subducts → coastal mountains + volcanoes (e.g. Andes)</a:t>
+              <a:t>Denser plate slides under (subduction).</a:t>
             </a:r>
             <a:endParaRPr lang="en-US" sz="1400" dirty="0"/>
           </a:p>
@@ -2343,7 +2702,7 @@
                 <a:ea typeface="Calibri" pitchFamily="34" charset="-122"/>
                 <a:cs typeface="Calibri" pitchFamily="34" charset="-120"/>
               </a:rPr>
-              <a:t>Continent-continent: neither subducts → fold mountains (e.g. Himalayas)</a:t>
+              <a:t>Creates deep ocean trenches.</a:t>
             </a:r>
             <a:endParaRPr lang="en-US" sz="1400" dirty="0"/>
           </a:p>
@@ -2364,10 +2723,118 @@
                 <a:ea typeface="Calibri" pitchFamily="34" charset="-122"/>
                 <a:cs typeface="Calibri" pitchFamily="34" charset="-120"/>
               </a:rPr>
-              <a:t>Subduction creates deep ocean trenches</a:t>
+              <a:t>Can cause powerful earthquakes.</a:t>
             </a:r>
             <a:endParaRPr lang="en-US" sz="1400" dirty="0"/>
           </a:p>
+        </p:txBody>
+      </p:sp>
+      <p:sp>
+        <p:nvSpPr>
+          <p:cNvPr id="9" name="Shape 7"/>
+          <p:cNvSpPr/>
+          <p:nvPr/>
+        </p:nvSpPr>
+        <p:spPr>
+          <a:xfrm>
+            <a:off x="4754880" y="1005840"/>
+            <a:ext cx="3931920" cy="3657600"/>
+          </a:xfrm>
+          <a:prstGeom prst="rect">
+            <a:avLst/>
+          </a:prstGeom>
+          <a:solidFill>
+            <a:srgbClr val="FFFFFF"/>
+          </a:solidFill>
+          <a:ln/>
+          <a:effectLst>
+            <a:outerShdw sx="100000" sy="100000" kx="0" ky="0" algn="bl" rotWithShape="0" blurRad="76200" dist="25400" dir="8100000">
+              <a:srgbClr val="000000">
+                <a:alpha val="12000"/>
+              </a:srgbClr>
+            </a:outerShdw>
+          </a:effectLst>
+        </p:spPr>
+      </p:sp>
+      <p:sp>
+        <p:nvSpPr>
+          <p:cNvPr id="10" name="Shape 8"/>
+          <p:cNvSpPr/>
+          <p:nvPr/>
+        </p:nvSpPr>
+        <p:spPr>
+          <a:xfrm>
+            <a:off x="4754880" y="1005840"/>
+            <a:ext cx="3931920" cy="64008"/>
+          </a:xfrm>
+          <a:prstGeom prst="rect">
+            <a:avLst/>
+          </a:prstGeom>
+          <a:solidFill>
+            <a:srgbClr val="E9C46A"/>
+          </a:solidFill>
+          <a:ln/>
+        </p:spPr>
+      </p:sp>
+      <p:sp>
+        <p:nvSpPr>
+          <p:cNvPr id="11" name="Text 9"/>
+          <p:cNvSpPr/>
+          <p:nvPr/>
+        </p:nvSpPr>
+        <p:spPr>
+          <a:xfrm>
+            <a:off x="4937760" y="1188720"/>
+            <a:ext cx="3566160" cy="457200"/>
+          </a:xfrm>
+          <a:prstGeom prst="rect">
+            <a:avLst/>
+          </a:prstGeom>
+          <a:noFill/>
+          <a:ln/>
+        </p:spPr>
+        <p:txBody>
+          <a:bodyPr wrap="square" rtlCol="0" anchor="ctr"/>
+          <a:lstStyle/>
+          <a:p>
+            <a:pPr indent="0" marL="0">
+              <a:buNone/>
+            </a:pPr>
+            <a:r>
+              <a:rPr lang="en-US" sz="1600" b="1" dirty="0">
+                <a:solidFill>
+                  <a:srgbClr val="E9C46A"/>
+                </a:solidFill>
+                <a:latin typeface="Calibri" pitchFamily="34" charset="0"/>
+                <a:ea typeface="Calibri" pitchFamily="34" charset="-122"/>
+                <a:cs typeface="Calibri" pitchFamily="34" charset="-120"/>
+              </a:rPr>
+              <a:t>Examples</a:t>
+            </a:r>
+            <a:endParaRPr lang="en-US" sz="1600" dirty="0"/>
+          </a:p>
+        </p:txBody>
+      </p:sp>
+      <p:sp>
+        <p:nvSpPr>
+          <p:cNvPr id="12" name="Text 10"/>
+          <p:cNvSpPr/>
+          <p:nvPr/>
+        </p:nvSpPr>
+        <p:spPr>
+          <a:xfrm>
+            <a:off x="4937760" y="1691640"/>
+            <a:ext cx="3566160" cy="2743200"/>
+          </a:xfrm>
+          <a:prstGeom prst="rect">
+            <a:avLst/>
+          </a:prstGeom>
+          <a:noFill/>
+          <a:ln/>
+        </p:spPr>
+        <p:txBody>
+          <a:bodyPr wrap="square" rtlCol="0" anchor="ctr"/>
+          <a:lstStyle/>
           <a:p>
             <a:pPr marL="342900" indent="-342900">
               <a:spcAft>
@@ -2385,122 +2852,41 @@
                 <a:ea typeface="Calibri" pitchFamily="34" charset="-122"/>
                 <a:cs typeface="Calibri" pitchFamily="34" charset="-120"/>
               </a:rPr>
-              <a:t>Melting subducted plate creates magma → volcanoes</a:t>
+              <a:t>Himalayas — India + Eurasia (why Tibet is so high).</a:t>
             </a:r>
             <a:endParaRPr lang="en-US" sz="1400" dirty="0"/>
           </a:p>
-        </p:txBody>
-      </p:sp>
-      <p:sp>
-        <p:nvSpPr>
-          <p:cNvPr id="6" name="Shape 4"/>
-          <p:cNvSpPr/>
-          <p:nvPr/>
-        </p:nvSpPr>
-        <p:spPr>
-          <a:xfrm>
-            <a:off x="4846320" y="1188720"/>
-            <a:ext cx="3840480" cy="3474720"/>
-          </a:xfrm>
-          <a:prstGeom prst="rect">
-            <a:avLst/>
-          </a:prstGeom>
-          <a:solidFill>
-            <a:srgbClr val="FFFFFF"/>
-          </a:solidFill>
-          <a:ln w="12700">
-            <a:solidFill>
-              <a:srgbClr val="E5E2DC"/>
-            </a:solidFill>
-            <a:prstDash val="solid"/>
-          </a:ln>
-          <a:effectLst>
-            <a:outerShdw sx="100000" sy="100000" kx="0" ky="0" algn="bl" rotWithShape="0" blurRad="50800" dist="25400" dir="8100000">
-              <a:srgbClr val="000000">
-                <a:alpha val="10000"/>
-              </a:srgbClr>
-            </a:outerShdw>
-          </a:effectLst>
-        </p:spPr>
-      </p:sp>
-      <p:sp>
-        <p:nvSpPr>
-          <p:cNvPr id="7" name="Shape 5"/>
-          <p:cNvSpPr/>
-          <p:nvPr/>
-        </p:nvSpPr>
-        <p:spPr>
-          <a:xfrm>
-            <a:off x="4846320" y="1188720"/>
-            <a:ext cx="3840480" cy="54864"/>
-          </a:xfrm>
-          <a:prstGeom prst="rect">
-            <a:avLst/>
-          </a:prstGeom>
-          <a:solidFill>
-            <a:srgbClr val="2A9D8F"/>
-          </a:solidFill>
-          <a:ln/>
-        </p:spPr>
-      </p:sp>
-      <p:sp>
-        <p:nvSpPr>
-          <p:cNvPr id="8" name="Text 6"/>
-          <p:cNvSpPr/>
-          <p:nvPr/>
-        </p:nvSpPr>
-        <p:spPr>
-          <a:xfrm>
-            <a:off x="5120640" y="1371600"/>
-            <a:ext cx="3291840" cy="3108960"/>
-          </a:xfrm>
-          <a:prstGeom prst="rect">
-            <a:avLst/>
-          </a:prstGeom>
-          <a:noFill/>
-          <a:ln/>
-        </p:spPr>
-        <p:txBody>
-          <a:bodyPr wrap="square" rtlCol="0" anchor="t"/>
-          <a:lstStyle/>
-          <a:p>
-            <a:pPr indent="0" marL="0">
+          <a:p>
+            <a:pPr marL="342900" indent="-342900">
               <a:spcAft>
-                <a:spcPts val="400"/>
+                <a:spcPts val="600"/>
               </a:spcAft>
-              <a:buNone/>
-            </a:pPr>
-            <a:r>
-              <a:rPr lang="en-US" sz="1600" b="1" dirty="0">
-                <a:solidFill>
-                  <a:srgbClr val="1B2A4A"/>
+              <a:buSzPct val="100000"/>
+              <a:buChar char="•"/>
+            </a:pPr>
+            <a:r>
+              <a:rPr lang="en-US" sz="1400" dirty="0">
+                <a:solidFill>
+                  <a:srgbClr val="3D3A36"/>
                 </a:solidFill>
                 <a:latin typeface="Calibri" pitchFamily="34" charset="0"/>
                 <a:ea typeface="Calibri" pitchFamily="34" charset="-122"/>
                 <a:cs typeface="Calibri" pitchFamily="34" charset="-120"/>
               </a:rPr>
-              <a:t>The Ring of Fire</a:t>
-            </a:r>
-            <a:endParaRPr lang="en-US" sz="1600" dirty="0"/>
-          </a:p>
-          <a:p>
-            <a:pPr indent="0" marL="0">
+              <a:t>Japan Trench — Pacific plate subducting.</a:t>
+            </a:r>
+            <a:endParaRPr lang="en-US" sz="1400" dirty="0"/>
+          </a:p>
+          <a:p>
+            <a:pPr marL="342900" indent="-342900">
               <a:spcAft>
-                <a:spcPts val="400"/>
+                <a:spcPts val="600"/>
               </a:spcAft>
-              <a:buNone/>
-            </a:pPr>
-            <a:endParaRPr lang="en-US" sz="1600" dirty="0"/>
-          </a:p>
-          <a:p>
-            <a:pPr indent="0" marL="0">
-              <a:spcAft>
-                <a:spcPts val="400"/>
-              </a:spcAft>
-              <a:buNone/>
-            </a:pPr>
-            <a:r>
-              <a:rPr lang="en-US" sz="1300" dirty="0">
+              <a:buSzPct val="100000"/>
+              <a:buChar char="•"/>
+            </a:pPr>
+            <a:r>
+              <a:rPr lang="en-US" sz="1400" dirty="0">
                 <a:solidFill>
                   <a:srgbClr val="3D3A36"/>
                 </a:solidFill>
@@ -2508,89 +2894,9 @@
                 <a:ea typeface="Calibri" pitchFamily="34" charset="-122"/>
                 <a:cs typeface="Calibri" pitchFamily="34" charset="-120"/>
               </a:rPr>
-              <a:t>Circle of volcanoes and earthquake zones around the Pacific Ocean</a:t>
-            </a:r>
-            <a:endParaRPr lang="en-US" sz="1600" dirty="0"/>
-          </a:p>
-          <a:p>
-            <a:pPr indent="0" marL="0">
-              <a:spcAft>
-                <a:spcPts val="400"/>
-              </a:spcAft>
-              <a:buNone/>
-            </a:pPr>
-            <a:r>
-              <a:rPr lang="en-US" sz="1300" dirty="0">
-                <a:solidFill>
-                  <a:srgbClr val="3D3A36"/>
-                </a:solidFill>
-                <a:latin typeface="Calibri" pitchFamily="34" charset="0"/>
-                <a:ea typeface="Calibri" pitchFamily="34" charset="-122"/>
-                <a:cs typeface="Calibri" pitchFamily="34" charset="-120"/>
-              </a:rPr>
-              <a:t>~75% of world's active volcanoes</a:t>
-            </a:r>
-            <a:endParaRPr lang="en-US" sz="1600" dirty="0"/>
-          </a:p>
-          <a:p>
-            <a:pPr indent="0" marL="0">
-              <a:spcAft>
-                <a:spcPts val="400"/>
-              </a:spcAft>
-              <a:buNone/>
-            </a:pPr>
-            <a:r>
-              <a:rPr lang="en-US" sz="1300" dirty="0">
-                <a:solidFill>
-                  <a:srgbClr val="3D3A36"/>
-                </a:solidFill>
-                <a:latin typeface="Calibri" pitchFamily="34" charset="0"/>
-                <a:ea typeface="Calibri" pitchFamily="34" charset="-122"/>
-                <a:cs typeface="Calibri" pitchFamily="34" charset="-120"/>
-              </a:rPr>
-              <a:t>~90% of world's earthquakes</a:t>
-            </a:r>
-            <a:endParaRPr lang="en-US" sz="1600" dirty="0"/>
-          </a:p>
-          <a:p>
-            <a:pPr indent="0" marL="0">
-              <a:spcAft>
-                <a:spcPts val="400"/>
-              </a:spcAft>
-              <a:buNone/>
-            </a:pPr>
-            <a:r>
-              <a:rPr lang="en-US" sz="1300" dirty="0">
-                <a:solidFill>
-                  <a:srgbClr val="3D3A36"/>
-                </a:solidFill>
-                <a:latin typeface="Calibri" pitchFamily="34" charset="0"/>
-                <a:ea typeface="Calibri" pitchFamily="34" charset="-122"/>
-                <a:cs typeface="Calibri" pitchFamily="34" charset="-120"/>
-              </a:rPr>
-              <a:t>Caused by multiple convergent and transform boundaries</a:t>
-            </a:r>
-            <a:endParaRPr lang="en-US" sz="1600" dirty="0"/>
-          </a:p>
-          <a:p>
-            <a:pPr indent="0" marL="0">
-              <a:spcAft>
-                <a:spcPts val="400"/>
-              </a:spcAft>
-              <a:buNone/>
-            </a:pPr>
-            <a:r>
-              <a:rPr lang="en-US" sz="1300" dirty="0">
-                <a:solidFill>
-                  <a:srgbClr val="3D3A36"/>
-                </a:solidFill>
-                <a:latin typeface="Calibri" pitchFamily="34" charset="0"/>
-                <a:ea typeface="Calibri" pitchFamily="34" charset="-122"/>
-                <a:cs typeface="Calibri" pitchFamily="34" charset="-120"/>
-              </a:rPr>
-              <a:t>Countries affected: Japan, Indonesia, Chile, New Zealand, USA (west coast)</a:t>
-            </a:r>
-            <a:endParaRPr lang="en-US" sz="1600" dirty="0"/>
+              <a:t>Korean Peninsula shaped by ancient convergent boundaries.</a:t>
+            </a:r>
+            <a:endParaRPr lang="en-US" sz="1400" dirty="0"/>
           </a:p>
         </p:txBody>
       </p:sp>
@@ -2608,7 +2914,7 @@
     <p:bg>
       <p:bgPr>
         <a:solidFill>
-          <a:srgbClr val="1B2A4A"/>
+          <a:srgbClr val="FAF8F5"/>
         </a:solidFill>
       </p:bgPr>
     </p:bg>
@@ -2635,27 +2941,47 @@
         <p:spPr>
           <a:xfrm>
             <a:off x="0" y="0"/>
-            <a:ext cx="109728" cy="5143500"/>
-          </a:xfrm>
-          <a:prstGeom prst="rect">
-            <a:avLst/>
-          </a:prstGeom>
-          <a:solidFill>
-            <a:srgbClr val="E9C46A"/>
-          </a:solidFill>
-          <a:ln/>
-        </p:spPr>
-      </p:sp>
-      <p:sp>
-        <p:nvSpPr>
-          <p:cNvPr id="3" name="Text 1"/>
-          <p:cNvSpPr/>
-          <p:nvPr/>
-        </p:nvSpPr>
-        <p:spPr>
-          <a:xfrm>
-            <a:off x="731520" y="457200"/>
-            <a:ext cx="7772400" cy="731520"/>
+            <a:ext cx="9144000" cy="822960"/>
+          </a:xfrm>
+          <a:prstGeom prst="rect">
+            <a:avLst/>
+          </a:prstGeom>
+          <a:solidFill>
+            <a:srgbClr val="FFFFFF"/>
+          </a:solidFill>
+          <a:ln/>
+        </p:spPr>
+      </p:sp>
+      <p:sp>
+        <p:nvSpPr>
+          <p:cNvPr id="3" name="Shape 1"/>
+          <p:cNvSpPr/>
+          <p:nvPr/>
+        </p:nvSpPr>
+        <p:spPr>
+          <a:xfrm>
+            <a:off x="0" y="795528"/>
+            <a:ext cx="9144000" cy="27432"/>
+          </a:xfrm>
+          <a:prstGeom prst="rect">
+            <a:avLst/>
+          </a:prstGeom>
+          <a:solidFill>
+            <a:srgbClr val="2A9D8F"/>
+          </a:solidFill>
+          <a:ln/>
+        </p:spPr>
+      </p:sp>
+      <p:sp>
+        <p:nvSpPr>
+          <p:cNvPr id="4" name="Text 2"/>
+          <p:cNvSpPr/>
+          <p:nvPr/>
+        </p:nvSpPr>
+        <p:spPr>
+          <a:xfrm>
+            <a:off x="640080" y="91440"/>
+            <a:ext cx="7863840" cy="640080"/>
           </a:xfrm>
           <a:prstGeom prst="rect">
             <a:avLst/>
@@ -2664,37 +2990,84 @@
           <a:ln/>
         </p:spPr>
         <p:txBody>
-          <a:bodyPr wrap="square" rtlCol="0" anchor="ctr"/>
+          <a:bodyPr wrap="square" lIns="0" tIns="0" rIns="0" bIns="0" rtlCol="0" anchor="ctr"/>
           <a:lstStyle/>
           <a:p>
             <a:pPr indent="0" marL="0">
               <a:buNone/>
             </a:pPr>
             <a:r>
-              <a:rPr lang="en-US" sz="3200" b="1" dirty="0">
-                <a:solidFill>
-                  <a:srgbClr val="FFFFFF"/>
+              <a:rPr lang="en-US" sz="2200" b="1" dirty="0">
+                <a:solidFill>
+                  <a:srgbClr val="1B2A4A"/>
                 </a:solidFill>
                 <a:latin typeface="Georgia" pitchFamily="34" charset="0"/>
                 <a:ea typeface="Georgia" pitchFamily="34" charset="-122"/>
                 <a:cs typeface="Georgia" pitchFamily="34" charset="-120"/>
               </a:rPr>
-              <a:t>Key Takeaways</a:t>
-            </a:r>
-            <a:endParaRPr lang="en-US" sz="3200" dirty="0"/>
-          </a:p>
-        </p:txBody>
-      </p:sp>
-      <p:sp>
-        <p:nvSpPr>
-          <p:cNvPr id="4" name="Text 2"/>
-          <p:cNvSpPr/>
-          <p:nvPr/>
-        </p:nvSpPr>
-        <p:spPr>
-          <a:xfrm>
-            <a:off x="731520" y="1463040"/>
-            <a:ext cx="7772400" cy="3200400"/>
+              <a:t>Divergent Boundaries</a:t>
+            </a:r>
+            <a:endParaRPr lang="en-US" sz="2200" dirty="0"/>
+          </a:p>
+        </p:txBody>
+      </p:sp>
+      <p:sp>
+        <p:nvSpPr>
+          <p:cNvPr id="5" name="Shape 3"/>
+          <p:cNvSpPr/>
+          <p:nvPr/>
+        </p:nvSpPr>
+        <p:spPr>
+          <a:xfrm>
+            <a:off x="457200" y="1005840"/>
+            <a:ext cx="3931920" cy="3657600"/>
+          </a:xfrm>
+          <a:prstGeom prst="rect">
+            <a:avLst/>
+          </a:prstGeom>
+          <a:solidFill>
+            <a:srgbClr val="FFFFFF"/>
+          </a:solidFill>
+          <a:ln/>
+          <a:effectLst>
+            <a:outerShdw sx="100000" sy="100000" kx="0" ky="0" algn="bl" rotWithShape="0" blurRad="76200" dist="25400" dir="8100000">
+              <a:srgbClr val="000000">
+                <a:alpha val="12000"/>
+              </a:srgbClr>
+            </a:outerShdw>
+          </a:effectLst>
+        </p:spPr>
+      </p:sp>
+      <p:sp>
+        <p:nvSpPr>
+          <p:cNvPr id="6" name="Shape 4"/>
+          <p:cNvSpPr/>
+          <p:nvPr/>
+        </p:nvSpPr>
+        <p:spPr>
+          <a:xfrm>
+            <a:off x="457200" y="1005840"/>
+            <a:ext cx="3931920" cy="64008"/>
+          </a:xfrm>
+          <a:prstGeom prst="rect">
+            <a:avLst/>
+          </a:prstGeom>
+          <a:solidFill>
+            <a:srgbClr val="2A9D8F"/>
+          </a:solidFill>
+          <a:ln/>
+        </p:spPr>
+      </p:sp>
+      <p:sp>
+        <p:nvSpPr>
+          <p:cNvPr id="7" name="Text 5"/>
+          <p:cNvSpPr/>
+          <p:nvPr/>
+        </p:nvSpPr>
+        <p:spPr>
+          <a:xfrm>
+            <a:off x="640080" y="1188720"/>
+            <a:ext cx="3566160" cy="457200"/>
           </a:xfrm>
           <a:prstGeom prst="rect">
             <a:avLst/>
@@ -2703,151 +3076,2196 @@
           <a:ln/>
         </p:spPr>
         <p:txBody>
-          <a:bodyPr wrap="square" rtlCol="0" anchor="t"/>
+          <a:bodyPr wrap="square" rtlCol="0" anchor="ctr"/>
+          <a:lstStyle/>
+          <a:p>
+            <a:pPr indent="0" marL="0">
+              <a:buNone/>
+            </a:pPr>
+            <a:r>
+              <a:rPr lang="en-US" sz="1600" b="1" dirty="0">
+                <a:solidFill>
+                  <a:srgbClr val="2A9D8F"/>
+                </a:solidFill>
+                <a:latin typeface="Calibri" pitchFamily="34" charset="0"/>
+                <a:ea typeface="Calibri" pitchFamily="34" charset="-122"/>
+                <a:cs typeface="Calibri" pitchFamily="34" charset="-120"/>
+              </a:rPr>
+              <a:t>What Happens</a:t>
+            </a:r>
+            <a:endParaRPr lang="en-US" sz="1600" dirty="0"/>
+          </a:p>
+        </p:txBody>
+      </p:sp>
+      <p:sp>
+        <p:nvSpPr>
+          <p:cNvPr id="8" name="Text 6"/>
+          <p:cNvSpPr/>
+          <p:nvPr/>
+        </p:nvSpPr>
+        <p:spPr>
+          <a:xfrm>
+            <a:off x="640080" y="1691640"/>
+            <a:ext cx="3566160" cy="2743200"/>
+          </a:xfrm>
+          <a:prstGeom prst="rect">
+            <a:avLst/>
+          </a:prstGeom>
+          <a:noFill/>
+          <a:ln/>
+        </p:spPr>
+        <p:txBody>
+          <a:bodyPr wrap="square" rtlCol="0" anchor="ctr"/>
           <a:lstStyle/>
           <a:p>
             <a:pPr marL="342900" indent="-342900">
               <a:spcAft>
-                <a:spcPts val="1000"/>
+                <a:spcPts val="600"/>
               </a:spcAft>
               <a:buSzPct val="100000"/>
               <a:buChar char="•"/>
             </a:pPr>
             <a:r>
-              <a:rPr lang="en-US" sz="1500" dirty="0">
-                <a:solidFill>
-                  <a:srgbClr val="CADCFC"/>
+              <a:rPr lang="en-US" sz="1400" dirty="0">
+                <a:solidFill>
+                  <a:srgbClr val="3D3A36"/>
                 </a:solidFill>
                 <a:latin typeface="Calibri" pitchFamily="34" charset="0"/>
                 <a:ea typeface="Calibri" pitchFamily="34" charset="-122"/>
                 <a:cs typeface="Calibri" pitchFamily="34" charset="-120"/>
               </a:rPr>
-              <a:t>Three boundaries: divergent (apart), convergent (together), transform (sideways)</a:t>
-            </a:r>
-            <a:endParaRPr lang="en-US" sz="1500" dirty="0"/>
+              <a:t>Two plates pull apart.</a:t>
+            </a:r>
+            <a:endParaRPr lang="en-US" sz="1400" dirty="0"/>
           </a:p>
           <a:p>
             <a:pPr marL="342900" indent="-342900">
               <a:spcAft>
-                <a:spcPts val="1000"/>
+                <a:spcPts val="600"/>
               </a:spcAft>
               <a:buSzPct val="100000"/>
               <a:buChar char="•"/>
             </a:pPr>
             <a:r>
-              <a:rPr lang="en-US" sz="1500" dirty="0">
-                <a:solidFill>
-                  <a:srgbClr val="CADCFC"/>
+              <a:rPr lang="en-US" sz="1400" dirty="0">
+                <a:solidFill>
+                  <a:srgbClr val="3D3A36"/>
                 </a:solidFill>
                 <a:latin typeface="Calibri" pitchFamily="34" charset="0"/>
                 <a:ea typeface="Calibri" pitchFamily="34" charset="-122"/>
                 <a:cs typeface="Calibri" pitchFamily="34" charset="-120"/>
               </a:rPr>
-              <a:t>Divergent: new crust formed from rising magma</a:t>
-            </a:r>
-            <a:endParaRPr lang="en-US" sz="1500" dirty="0"/>
+              <a:t>Magma rises to fill the gap.</a:t>
+            </a:r>
+            <a:endParaRPr lang="en-US" sz="1400" dirty="0"/>
           </a:p>
           <a:p>
             <a:pPr marL="342900" indent="-342900">
               <a:spcAft>
-                <a:spcPts val="1000"/>
+                <a:spcPts val="600"/>
               </a:spcAft>
               <a:buSzPct val="100000"/>
               <a:buChar char="•"/>
             </a:pPr>
             <a:r>
-              <a:rPr lang="en-US" sz="1500" dirty="0">
-                <a:solidFill>
-                  <a:srgbClr val="CADCFC"/>
+              <a:rPr lang="en-US" sz="1400" dirty="0">
+                <a:solidFill>
+                  <a:srgbClr val="3D3A36"/>
                 </a:solidFill>
                 <a:latin typeface="Calibri" pitchFamily="34" charset="0"/>
                 <a:ea typeface="Calibri" pitchFamily="34" charset="-122"/>
                 <a:cs typeface="Calibri" pitchFamily="34" charset="-120"/>
               </a:rPr>
-              <a:t>Convergent: subduction (one plate sinks under another)</a:t>
-            </a:r>
-            <a:endParaRPr lang="en-US" sz="1500" dirty="0"/>
+              <a:t>Creates new ocean floor.</a:t>
+            </a:r>
+            <a:endParaRPr lang="en-US" sz="1400" dirty="0"/>
           </a:p>
           <a:p>
             <a:pPr marL="342900" indent="-342900">
               <a:spcAft>
-                <a:spcPts val="1000"/>
+                <a:spcPts val="600"/>
               </a:spcAft>
               <a:buSzPct val="100000"/>
               <a:buChar char="•"/>
             </a:pPr>
             <a:r>
-              <a:rPr lang="en-US" sz="1500" dirty="0">
-                <a:solidFill>
-                  <a:srgbClr val="CADCFC"/>
+              <a:rPr lang="en-US" sz="1400" dirty="0">
+                <a:solidFill>
+                  <a:srgbClr val="3D3A36"/>
                 </a:solidFill>
                 <a:latin typeface="Calibri" pitchFamily="34" charset="0"/>
                 <a:ea typeface="Calibri" pitchFamily="34" charset="-122"/>
                 <a:cs typeface="Calibri" pitchFamily="34" charset="-120"/>
               </a:rPr>
-              <a:t>Transform: friction causes earthquakes, no volcanoes</a:t>
-            </a:r>
-            <a:endParaRPr lang="en-US" sz="1500" dirty="0"/>
-          </a:p>
+              <a:t>Mid-ocean ridges form underwater.</a:t>
+            </a:r>
+            <a:endParaRPr lang="en-US" sz="1400" dirty="0"/>
+          </a:p>
+        </p:txBody>
+      </p:sp>
+      <p:sp>
+        <p:nvSpPr>
+          <p:cNvPr id="9" name="Shape 7"/>
+          <p:cNvSpPr/>
+          <p:nvPr/>
+        </p:nvSpPr>
+        <p:spPr>
+          <a:xfrm>
+            <a:off x="4754880" y="1005840"/>
+            <a:ext cx="3931920" cy="3657600"/>
+          </a:xfrm>
+          <a:prstGeom prst="rect">
+            <a:avLst/>
+          </a:prstGeom>
+          <a:solidFill>
+            <a:srgbClr val="FFFFFF"/>
+          </a:solidFill>
+          <a:ln/>
+          <a:effectLst>
+            <a:outerShdw sx="100000" sy="100000" kx="0" ky="0" algn="bl" rotWithShape="0" blurRad="76200" dist="25400" dir="8100000">
+              <a:srgbClr val="000000">
+                <a:alpha val="12000"/>
+              </a:srgbClr>
+            </a:outerShdw>
+          </a:effectLst>
+        </p:spPr>
+      </p:sp>
+      <p:sp>
+        <p:nvSpPr>
+          <p:cNvPr id="10" name="Shape 8"/>
+          <p:cNvSpPr/>
+          <p:nvPr/>
+        </p:nvSpPr>
+        <p:spPr>
+          <a:xfrm>
+            <a:off x="4754880" y="1005840"/>
+            <a:ext cx="3931920" cy="64008"/>
+          </a:xfrm>
+          <a:prstGeom prst="rect">
+            <a:avLst/>
+          </a:prstGeom>
+          <a:solidFill>
+            <a:srgbClr val="E9C46A"/>
+          </a:solidFill>
+          <a:ln/>
+        </p:spPr>
+      </p:sp>
+      <p:sp>
+        <p:nvSpPr>
+          <p:cNvPr id="11" name="Text 9"/>
+          <p:cNvSpPr/>
+          <p:nvPr/>
+        </p:nvSpPr>
+        <p:spPr>
+          <a:xfrm>
+            <a:off x="4937760" y="1188720"/>
+            <a:ext cx="3566160" cy="457200"/>
+          </a:xfrm>
+          <a:prstGeom prst="rect">
+            <a:avLst/>
+          </a:prstGeom>
+          <a:noFill/>
+          <a:ln/>
+        </p:spPr>
+        <p:txBody>
+          <a:bodyPr wrap="square" rtlCol="0" anchor="ctr"/>
+          <a:lstStyle/>
+          <a:p>
+            <a:pPr indent="0" marL="0">
+              <a:buNone/>
+            </a:pPr>
+            <a:r>
+              <a:rPr lang="en-US" sz="1600" b="1" dirty="0">
+                <a:solidFill>
+                  <a:srgbClr val="E9C46A"/>
+                </a:solidFill>
+                <a:latin typeface="Calibri" pitchFamily="34" charset="0"/>
+                <a:ea typeface="Calibri" pitchFamily="34" charset="-122"/>
+                <a:cs typeface="Calibri" pitchFamily="34" charset="-120"/>
+              </a:rPr>
+              <a:t>Examples</a:t>
+            </a:r>
+            <a:endParaRPr lang="en-US" sz="1600" dirty="0"/>
+          </a:p>
+        </p:txBody>
+      </p:sp>
+      <p:sp>
+        <p:nvSpPr>
+          <p:cNvPr id="12" name="Text 10"/>
+          <p:cNvSpPr/>
+          <p:nvPr/>
+        </p:nvSpPr>
+        <p:spPr>
+          <a:xfrm>
+            <a:off x="4937760" y="1691640"/>
+            <a:ext cx="3566160" cy="2743200"/>
+          </a:xfrm>
+          <a:prstGeom prst="rect">
+            <a:avLst/>
+          </a:prstGeom>
+          <a:noFill/>
+          <a:ln/>
+        </p:spPr>
+        <p:txBody>
+          <a:bodyPr wrap="square" rtlCol="0" anchor="ctr"/>
+          <a:lstStyle/>
           <a:p>
             <a:pPr marL="342900" indent="-342900">
               <a:spcAft>
-                <a:spcPts val="1000"/>
+                <a:spcPts val="600"/>
               </a:spcAft>
               <a:buSzPct val="100000"/>
               <a:buChar char="•"/>
             </a:pPr>
             <a:r>
-              <a:rPr lang="en-US" sz="1500" dirty="0">
-                <a:solidFill>
-                  <a:srgbClr val="CADCFC"/>
+              <a:rPr lang="en-US" sz="1400" dirty="0">
+                <a:solidFill>
+                  <a:srgbClr val="3D3A36"/>
                 </a:solidFill>
                 <a:latin typeface="Calibri" pitchFamily="34" charset="0"/>
                 <a:ea typeface="Calibri" pitchFamily="34" charset="-122"/>
                 <a:cs typeface="Calibri" pitchFamily="34" charset="-120"/>
               </a:rPr>
-              <a:t>Ring of Fire: ~75% volcanoes, ~90% earthquakes around the Pacific</a:t>
-            </a:r>
-            <a:endParaRPr lang="en-US" sz="1500" dirty="0"/>
-          </a:p>
-        </p:txBody>
-      </p:sp>
-      <p:sp>
-        <p:nvSpPr>
-          <p:cNvPr id="5" name="Text 3"/>
-          <p:cNvSpPr/>
-          <p:nvPr/>
-        </p:nvSpPr>
-        <p:spPr>
-          <a:xfrm>
-            <a:off x="731520" y="4572000"/>
-            <a:ext cx="7772400" cy="365760"/>
-          </a:xfrm>
-          <a:prstGeom prst="rect">
-            <a:avLst/>
-          </a:prstGeom>
-          <a:noFill/>
-          <a:ln/>
-        </p:spPr>
-        <p:txBody>
-          <a:bodyPr wrap="square" rtlCol="0" anchor="ctr"/>
-          <a:lstStyle/>
-          <a:p>
-            <a:pPr indent="0" marL="0">
-              <a:buNone/>
-            </a:pPr>
-            <a:r>
-              <a:rPr lang="en-US" sz="1100" dirty="0">
-                <a:solidFill>
-                  <a:srgbClr val="E9C46A"/>
+              <a:t>Mid-Atlantic Ridge — widening ~2.5 cm/year.</a:t>
+            </a:r>
+            <a:endParaRPr lang="en-US" sz="1400" dirty="0"/>
+          </a:p>
+          <a:p>
+            <a:pPr marL="342900" indent="-342900">
+              <a:spcAft>
+                <a:spcPts val="600"/>
+              </a:spcAft>
+              <a:buSzPct val="100000"/>
+              <a:buChar char="•"/>
+            </a:pPr>
+            <a:r>
+              <a:rPr lang="en-US" sz="1400" dirty="0">
+                <a:solidFill>
+                  <a:srgbClr val="3D3A36"/>
                 </a:solidFill>
                 <a:latin typeface="Calibri" pitchFamily="34" charset="0"/>
                 <a:ea typeface="Calibri" pitchFamily="34" charset="-122"/>
                 <a:cs typeface="Calibri" pitchFamily="34" charset="-120"/>
               </a:rPr>
+              <a:t>East African Rift — Africa splitting apart.</a:t>
+            </a:r>
+            <a:endParaRPr lang="en-US" sz="1400" dirty="0"/>
+          </a:p>
+          <a:p>
+            <a:pPr marL="342900" indent="-342900">
+              <a:spcAft>
+                <a:spcPts val="600"/>
+              </a:spcAft>
+              <a:buSzPct val="100000"/>
+              <a:buChar char="•"/>
+            </a:pPr>
+            <a:r>
+              <a:rPr lang="en-US" sz="1400" dirty="0">
+                <a:solidFill>
+                  <a:srgbClr val="3D3A36"/>
+                </a:solidFill>
+                <a:latin typeface="Calibri" pitchFamily="34" charset="0"/>
+                <a:ea typeface="Calibri" pitchFamily="34" charset="-122"/>
+                <a:cs typeface="Calibri" pitchFamily="34" charset="-120"/>
+              </a:rPr>
+              <a:t>Rhine Graben in Germany — an ancient rift valley.</a:t>
+            </a:r>
+            <a:endParaRPr lang="en-US" sz="1400" dirty="0"/>
+          </a:p>
+        </p:txBody>
+      </p:sp>
+    </p:spTree>
+  </p:cSld>
+  <p:clrMapOvr>
+    <a:masterClrMapping/>
+  </p:clrMapOvr>
+</p:sld>
+</file>
+
+<file path=ppt/slides/slide6.xml><?xml version="1.0" encoding="utf-8"?>
+<p:sld xmlns:a="http://schemas.openxmlformats.org/drawingml/2006/main" xmlns:r="http://schemas.openxmlformats.org/officeDocument/2006/relationships" xmlns:p="http://schemas.openxmlformats.org/presentationml/2006/main">
+  <p:cSld name="Slide 6">
+    <p:bg>
+      <p:bgPr>
+        <a:solidFill>
+          <a:srgbClr val="FAF8F5"/>
+        </a:solidFill>
+      </p:bgPr>
+    </p:bg>
+    <p:spTree>
+      <p:nvGrpSpPr>
+        <p:cNvPr id="1" name=""/>
+        <p:cNvGrpSpPr/>
+        <p:nvPr/>
+      </p:nvGrpSpPr>
+      <p:grpSpPr>
+        <a:xfrm>
+          <a:off x="0" y="0"/>
+          <a:ext cx="0" cy="0"/>
+          <a:chOff x="0" y="0"/>
+          <a:chExt cx="0" cy="0"/>
+        </a:xfrm>
+      </p:grpSpPr>
+      <p:sp>
+        <p:nvSpPr>
+          <p:cNvPr id="2" name="Shape 0"/>
+          <p:cNvSpPr/>
+          <p:nvPr/>
+        </p:nvSpPr>
+        <p:spPr>
+          <a:xfrm>
+            <a:off x="0" y="0"/>
+            <a:ext cx="9144000" cy="822960"/>
+          </a:xfrm>
+          <a:prstGeom prst="rect">
+            <a:avLst/>
+          </a:prstGeom>
+          <a:solidFill>
+            <a:srgbClr val="FFFFFF"/>
+          </a:solidFill>
+          <a:ln/>
+        </p:spPr>
+      </p:sp>
+      <p:sp>
+        <p:nvSpPr>
+          <p:cNvPr id="3" name="Shape 1"/>
+          <p:cNvSpPr/>
+          <p:nvPr/>
+        </p:nvSpPr>
+        <p:spPr>
+          <a:xfrm>
+            <a:off x="0" y="795528"/>
+            <a:ext cx="9144000" cy="27432"/>
+          </a:xfrm>
+          <a:prstGeom prst="rect">
+            <a:avLst/>
+          </a:prstGeom>
+          <a:solidFill>
+            <a:srgbClr val="2A9D8F"/>
+          </a:solidFill>
+          <a:ln/>
+        </p:spPr>
+      </p:sp>
+      <p:sp>
+        <p:nvSpPr>
+          <p:cNvPr id="4" name="Text 2"/>
+          <p:cNvSpPr/>
+          <p:nvPr/>
+        </p:nvSpPr>
+        <p:spPr>
+          <a:xfrm>
+            <a:off x="640080" y="91440"/>
+            <a:ext cx="7863840" cy="640080"/>
+          </a:xfrm>
+          <a:prstGeom prst="rect">
+            <a:avLst/>
+          </a:prstGeom>
+          <a:noFill/>
+          <a:ln/>
+        </p:spPr>
+        <p:txBody>
+          <a:bodyPr wrap="square" lIns="0" tIns="0" rIns="0" bIns="0" rtlCol="0" anchor="ctr"/>
+          <a:lstStyle/>
+          <a:p>
+            <a:pPr indent="0" marL="0">
+              <a:buNone/>
+            </a:pPr>
+            <a:r>
+              <a:rPr lang="en-US" sz="2200" b="1" dirty="0">
+                <a:solidFill>
+                  <a:srgbClr val="1B2A4A"/>
+                </a:solidFill>
+                <a:latin typeface="Georgia" pitchFamily="34" charset="0"/>
+                <a:ea typeface="Georgia" pitchFamily="34" charset="-122"/>
+                <a:cs typeface="Georgia" pitchFamily="34" charset="-120"/>
+              </a:rPr>
+              <a:t>Transform Boundaries</a:t>
+            </a:r>
+            <a:endParaRPr lang="en-US" sz="2200" dirty="0"/>
+          </a:p>
+        </p:txBody>
+      </p:sp>
+      <p:sp>
+        <p:nvSpPr>
+          <p:cNvPr id="5" name="Text 3"/>
+          <p:cNvSpPr/>
+          <p:nvPr/>
+        </p:nvSpPr>
+        <p:spPr>
+          <a:xfrm>
+            <a:off x="640080" y="1005840"/>
+            <a:ext cx="7863840" cy="2926080"/>
+          </a:xfrm>
+          <a:prstGeom prst="rect">
+            <a:avLst/>
+          </a:prstGeom>
+          <a:noFill/>
+          <a:ln/>
+        </p:spPr>
+        <p:txBody>
+          <a:bodyPr wrap="square" rtlCol="0" anchor="ctr"/>
+          <a:lstStyle/>
+          <a:p>
+            <a:pPr marL="342900" indent="-342900">
+              <a:spcAft>
+                <a:spcPts val="800"/>
+              </a:spcAft>
+              <a:buSzPct val="100000"/>
+              <a:buChar char="•"/>
+            </a:pPr>
+            <a:r>
+              <a:rPr lang="en-US" sz="1600" dirty="0">
+                <a:solidFill>
+                  <a:srgbClr val="3D3A36"/>
+                </a:solidFill>
+                <a:latin typeface="Calibri" pitchFamily="34" charset="0"/>
+                <a:ea typeface="Calibri" pitchFamily="34" charset="-122"/>
+                <a:cs typeface="Calibri" pitchFamily="34" charset="-120"/>
+              </a:rPr>
+              <a:t>Plates grind past each other sideways.</a:t>
+            </a:r>
+            <a:endParaRPr lang="en-US" sz="1600" dirty="0"/>
+          </a:p>
+          <a:p>
+            <a:pPr marL="342900" indent="-342900">
+              <a:spcAft>
+                <a:spcPts val="800"/>
+              </a:spcAft>
+              <a:buSzPct val="100000"/>
+              <a:buChar char="•"/>
+            </a:pPr>
+            <a:r>
+              <a:rPr lang="en-US" sz="1600" dirty="0">
+                <a:solidFill>
+                  <a:srgbClr val="3D3A36"/>
+                </a:solidFill>
+                <a:latin typeface="Calibri" pitchFamily="34" charset="0"/>
+                <a:ea typeface="Calibri" pitchFamily="34" charset="-122"/>
+                <a:cs typeface="Calibri" pitchFamily="34" charset="-120"/>
+              </a:rPr>
+              <a:t>No new crust is created or destroyed.</a:t>
+            </a:r>
+            <a:endParaRPr lang="en-US" sz="1600" dirty="0"/>
+          </a:p>
+          <a:p>
+            <a:pPr marL="342900" indent="-342900">
+              <a:spcAft>
+                <a:spcPts val="800"/>
+              </a:spcAft>
+              <a:buSzPct val="100000"/>
+              <a:buChar char="•"/>
+            </a:pPr>
+            <a:r>
+              <a:rPr lang="en-US" sz="1600" dirty="0">
+                <a:solidFill>
+                  <a:srgbClr val="3D3A36"/>
+                </a:solidFill>
+                <a:latin typeface="Calibri" pitchFamily="34" charset="0"/>
+                <a:ea typeface="Calibri" pitchFamily="34" charset="-122"/>
+                <a:cs typeface="Calibri" pitchFamily="34" charset="-120"/>
+              </a:rPr>
+              <a:t>Friction builds up, then releases as earthquakes.</a:t>
+            </a:r>
+            <a:endParaRPr lang="en-US" sz="1600" dirty="0"/>
+          </a:p>
+          <a:p>
+            <a:pPr marL="342900" indent="-342900">
+              <a:spcAft>
+                <a:spcPts val="800"/>
+              </a:spcAft>
+              <a:buSzPct val="100000"/>
+              <a:buChar char="•"/>
+            </a:pPr>
+            <a:r>
+              <a:rPr lang="en-US" sz="1600" dirty="0">
+                <a:solidFill>
+                  <a:srgbClr val="3D3A36"/>
+                </a:solidFill>
+                <a:latin typeface="Calibri" pitchFamily="34" charset="0"/>
+                <a:ea typeface="Calibri" pitchFamily="34" charset="-122"/>
+                <a:cs typeface="Calibri" pitchFamily="34" charset="-120"/>
+              </a:rPr>
+              <a:t>The San Andreas Fault (USA) is a famous example.</a:t>
+            </a:r>
+            <a:endParaRPr lang="en-US" sz="1600" dirty="0"/>
+          </a:p>
+        </p:txBody>
+      </p:sp>
+      <p:sp>
+        <p:nvSpPr>
+          <p:cNvPr id="6" name="Shape 4"/>
+          <p:cNvSpPr/>
+          <p:nvPr/>
+        </p:nvSpPr>
+        <p:spPr>
+          <a:xfrm>
+            <a:off x="640080" y="4114800"/>
+            <a:ext cx="7863840" cy="731520"/>
+          </a:xfrm>
+          <a:prstGeom prst="rect">
+            <a:avLst/>
+          </a:prstGeom>
+          <a:solidFill>
+            <a:srgbClr val="E8F5F3"/>
+          </a:solidFill>
+          <a:ln/>
+          <a:effectLst>
+            <a:outerShdw sx="100000" sy="100000" kx="0" ky="0" algn="bl" rotWithShape="0" blurRad="76200" dist="25400" dir="8100000">
+              <a:srgbClr val="000000">
+                <a:alpha val="12000"/>
+              </a:srgbClr>
+            </a:outerShdw>
+          </a:effectLst>
+        </p:spPr>
+      </p:sp>
+      <p:sp>
+        <p:nvSpPr>
+          <p:cNvPr id="7" name="Shape 5"/>
+          <p:cNvSpPr/>
+          <p:nvPr/>
+        </p:nvSpPr>
+        <p:spPr>
+          <a:xfrm>
+            <a:off x="640080" y="4114800"/>
+            <a:ext cx="64008" cy="731520"/>
+          </a:xfrm>
+          <a:prstGeom prst="rect">
+            <a:avLst/>
+          </a:prstGeom>
+          <a:solidFill>
+            <a:srgbClr val="2A9D8F"/>
+          </a:solidFill>
+          <a:ln/>
+        </p:spPr>
+      </p:sp>
+      <p:sp>
+        <p:nvSpPr>
+          <p:cNvPr id="8" name="Text 6"/>
+          <p:cNvSpPr/>
+          <p:nvPr/>
+        </p:nvSpPr>
+        <p:spPr>
+          <a:xfrm>
+            <a:off x="914400" y="4160520"/>
+            <a:ext cx="7406640" cy="640080"/>
+          </a:xfrm>
+          <a:prstGeom prst="rect">
+            <a:avLst/>
+          </a:prstGeom>
+          <a:noFill/>
+          <a:ln/>
+        </p:spPr>
+        <p:txBody>
+          <a:bodyPr wrap="square" rtlCol="0" anchor="ctr"/>
+          <a:lstStyle/>
+          <a:p>
+            <a:pPr indent="0" marL="0">
+              <a:buNone/>
+            </a:pPr>
+            <a:r>
+              <a:rPr lang="en-US" sz="1300" i="1" dirty="0">
+                <a:solidFill>
+                  <a:srgbClr val="3D3A36"/>
+                </a:solidFill>
+                <a:latin typeface="Calibri" pitchFamily="34" charset="0"/>
+                <a:ea typeface="Calibri" pitchFamily="34" charset="-122"/>
+                <a:cs typeface="Calibri" pitchFamily="34" charset="-120"/>
+              </a:rPr>
+              <a:t>The Tan-Lu Fault near Nanjing is a major transform-style fault — one of Asia's longest.</a:t>
+            </a:r>
+            <a:endParaRPr lang="en-US" sz="1300" dirty="0"/>
+          </a:p>
+        </p:txBody>
+      </p:sp>
+    </p:spTree>
+  </p:cSld>
+  <p:clrMapOvr>
+    <a:masterClrMapping/>
+  </p:clrMapOvr>
+</p:sld>
+</file>
+
+<file path=ppt/slides/slide7.xml><?xml version="1.0" encoding="utf-8"?>
+<p:sld xmlns:a="http://schemas.openxmlformats.org/drawingml/2006/main" xmlns:r="http://schemas.openxmlformats.org/officeDocument/2006/relationships" xmlns:p="http://schemas.openxmlformats.org/presentationml/2006/main">
+  <p:cSld name="Slide 7">
+    <p:bg>
+      <p:bgPr>
+        <a:solidFill>
+          <a:srgbClr val="FAF8F5"/>
+        </a:solidFill>
+      </p:bgPr>
+    </p:bg>
+    <p:spTree>
+      <p:nvGrpSpPr>
+        <p:cNvPr id="1" name=""/>
+        <p:cNvGrpSpPr/>
+        <p:nvPr/>
+      </p:nvGrpSpPr>
+      <p:grpSpPr>
+        <a:xfrm>
+          <a:off x="0" y="0"/>
+          <a:ext cx="0" cy="0"/>
+          <a:chOff x="0" y="0"/>
+          <a:chExt cx="0" cy="0"/>
+        </a:xfrm>
+      </p:grpSpPr>
+      <p:sp>
+        <p:nvSpPr>
+          <p:cNvPr id="2" name="Shape 0"/>
+          <p:cNvSpPr/>
+          <p:nvPr/>
+        </p:nvSpPr>
+        <p:spPr>
+          <a:xfrm>
+            <a:off x="0" y="0"/>
+            <a:ext cx="9144000" cy="822960"/>
+          </a:xfrm>
+          <a:prstGeom prst="rect">
+            <a:avLst/>
+          </a:prstGeom>
+          <a:solidFill>
+            <a:srgbClr val="FFFFFF"/>
+          </a:solidFill>
+          <a:ln/>
+        </p:spPr>
+      </p:sp>
+      <p:sp>
+        <p:nvSpPr>
+          <p:cNvPr id="3" name="Shape 1"/>
+          <p:cNvSpPr/>
+          <p:nvPr/>
+        </p:nvSpPr>
+        <p:spPr>
+          <a:xfrm>
+            <a:off x="0" y="795528"/>
+            <a:ext cx="9144000" cy="27432"/>
+          </a:xfrm>
+          <a:prstGeom prst="rect">
+            <a:avLst/>
+          </a:prstGeom>
+          <a:solidFill>
+            <a:srgbClr val="2A9D8F"/>
+          </a:solidFill>
+          <a:ln/>
+        </p:spPr>
+      </p:sp>
+      <p:sp>
+        <p:nvSpPr>
+          <p:cNvPr id="4" name="Text 2"/>
+          <p:cNvSpPr/>
+          <p:nvPr/>
+        </p:nvSpPr>
+        <p:spPr>
+          <a:xfrm>
+            <a:off x="640080" y="91440"/>
+            <a:ext cx="7863840" cy="640080"/>
+          </a:xfrm>
+          <a:prstGeom prst="rect">
+            <a:avLst/>
+          </a:prstGeom>
+          <a:noFill/>
+          <a:ln/>
+        </p:spPr>
+        <p:txBody>
+          <a:bodyPr wrap="square" lIns="0" tIns="0" rIns="0" bIns="0" rtlCol="0" anchor="ctr"/>
+          <a:lstStyle/>
+          <a:p>
+            <a:pPr indent="0" marL="0">
+              <a:buNone/>
+            </a:pPr>
+            <a:r>
+              <a:rPr lang="en-US" sz="2200" b="1" dirty="0">
+                <a:solidFill>
+                  <a:srgbClr val="1B2A4A"/>
+                </a:solidFill>
+                <a:latin typeface="Georgia" pitchFamily="34" charset="0"/>
+                <a:ea typeface="Georgia" pitchFamily="34" charset="-122"/>
+                <a:cs typeface="Georgia" pitchFamily="34" charset="-120"/>
+              </a:rPr>
+              <a:t>Key Vocabulary</a:t>
+            </a:r>
+            <a:endParaRPr lang="en-US" sz="2200" dirty="0"/>
+          </a:p>
+        </p:txBody>
+      </p:sp>
+      <p:graphicFrame>
+        <p:nvGraphicFramePr>
+          <p:cNvPr id="8" name="Table 0"/>
+          <p:cNvGraphicFramePr>
+            <a:graphicFrameLocks noGrp="1"/>
+          </p:cNvGraphicFramePr>
+          <p:nvPr>
+            <p:extLst>
+              <p:ext uri="{D42A27DB-BD31-4B8C-83A1-F6EECF244321}">
+                <p14:modId xmlns:p14="http://schemas.microsoft.com/office/powerpoint/2010/main" val="1579011935"/>
+              </p:ext>
+            </p:extLst>
+          </p:nvPr>
+        </p:nvGraphicFramePr>
+        <p:xfrm>
+          <a:off x="640080" y="1005840"/>
+          <a:ext cx="7863840" cy="914400"/>
+        </p:xfrm>
+        <a:graphic>
+          <a:graphicData uri="http://schemas.openxmlformats.org/drawingml/2006/table">
+            <a:tbl>
+              <a:tblPr/>
+              <a:tblGrid>
+                <a:gridCol w="2286000"/>
+                <a:gridCol w="5577840"/>
+              </a:tblGrid>
+              <a:tr h="457200">
+                <a:tc>
+                  <a:txBody>
+                    <a:bodyPr/>
+                    <a:lstStyle/>
+                    <a:p>
+                      <a:pPr indent="0" marL="0">
+                        <a:buNone/>
+                      </a:pPr>
+                      <a:r>
+                        <a:rPr lang="en-US" sz="1300" b="1" dirty="0">
+                          <a:solidFill>
+                            <a:srgbClr val="FFFFFF"/>
+                          </a:solidFill>
+                          <a:latin typeface="Calibri" pitchFamily="34" charset="0"/>
+                          <a:ea typeface="Calibri" pitchFamily="34" charset="-122"/>
+                          <a:cs typeface="Calibri" pitchFamily="34" charset="-120"/>
+                        </a:rPr>
+                        <a:t>Term</a:t>
+                      </a:r>
+                      <a:endParaRPr lang="en-US" sz="1300" dirty="0">
+                        <a:latin typeface="Calibri" charset="0"/>
+                        <a:ea typeface="Calibri" charset="0"/>
+                        <a:cs typeface="Calibri" charset="0"/>
+                      </a:endParaRPr>
+                    </a:p>
+                  </a:txBody>
+                  <a:tcPr marL="91440" marR="91440" marT="45720" marB="45720">
+                    <a:lnL w="6350" cap="flat" cmpd="sng" algn="ctr">
+                      <a:solidFill>
+                        <a:srgbClr val="E5E2DC"/>
+                      </a:solidFill>
+                      <a:prstDash val="solid"/>
+                      <a:round/>
+                      <a:headEnd type="none" w="med" len="med"/>
+                      <a:tailEnd type="none" w="med" len="med"/>
+                    </a:lnL>
+                    <a:lnR w="6350" cap="flat" cmpd="sng" algn="ctr">
+                      <a:solidFill>
+                        <a:srgbClr val="E5E2DC"/>
+                      </a:solidFill>
+                      <a:prstDash val="solid"/>
+                      <a:round/>
+                      <a:headEnd type="none" w="med" len="med"/>
+                      <a:tailEnd type="none" w="med" len="med"/>
+                    </a:lnR>
+                    <a:lnT w="6350" cap="flat" cmpd="sng" algn="ctr">
+                      <a:solidFill>
+                        <a:srgbClr val="E5E2DC"/>
+                      </a:solidFill>
+                      <a:prstDash val="solid"/>
+                      <a:round/>
+                      <a:headEnd type="none" w="med" len="med"/>
+                      <a:tailEnd type="none" w="med" len="med"/>
+                    </a:lnT>
+                    <a:lnB w="6350" cap="flat" cmpd="sng" algn="ctr">
+                      <a:solidFill>
+                        <a:srgbClr val="E5E2DC"/>
+                      </a:solidFill>
+                      <a:prstDash val="solid"/>
+                      <a:round/>
+                      <a:headEnd type="none" w="med" len="med"/>
+                      <a:tailEnd type="none" w="med" len="med"/>
+                    </a:lnB>
+                    <a:solidFill>
+                      <a:srgbClr val="2A9D8F"/>
+                    </a:solidFill>
+                  </a:tcPr>
+                </a:tc>
+                <a:tc>
+                  <a:txBody>
+                    <a:bodyPr/>
+                    <a:lstStyle/>
+                    <a:p>
+                      <a:pPr indent="0" marL="0">
+                        <a:buNone/>
+                      </a:pPr>
+                      <a:r>
+                        <a:rPr lang="en-US" sz="1300" b="1" dirty="0">
+                          <a:solidFill>
+                            <a:srgbClr val="FFFFFF"/>
+                          </a:solidFill>
+                          <a:latin typeface="Calibri" pitchFamily="34" charset="0"/>
+                          <a:ea typeface="Calibri" pitchFamily="34" charset="-122"/>
+                          <a:cs typeface="Calibri" pitchFamily="34" charset="-120"/>
+                        </a:rPr>
+                        <a:t>Definition</a:t>
+                      </a:r>
+                      <a:endParaRPr lang="en-US" sz="1300" dirty="0">
+                        <a:latin typeface="Calibri" charset="0"/>
+                        <a:ea typeface="Calibri" charset="0"/>
+                        <a:cs typeface="Calibri" charset="0"/>
+                      </a:endParaRPr>
+                    </a:p>
+                  </a:txBody>
+                  <a:tcPr marL="91440" marR="91440" marT="45720" marB="45720">
+                    <a:lnL w="6350" cap="flat" cmpd="sng" algn="ctr">
+                      <a:solidFill>
+                        <a:srgbClr val="E5E2DC"/>
+                      </a:solidFill>
+                      <a:prstDash val="solid"/>
+                      <a:round/>
+                      <a:headEnd type="none" w="med" len="med"/>
+                      <a:tailEnd type="none" w="med" len="med"/>
+                    </a:lnL>
+                    <a:lnR w="6350" cap="flat" cmpd="sng" algn="ctr">
+                      <a:solidFill>
+                        <a:srgbClr val="E5E2DC"/>
+                      </a:solidFill>
+                      <a:prstDash val="solid"/>
+                      <a:round/>
+                      <a:headEnd type="none" w="med" len="med"/>
+                      <a:tailEnd type="none" w="med" len="med"/>
+                    </a:lnR>
+                    <a:lnT w="6350" cap="flat" cmpd="sng" algn="ctr">
+                      <a:solidFill>
+                        <a:srgbClr val="E5E2DC"/>
+                      </a:solidFill>
+                      <a:prstDash val="solid"/>
+                      <a:round/>
+                      <a:headEnd type="none" w="med" len="med"/>
+                      <a:tailEnd type="none" w="med" len="med"/>
+                    </a:lnT>
+                    <a:lnB w="6350" cap="flat" cmpd="sng" algn="ctr">
+                      <a:solidFill>
+                        <a:srgbClr val="E5E2DC"/>
+                      </a:solidFill>
+                      <a:prstDash val="solid"/>
+                      <a:round/>
+                      <a:headEnd type="none" w="med" len="med"/>
+                      <a:tailEnd type="none" w="med" len="med"/>
+                    </a:lnB>
+                    <a:solidFill>
+                      <a:srgbClr val="2A9D8F"/>
+                    </a:solidFill>
+                  </a:tcPr>
+                </a:tc>
+              </a:tr>
+              <a:tr h="457200">
+                <a:tc>
+                  <a:txBody>
+                    <a:bodyPr/>
+                    <a:lstStyle/>
+                    <a:p>
+                      <a:pPr indent="0" marL="0">
+                        <a:buNone/>
+                      </a:pPr>
+                      <a:r>
+                        <a:rPr lang="en-US" sz="1400" b="1" dirty="0">
+                          <a:solidFill>
+                            <a:srgbClr val="1B2A4A"/>
+                          </a:solidFill>
+                          <a:latin typeface="Calibri" pitchFamily="34" charset="0"/>
+                          <a:ea typeface="Calibri" pitchFamily="34" charset="-122"/>
+                          <a:cs typeface="Calibri" pitchFamily="34" charset="-120"/>
+                        </a:rPr>
+                        <a:t>Convergent</a:t>
+                      </a:r>
+                      <a:endParaRPr lang="en-US" sz="1400" dirty="0">
+                        <a:latin typeface="Calibri" charset="0"/>
+                        <a:ea typeface="Calibri" charset="0"/>
+                        <a:cs typeface="Calibri" charset="0"/>
+                      </a:endParaRPr>
+                    </a:p>
+                  </a:txBody>
+                  <a:tcPr marL="91440" marR="91440" marT="45720" marB="45720">
+                    <a:lnL w="6350" cap="flat" cmpd="sng" algn="ctr">
+                      <a:solidFill>
+                        <a:srgbClr val="E5E2DC"/>
+                      </a:solidFill>
+                      <a:prstDash val="solid"/>
+                      <a:round/>
+                      <a:headEnd type="none" w="med" len="med"/>
+                      <a:tailEnd type="none" w="med" len="med"/>
+                    </a:lnL>
+                    <a:lnR w="6350" cap="flat" cmpd="sng" algn="ctr">
+                      <a:solidFill>
+                        <a:srgbClr val="E5E2DC"/>
+                      </a:solidFill>
+                      <a:prstDash val="solid"/>
+                      <a:round/>
+                      <a:headEnd type="none" w="med" len="med"/>
+                      <a:tailEnd type="none" w="med" len="med"/>
+                    </a:lnR>
+                    <a:lnT w="6350" cap="flat" cmpd="sng" algn="ctr">
+                      <a:solidFill>
+                        <a:srgbClr val="E5E2DC"/>
+                      </a:solidFill>
+                      <a:prstDash val="solid"/>
+                      <a:round/>
+                      <a:headEnd type="none" w="med" len="med"/>
+                      <a:tailEnd type="none" w="med" len="med"/>
+                    </a:lnT>
+                    <a:lnB w="6350" cap="flat" cmpd="sng" algn="ctr">
+                      <a:solidFill>
+                        <a:srgbClr val="E5E2DC"/>
+                      </a:solidFill>
+                      <a:prstDash val="solid"/>
+                      <a:round/>
+                      <a:headEnd type="none" w="med" len="med"/>
+                      <a:tailEnd type="none" w="med" len="med"/>
+                    </a:lnB>
+                  </a:tcPr>
+                </a:tc>
+                <a:tc>
+                  <a:txBody>
+                    <a:bodyPr/>
+                    <a:lstStyle/>
+                    <a:p>
+                      <a:pPr indent="0" marL="0">
+                        <a:buNone/>
+                      </a:pPr>
+                      <a:r>
+                        <a:rPr lang="en-US" sz="1400" dirty="0">
+                          <a:solidFill>
+                            <a:srgbClr val="3D3A36"/>
+                          </a:solidFill>
+                          <a:latin typeface="Calibri" pitchFamily="34" charset="0"/>
+                          <a:ea typeface="Calibri" pitchFamily="34" charset="-122"/>
+                          <a:cs typeface="Calibri" pitchFamily="34" charset="-120"/>
+                        </a:rPr>
+                        <a:t>Plates move together. Can cause subduction.</a:t>
+                      </a:r>
+                      <a:endParaRPr lang="en-US" sz="1400" dirty="0">
+                        <a:latin typeface="Calibri" charset="0"/>
+                        <a:ea typeface="Calibri" charset="0"/>
+                        <a:cs typeface="Calibri" charset="0"/>
+                      </a:endParaRPr>
+                    </a:p>
+                  </a:txBody>
+                  <a:tcPr marL="91440" marR="91440" marT="45720" marB="45720">
+                    <a:lnL w="6350" cap="flat" cmpd="sng" algn="ctr">
+                      <a:solidFill>
+                        <a:srgbClr val="E5E2DC"/>
+                      </a:solidFill>
+                      <a:prstDash val="solid"/>
+                      <a:round/>
+                      <a:headEnd type="none" w="med" len="med"/>
+                      <a:tailEnd type="none" w="med" len="med"/>
+                    </a:lnL>
+                    <a:lnR w="6350" cap="flat" cmpd="sng" algn="ctr">
+                      <a:solidFill>
+                        <a:srgbClr val="E5E2DC"/>
+                      </a:solidFill>
+                      <a:prstDash val="solid"/>
+                      <a:round/>
+                      <a:headEnd type="none" w="med" len="med"/>
+                      <a:tailEnd type="none" w="med" len="med"/>
+                    </a:lnR>
+                    <a:lnT w="6350" cap="flat" cmpd="sng" algn="ctr">
+                      <a:solidFill>
+                        <a:srgbClr val="E5E2DC"/>
+                      </a:solidFill>
+                      <a:prstDash val="solid"/>
+                      <a:round/>
+                      <a:headEnd type="none" w="med" len="med"/>
+                      <a:tailEnd type="none" w="med" len="med"/>
+                    </a:lnT>
+                    <a:lnB w="6350" cap="flat" cmpd="sng" algn="ctr">
+                      <a:solidFill>
+                        <a:srgbClr val="E5E2DC"/>
+                      </a:solidFill>
+                      <a:prstDash val="solid"/>
+                      <a:round/>
+                      <a:headEnd type="none" w="med" len="med"/>
+                      <a:tailEnd type="none" w="med" len="med"/>
+                    </a:lnB>
+                  </a:tcPr>
+                </a:tc>
+              </a:tr>
+              <a:tr h="457200">
+                <a:tc>
+                  <a:txBody>
+                    <a:bodyPr/>
+                    <a:lstStyle/>
+                    <a:p>
+                      <a:pPr indent="0" marL="0">
+                        <a:buNone/>
+                      </a:pPr>
+                      <a:r>
+                        <a:rPr lang="en-US" sz="1400" b="1" dirty="0">
+                          <a:solidFill>
+                            <a:srgbClr val="1B2A4A"/>
+                          </a:solidFill>
+                          <a:latin typeface="Calibri" pitchFamily="34" charset="0"/>
+                          <a:ea typeface="Calibri" pitchFamily="34" charset="-122"/>
+                          <a:cs typeface="Calibri" pitchFamily="34" charset="-120"/>
+                        </a:rPr>
+                        <a:t>Divergent</a:t>
+                      </a:r>
+                      <a:endParaRPr lang="en-US" sz="1400" dirty="0">
+                        <a:latin typeface="Calibri" charset="0"/>
+                        <a:ea typeface="Calibri" charset="0"/>
+                        <a:cs typeface="Calibri" charset="0"/>
+                      </a:endParaRPr>
+                    </a:p>
+                  </a:txBody>
+                  <a:tcPr marL="91440" marR="91440" marT="45720" marB="45720">
+                    <a:lnL w="6350" cap="flat" cmpd="sng" algn="ctr">
+                      <a:solidFill>
+                        <a:srgbClr val="E5E2DC"/>
+                      </a:solidFill>
+                      <a:prstDash val="solid"/>
+                      <a:round/>
+                      <a:headEnd type="none" w="med" len="med"/>
+                      <a:tailEnd type="none" w="med" len="med"/>
+                    </a:lnL>
+                    <a:lnR w="6350" cap="flat" cmpd="sng" algn="ctr">
+                      <a:solidFill>
+                        <a:srgbClr val="E5E2DC"/>
+                      </a:solidFill>
+                      <a:prstDash val="solid"/>
+                      <a:round/>
+                      <a:headEnd type="none" w="med" len="med"/>
+                      <a:tailEnd type="none" w="med" len="med"/>
+                    </a:lnR>
+                    <a:lnT w="6350" cap="flat" cmpd="sng" algn="ctr">
+                      <a:solidFill>
+                        <a:srgbClr val="E5E2DC"/>
+                      </a:solidFill>
+                      <a:prstDash val="solid"/>
+                      <a:round/>
+                      <a:headEnd type="none" w="med" len="med"/>
+                      <a:tailEnd type="none" w="med" len="med"/>
+                    </a:lnT>
+                    <a:lnB w="6350" cap="flat" cmpd="sng" algn="ctr">
+                      <a:solidFill>
+                        <a:srgbClr val="E5E2DC"/>
+                      </a:solidFill>
+                      <a:prstDash val="solid"/>
+                      <a:round/>
+                      <a:headEnd type="none" w="med" len="med"/>
+                      <a:tailEnd type="none" w="med" len="med"/>
+                    </a:lnB>
+                  </a:tcPr>
+                </a:tc>
+                <a:tc>
+                  <a:txBody>
+                    <a:bodyPr/>
+                    <a:lstStyle/>
+                    <a:p>
+                      <a:pPr indent="0" marL="0">
+                        <a:buNone/>
+                      </a:pPr>
+                      <a:r>
+                        <a:rPr lang="en-US" sz="1400" dirty="0">
+                          <a:solidFill>
+                            <a:srgbClr val="3D3A36"/>
+                          </a:solidFill>
+                          <a:latin typeface="Calibri" pitchFamily="34" charset="0"/>
+                          <a:ea typeface="Calibri" pitchFamily="34" charset="-122"/>
+                          <a:cs typeface="Calibri" pitchFamily="34" charset="-120"/>
+                        </a:rPr>
+                        <a:t>Plates move apart. New crust forms.</a:t>
+                      </a:r>
+                      <a:endParaRPr lang="en-US" sz="1400" dirty="0">
+                        <a:latin typeface="Calibri" charset="0"/>
+                        <a:ea typeface="Calibri" charset="0"/>
+                        <a:cs typeface="Calibri" charset="0"/>
+                      </a:endParaRPr>
+                    </a:p>
+                  </a:txBody>
+                  <a:tcPr marL="91440" marR="91440" marT="45720" marB="45720">
+                    <a:lnL w="6350" cap="flat" cmpd="sng" algn="ctr">
+                      <a:solidFill>
+                        <a:srgbClr val="E5E2DC"/>
+                      </a:solidFill>
+                      <a:prstDash val="solid"/>
+                      <a:round/>
+                      <a:headEnd type="none" w="med" len="med"/>
+                      <a:tailEnd type="none" w="med" len="med"/>
+                    </a:lnL>
+                    <a:lnR w="6350" cap="flat" cmpd="sng" algn="ctr">
+                      <a:solidFill>
+                        <a:srgbClr val="E5E2DC"/>
+                      </a:solidFill>
+                      <a:prstDash val="solid"/>
+                      <a:round/>
+                      <a:headEnd type="none" w="med" len="med"/>
+                      <a:tailEnd type="none" w="med" len="med"/>
+                    </a:lnR>
+                    <a:lnT w="6350" cap="flat" cmpd="sng" algn="ctr">
+                      <a:solidFill>
+                        <a:srgbClr val="E5E2DC"/>
+                      </a:solidFill>
+                      <a:prstDash val="solid"/>
+                      <a:round/>
+                      <a:headEnd type="none" w="med" len="med"/>
+                      <a:tailEnd type="none" w="med" len="med"/>
+                    </a:lnT>
+                    <a:lnB w="6350" cap="flat" cmpd="sng" algn="ctr">
+                      <a:solidFill>
+                        <a:srgbClr val="E5E2DC"/>
+                      </a:solidFill>
+                      <a:prstDash val="solid"/>
+                      <a:round/>
+                      <a:headEnd type="none" w="med" len="med"/>
+                      <a:tailEnd type="none" w="med" len="med"/>
+                    </a:lnB>
+                  </a:tcPr>
+                </a:tc>
+              </a:tr>
+              <a:tr h="457200">
+                <a:tc>
+                  <a:txBody>
+                    <a:bodyPr/>
+                    <a:lstStyle/>
+                    <a:p>
+                      <a:pPr indent="0" marL="0">
+                        <a:buNone/>
+                      </a:pPr>
+                      <a:r>
+                        <a:rPr lang="en-US" sz="1400" b="1" dirty="0">
+                          <a:solidFill>
+                            <a:srgbClr val="1B2A4A"/>
+                          </a:solidFill>
+                          <a:latin typeface="Calibri" pitchFamily="34" charset="0"/>
+                          <a:ea typeface="Calibri" pitchFamily="34" charset="-122"/>
+                          <a:cs typeface="Calibri" pitchFamily="34" charset="-120"/>
+                        </a:rPr>
+                        <a:t>Transform</a:t>
+                      </a:r>
+                      <a:endParaRPr lang="en-US" sz="1400" dirty="0">
+                        <a:latin typeface="Calibri" charset="0"/>
+                        <a:ea typeface="Calibri" charset="0"/>
+                        <a:cs typeface="Calibri" charset="0"/>
+                      </a:endParaRPr>
+                    </a:p>
+                  </a:txBody>
+                  <a:tcPr marL="91440" marR="91440" marT="45720" marB="45720">
+                    <a:lnL w="6350" cap="flat" cmpd="sng" algn="ctr">
+                      <a:solidFill>
+                        <a:srgbClr val="E5E2DC"/>
+                      </a:solidFill>
+                      <a:prstDash val="solid"/>
+                      <a:round/>
+                      <a:headEnd type="none" w="med" len="med"/>
+                      <a:tailEnd type="none" w="med" len="med"/>
+                    </a:lnL>
+                    <a:lnR w="6350" cap="flat" cmpd="sng" algn="ctr">
+                      <a:solidFill>
+                        <a:srgbClr val="E5E2DC"/>
+                      </a:solidFill>
+                      <a:prstDash val="solid"/>
+                      <a:round/>
+                      <a:headEnd type="none" w="med" len="med"/>
+                      <a:tailEnd type="none" w="med" len="med"/>
+                    </a:lnR>
+                    <a:lnT w="6350" cap="flat" cmpd="sng" algn="ctr">
+                      <a:solidFill>
+                        <a:srgbClr val="E5E2DC"/>
+                      </a:solidFill>
+                      <a:prstDash val="solid"/>
+                      <a:round/>
+                      <a:headEnd type="none" w="med" len="med"/>
+                      <a:tailEnd type="none" w="med" len="med"/>
+                    </a:lnT>
+                    <a:lnB w="6350" cap="flat" cmpd="sng" algn="ctr">
+                      <a:solidFill>
+                        <a:srgbClr val="E5E2DC"/>
+                      </a:solidFill>
+                      <a:prstDash val="solid"/>
+                      <a:round/>
+                      <a:headEnd type="none" w="med" len="med"/>
+                      <a:tailEnd type="none" w="med" len="med"/>
+                    </a:lnB>
+                  </a:tcPr>
+                </a:tc>
+                <a:tc>
+                  <a:txBody>
+                    <a:bodyPr/>
+                    <a:lstStyle/>
+                    <a:p>
+                      <a:pPr indent="0" marL="0">
+                        <a:buNone/>
+                      </a:pPr>
+                      <a:r>
+                        <a:rPr lang="en-US" sz="1400" dirty="0">
+                          <a:solidFill>
+                            <a:srgbClr val="3D3A36"/>
+                          </a:solidFill>
+                          <a:latin typeface="Calibri" pitchFamily="34" charset="0"/>
+                          <a:ea typeface="Calibri" pitchFamily="34" charset="-122"/>
+                          <a:cs typeface="Calibri" pitchFamily="34" charset="-120"/>
+                        </a:rPr>
+                        <a:t>Plates slide past each other. Earthquakes.</a:t>
+                      </a:r>
+                      <a:endParaRPr lang="en-US" sz="1400" dirty="0">
+                        <a:latin typeface="Calibri" charset="0"/>
+                        <a:ea typeface="Calibri" charset="0"/>
+                        <a:cs typeface="Calibri" charset="0"/>
+                      </a:endParaRPr>
+                    </a:p>
+                  </a:txBody>
+                  <a:tcPr marL="91440" marR="91440" marT="45720" marB="45720">
+                    <a:lnL w="6350" cap="flat" cmpd="sng" algn="ctr">
+                      <a:solidFill>
+                        <a:srgbClr val="E5E2DC"/>
+                      </a:solidFill>
+                      <a:prstDash val="solid"/>
+                      <a:round/>
+                      <a:headEnd type="none" w="med" len="med"/>
+                      <a:tailEnd type="none" w="med" len="med"/>
+                    </a:lnL>
+                    <a:lnR w="6350" cap="flat" cmpd="sng" algn="ctr">
+                      <a:solidFill>
+                        <a:srgbClr val="E5E2DC"/>
+                      </a:solidFill>
+                      <a:prstDash val="solid"/>
+                      <a:round/>
+                      <a:headEnd type="none" w="med" len="med"/>
+                      <a:tailEnd type="none" w="med" len="med"/>
+                    </a:lnR>
+                    <a:lnT w="6350" cap="flat" cmpd="sng" algn="ctr">
+                      <a:solidFill>
+                        <a:srgbClr val="E5E2DC"/>
+                      </a:solidFill>
+                      <a:prstDash val="solid"/>
+                      <a:round/>
+                      <a:headEnd type="none" w="med" len="med"/>
+                      <a:tailEnd type="none" w="med" len="med"/>
+                    </a:lnT>
+                    <a:lnB w="6350" cap="flat" cmpd="sng" algn="ctr">
+                      <a:solidFill>
+                        <a:srgbClr val="E5E2DC"/>
+                      </a:solidFill>
+                      <a:prstDash val="solid"/>
+                      <a:round/>
+                      <a:headEnd type="none" w="med" len="med"/>
+                      <a:tailEnd type="none" w="med" len="med"/>
+                    </a:lnB>
+                  </a:tcPr>
+                </a:tc>
+              </a:tr>
+              <a:tr h="457200">
+                <a:tc>
+                  <a:txBody>
+                    <a:bodyPr/>
+                    <a:lstStyle/>
+                    <a:p>
+                      <a:pPr indent="0" marL="0">
+                        <a:buNone/>
+                      </a:pPr>
+                      <a:r>
+                        <a:rPr lang="en-US" sz="1400" b="1" dirty="0">
+                          <a:solidFill>
+                            <a:srgbClr val="1B2A4A"/>
+                          </a:solidFill>
+                          <a:latin typeface="Calibri" pitchFamily="34" charset="0"/>
+                          <a:ea typeface="Calibri" pitchFamily="34" charset="-122"/>
+                          <a:cs typeface="Calibri" pitchFamily="34" charset="-120"/>
+                        </a:rPr>
+                        <a:t>Subduction</a:t>
+                      </a:r>
+                      <a:endParaRPr lang="en-US" sz="1400" dirty="0">
+                        <a:latin typeface="Calibri" charset="0"/>
+                        <a:ea typeface="Calibri" charset="0"/>
+                        <a:cs typeface="Calibri" charset="0"/>
+                      </a:endParaRPr>
+                    </a:p>
+                  </a:txBody>
+                  <a:tcPr marL="91440" marR="91440" marT="45720" marB="45720">
+                    <a:lnL w="6350" cap="flat" cmpd="sng" algn="ctr">
+                      <a:solidFill>
+                        <a:srgbClr val="E5E2DC"/>
+                      </a:solidFill>
+                      <a:prstDash val="solid"/>
+                      <a:round/>
+                      <a:headEnd type="none" w="med" len="med"/>
+                      <a:tailEnd type="none" w="med" len="med"/>
+                    </a:lnL>
+                    <a:lnR w="6350" cap="flat" cmpd="sng" algn="ctr">
+                      <a:solidFill>
+                        <a:srgbClr val="E5E2DC"/>
+                      </a:solidFill>
+                      <a:prstDash val="solid"/>
+                      <a:round/>
+                      <a:headEnd type="none" w="med" len="med"/>
+                      <a:tailEnd type="none" w="med" len="med"/>
+                    </a:lnR>
+                    <a:lnT w="6350" cap="flat" cmpd="sng" algn="ctr">
+                      <a:solidFill>
+                        <a:srgbClr val="E5E2DC"/>
+                      </a:solidFill>
+                      <a:prstDash val="solid"/>
+                      <a:round/>
+                      <a:headEnd type="none" w="med" len="med"/>
+                      <a:tailEnd type="none" w="med" len="med"/>
+                    </a:lnT>
+                    <a:lnB w="6350" cap="flat" cmpd="sng" algn="ctr">
+                      <a:solidFill>
+                        <a:srgbClr val="E5E2DC"/>
+                      </a:solidFill>
+                      <a:prstDash val="solid"/>
+                      <a:round/>
+                      <a:headEnd type="none" w="med" len="med"/>
+                      <a:tailEnd type="none" w="med" len="med"/>
+                    </a:lnB>
+                  </a:tcPr>
+                </a:tc>
+                <a:tc>
+                  <a:txBody>
+                    <a:bodyPr/>
+                    <a:lstStyle/>
+                    <a:p>
+                      <a:pPr indent="0" marL="0">
+                        <a:buNone/>
+                      </a:pPr>
+                      <a:r>
+                        <a:rPr lang="en-US" sz="1400" dirty="0">
+                          <a:solidFill>
+                            <a:srgbClr val="3D3A36"/>
+                          </a:solidFill>
+                          <a:latin typeface="Calibri" pitchFamily="34" charset="0"/>
+                          <a:ea typeface="Calibri" pitchFamily="34" charset="-122"/>
+                          <a:cs typeface="Calibri" pitchFamily="34" charset="-120"/>
+                        </a:rPr>
+                        <a:t>One plate slides under another.</a:t>
+                      </a:r>
+                      <a:endParaRPr lang="en-US" sz="1400" dirty="0">
+                        <a:latin typeface="Calibri" charset="0"/>
+                        <a:ea typeface="Calibri" charset="0"/>
+                        <a:cs typeface="Calibri" charset="0"/>
+                      </a:endParaRPr>
+                    </a:p>
+                  </a:txBody>
+                  <a:tcPr marL="91440" marR="91440" marT="45720" marB="45720">
+                    <a:lnL w="6350" cap="flat" cmpd="sng" algn="ctr">
+                      <a:solidFill>
+                        <a:srgbClr val="E5E2DC"/>
+                      </a:solidFill>
+                      <a:prstDash val="solid"/>
+                      <a:round/>
+                      <a:headEnd type="none" w="med" len="med"/>
+                      <a:tailEnd type="none" w="med" len="med"/>
+                    </a:lnL>
+                    <a:lnR w="6350" cap="flat" cmpd="sng" algn="ctr">
+                      <a:solidFill>
+                        <a:srgbClr val="E5E2DC"/>
+                      </a:solidFill>
+                      <a:prstDash val="solid"/>
+                      <a:round/>
+                      <a:headEnd type="none" w="med" len="med"/>
+                      <a:tailEnd type="none" w="med" len="med"/>
+                    </a:lnR>
+                    <a:lnT w="6350" cap="flat" cmpd="sng" algn="ctr">
+                      <a:solidFill>
+                        <a:srgbClr val="E5E2DC"/>
+                      </a:solidFill>
+                      <a:prstDash val="solid"/>
+                      <a:round/>
+                      <a:headEnd type="none" w="med" len="med"/>
+                      <a:tailEnd type="none" w="med" len="med"/>
+                    </a:lnT>
+                    <a:lnB w="6350" cap="flat" cmpd="sng" algn="ctr">
+                      <a:solidFill>
+                        <a:srgbClr val="E5E2DC"/>
+                      </a:solidFill>
+                      <a:prstDash val="solid"/>
+                      <a:round/>
+                      <a:headEnd type="none" w="med" len="med"/>
+                      <a:tailEnd type="none" w="med" len="med"/>
+                    </a:lnB>
+                  </a:tcPr>
+                </a:tc>
+              </a:tr>
+            </a:tbl>
+          </a:graphicData>
+        </a:graphic>
+      </p:graphicFrame>
+    </p:spTree>
+  </p:cSld>
+  <p:clrMapOvr>
+    <a:masterClrMapping/>
+  </p:clrMapOvr>
+</p:sld>
+</file>
+
+<file path=ppt/slides/slide8.xml><?xml version="1.0" encoding="utf-8"?>
+<p:sld xmlns:a="http://schemas.openxmlformats.org/drawingml/2006/main" xmlns:r="http://schemas.openxmlformats.org/officeDocument/2006/relationships" xmlns:p="http://schemas.openxmlformats.org/presentationml/2006/main">
+  <p:cSld name="Slide 8">
+    <p:bg>
+      <p:bgPr>
+        <a:solidFill>
+          <a:srgbClr val="FAF8F5"/>
+        </a:solidFill>
+      </p:bgPr>
+    </p:bg>
+    <p:spTree>
+      <p:nvGrpSpPr>
+        <p:cNvPr id="1" name=""/>
+        <p:cNvGrpSpPr/>
+        <p:nvPr/>
+      </p:nvGrpSpPr>
+      <p:grpSpPr>
+        <a:xfrm>
+          <a:off x="0" y="0"/>
+          <a:ext cx="0" cy="0"/>
+          <a:chOff x="0" y="0"/>
+          <a:chExt cx="0" cy="0"/>
+        </a:xfrm>
+      </p:grpSpPr>
+      <p:sp>
+        <p:nvSpPr>
+          <p:cNvPr id="2" name="Shape 0"/>
+          <p:cNvSpPr/>
+          <p:nvPr/>
+        </p:nvSpPr>
+        <p:spPr>
+          <a:xfrm>
+            <a:off x="0" y="0"/>
+            <a:ext cx="9144000" cy="822960"/>
+          </a:xfrm>
+          <a:prstGeom prst="rect">
+            <a:avLst/>
+          </a:prstGeom>
+          <a:solidFill>
+            <a:srgbClr val="FFFFFF"/>
+          </a:solidFill>
+          <a:ln/>
+        </p:spPr>
+      </p:sp>
+      <p:sp>
+        <p:nvSpPr>
+          <p:cNvPr id="3" name="Shape 1"/>
+          <p:cNvSpPr/>
+          <p:nvPr/>
+        </p:nvSpPr>
+        <p:spPr>
+          <a:xfrm>
+            <a:off x="0" y="795528"/>
+            <a:ext cx="9144000" cy="27432"/>
+          </a:xfrm>
+          <a:prstGeom prst="rect">
+            <a:avLst/>
+          </a:prstGeom>
+          <a:solidFill>
+            <a:srgbClr val="2A9D8F"/>
+          </a:solidFill>
+          <a:ln/>
+        </p:spPr>
+      </p:sp>
+      <p:sp>
+        <p:nvSpPr>
+          <p:cNvPr id="4" name="Text 2"/>
+          <p:cNvSpPr/>
+          <p:nvPr/>
+        </p:nvSpPr>
+        <p:spPr>
+          <a:xfrm>
+            <a:off x="640080" y="91440"/>
+            <a:ext cx="7863840" cy="640080"/>
+          </a:xfrm>
+          <a:prstGeom prst="rect">
+            <a:avLst/>
+          </a:prstGeom>
+          <a:noFill/>
+          <a:ln/>
+        </p:spPr>
+        <p:txBody>
+          <a:bodyPr wrap="square" lIns="0" tIns="0" rIns="0" bIns="0" rtlCol="0" anchor="ctr"/>
+          <a:lstStyle/>
+          <a:p>
+            <a:pPr indent="0" marL="0">
+              <a:buNone/>
+            </a:pPr>
+            <a:r>
+              <a:rPr lang="en-US" sz="2200" b="1" dirty="0">
+                <a:solidFill>
+                  <a:srgbClr val="1B2A4A"/>
+                </a:solidFill>
+                <a:latin typeface="Georgia" pitchFamily="34" charset="0"/>
+                <a:ea typeface="Georgia" pitchFamily="34" charset="-122"/>
+                <a:cs typeface="Georgia" pitchFamily="34" charset="-120"/>
+              </a:rPr>
+              <a:t>Recommended Videos</a:t>
+            </a:r>
+            <a:endParaRPr lang="en-US" sz="2200" dirty="0"/>
+          </a:p>
+        </p:txBody>
+      </p:sp>
+      <p:sp>
+        <p:nvSpPr>
+          <p:cNvPr id="5" name="Text 3"/>
+          <p:cNvSpPr/>
+          <p:nvPr/>
+        </p:nvSpPr>
+        <p:spPr>
+          <a:xfrm>
+            <a:off x="640080" y="868680"/>
+            <a:ext cx="7863840" cy="274320"/>
+          </a:xfrm>
+          <a:prstGeom prst="rect">
+            <a:avLst/>
+          </a:prstGeom>
+          <a:noFill/>
+          <a:ln/>
+        </p:spPr>
+        <p:txBody>
+          <a:bodyPr wrap="square" rtlCol="0" anchor="ctr"/>
+          <a:lstStyle/>
+          <a:p>
+            <a:pPr indent="0" marL="0">
+              <a:buNone/>
+            </a:pPr>
+            <a:r>
+              <a:rPr lang="en-US" sz="1200" i="1" dirty="0">
+                <a:solidFill>
+                  <a:srgbClr val="6B6660"/>
+                </a:solidFill>
+                <a:latin typeface="Calibri" pitchFamily="34" charset="0"/>
+                <a:ea typeface="Calibri" pitchFamily="34" charset="-122"/>
+                <a:cs typeface="Calibri" pitchFamily="34" charset="-120"/>
+              </a:rPr>
+              <a:t>Search these on YouTube to learn more.</a:t>
+            </a:r>
+            <a:endParaRPr lang="en-US" sz="1200" dirty="0"/>
+          </a:p>
+        </p:txBody>
+      </p:sp>
+      <p:sp>
+        <p:nvSpPr>
+          <p:cNvPr id="6" name="Shape 4"/>
+          <p:cNvSpPr/>
+          <p:nvPr/>
+        </p:nvSpPr>
+        <p:spPr>
+          <a:xfrm>
+            <a:off x="457200" y="1234440"/>
+            <a:ext cx="8229600" cy="1051560"/>
+          </a:xfrm>
+          <a:prstGeom prst="rect">
+            <a:avLst/>
+          </a:prstGeom>
+          <a:solidFill>
+            <a:srgbClr val="FFFFFF"/>
+          </a:solidFill>
+          <a:ln/>
+          <a:effectLst>
+            <a:outerShdw sx="100000" sy="100000" kx="0" ky="0" algn="bl" rotWithShape="0" blurRad="76200" dist="25400" dir="8100000">
+              <a:srgbClr val="000000">
+                <a:alpha val="12000"/>
+              </a:srgbClr>
+            </a:outerShdw>
+          </a:effectLst>
+        </p:spPr>
+      </p:sp>
+      <p:sp>
+        <p:nvSpPr>
+          <p:cNvPr id="7" name="Shape 5"/>
+          <p:cNvSpPr/>
+          <p:nvPr/>
+        </p:nvSpPr>
+        <p:spPr>
+          <a:xfrm>
+            <a:off x="457200" y="1234440"/>
+            <a:ext cx="64008" cy="1051560"/>
+          </a:xfrm>
+          <a:prstGeom prst="rect">
+            <a:avLst/>
+          </a:prstGeom>
+          <a:solidFill>
+            <a:srgbClr val="2A9D8F"/>
+          </a:solidFill>
+          <a:ln/>
+        </p:spPr>
+      </p:sp>
+      <p:sp>
+        <p:nvSpPr>
+          <p:cNvPr id="8" name="Text 6"/>
+          <p:cNvSpPr/>
+          <p:nvPr/>
+        </p:nvSpPr>
+        <p:spPr>
+          <a:xfrm>
+            <a:off x="640080" y="1325880"/>
+            <a:ext cx="457200" cy="457200"/>
+          </a:xfrm>
+          <a:prstGeom prst="rect">
+            <a:avLst/>
+          </a:prstGeom>
+          <a:noFill/>
+          <a:ln/>
+        </p:spPr>
+        <p:txBody>
+          <a:bodyPr wrap="square" rtlCol="0" anchor="ctr"/>
+          <a:lstStyle/>
+          <a:p>
+            <a:pPr algn="ctr" indent="0" marL="0">
+              <a:buNone/>
+            </a:pPr>
+            <a:r>
+              <a:rPr lang="en-US" sz="2000" dirty="0">
+                <a:solidFill>
+                  <a:srgbClr val="2A9D8F"/>
+                </a:solidFill>
+                <a:latin typeface="Calibri" pitchFamily="34" charset="0"/>
+                <a:ea typeface="Calibri" pitchFamily="34" charset="-122"/>
+                <a:cs typeface="Calibri" pitchFamily="34" charset="-120"/>
+              </a:rPr>
+              <a:t>▶</a:t>
+            </a:r>
+            <a:endParaRPr lang="en-US" sz="2000" dirty="0"/>
+          </a:p>
+        </p:txBody>
+      </p:sp>
+      <p:sp>
+        <p:nvSpPr>
+          <p:cNvPr id="9" name="Text 7"/>
+          <p:cNvSpPr/>
+          <p:nvPr/>
+        </p:nvSpPr>
+        <p:spPr>
+          <a:xfrm>
+            <a:off x="1188720" y="1307592"/>
+            <a:ext cx="7132320" cy="411480"/>
+          </a:xfrm>
+          <a:prstGeom prst="rect">
+            <a:avLst/>
+          </a:prstGeom>
+          <a:noFill/>
+          <a:ln/>
+        </p:spPr>
+        <p:txBody>
+          <a:bodyPr wrap="square" rtlCol="0" anchor="ctr"/>
+          <a:lstStyle/>
+          <a:p>
+            <a:pPr indent="0" marL="0">
+              <a:buNone/>
+            </a:pPr>
+            <a:r>
+              <a:rPr lang="en-US" sz="1400" b="1" dirty="0">
+                <a:solidFill>
+                  <a:srgbClr val="1B2A4A"/>
+                </a:solidFill>
+                <a:latin typeface="Calibri" pitchFamily="34" charset="0"/>
+                <a:ea typeface="Calibri" pitchFamily="34" charset="-122"/>
+                <a:cs typeface="Calibri" pitchFamily="34" charset="-120"/>
+              </a:rPr>
+              <a:t>Plate Boundaries — Divergent, Convergent, Transform</a:t>
+            </a:r>
+            <a:endParaRPr lang="en-US" sz="1400" dirty="0"/>
+          </a:p>
+        </p:txBody>
+      </p:sp>
+      <p:sp>
+        <p:nvSpPr>
+          <p:cNvPr id="10" name="Text 8"/>
+          <p:cNvSpPr/>
+          <p:nvPr/>
+        </p:nvSpPr>
+        <p:spPr>
+          <a:xfrm>
+            <a:off x="1188720" y="1691640"/>
+            <a:ext cx="7132320" cy="320040"/>
+          </a:xfrm>
+          <a:prstGeom prst="rect">
+            <a:avLst/>
+          </a:prstGeom>
+          <a:noFill/>
+          <a:ln/>
+        </p:spPr>
+        <p:txBody>
+          <a:bodyPr wrap="square" rtlCol="0" anchor="ctr"/>
+          <a:lstStyle/>
+          <a:p>
+            <a:pPr indent="0" marL="0">
+              <a:buNone/>
+            </a:pPr>
+            <a:r>
+              <a:rPr lang="en-US" sz="1100" dirty="0">
+                <a:solidFill>
+                  <a:srgbClr val="6B6660"/>
+                </a:solidFill>
+                <a:latin typeface="Calibri" pitchFamily="34" charset="0"/>
+                <a:ea typeface="Calibri" pitchFamily="34" charset="-122"/>
+                <a:cs typeface="Calibri" pitchFamily="34" charset="-120"/>
+              </a:rPr>
+              <a:t>FuseSchool  •  5 min</a:t>
+            </a:r>
+            <a:endParaRPr lang="en-US" sz="1100" dirty="0"/>
+          </a:p>
+        </p:txBody>
+      </p:sp>
+      <p:sp>
+        <p:nvSpPr>
+          <p:cNvPr id="11" name="Shape 9"/>
+          <p:cNvSpPr/>
+          <p:nvPr/>
+        </p:nvSpPr>
+        <p:spPr>
+          <a:xfrm>
+            <a:off x="457200" y="2423160"/>
+            <a:ext cx="8229600" cy="1051560"/>
+          </a:xfrm>
+          <a:prstGeom prst="rect">
+            <a:avLst/>
+          </a:prstGeom>
+          <a:solidFill>
+            <a:srgbClr val="FFFFFF"/>
+          </a:solidFill>
+          <a:ln/>
+          <a:effectLst>
+            <a:outerShdw sx="100000" sy="100000" kx="0" ky="0" algn="bl" rotWithShape="0" blurRad="76200" dist="25400" dir="8100000">
+              <a:srgbClr val="000000">
+                <a:alpha val="12000"/>
+              </a:srgbClr>
+            </a:outerShdw>
+          </a:effectLst>
+        </p:spPr>
+      </p:sp>
+      <p:sp>
+        <p:nvSpPr>
+          <p:cNvPr id="12" name="Shape 10"/>
+          <p:cNvSpPr/>
+          <p:nvPr/>
+        </p:nvSpPr>
+        <p:spPr>
+          <a:xfrm>
+            <a:off x="457200" y="2423160"/>
+            <a:ext cx="64008" cy="1051560"/>
+          </a:xfrm>
+          <a:prstGeom prst="rect">
+            <a:avLst/>
+          </a:prstGeom>
+          <a:solidFill>
+            <a:srgbClr val="2A9D8F"/>
+          </a:solidFill>
+          <a:ln/>
+        </p:spPr>
+      </p:sp>
+      <p:sp>
+        <p:nvSpPr>
+          <p:cNvPr id="13" name="Text 11"/>
+          <p:cNvSpPr/>
+          <p:nvPr/>
+        </p:nvSpPr>
+        <p:spPr>
+          <a:xfrm>
+            <a:off x="640080" y="2514600"/>
+            <a:ext cx="457200" cy="457200"/>
+          </a:xfrm>
+          <a:prstGeom prst="rect">
+            <a:avLst/>
+          </a:prstGeom>
+          <a:noFill/>
+          <a:ln/>
+        </p:spPr>
+        <p:txBody>
+          <a:bodyPr wrap="square" rtlCol="0" anchor="ctr"/>
+          <a:lstStyle/>
+          <a:p>
+            <a:pPr algn="ctr" indent="0" marL="0">
+              <a:buNone/>
+            </a:pPr>
+            <a:r>
+              <a:rPr lang="en-US" sz="2000" dirty="0">
+                <a:solidFill>
+                  <a:srgbClr val="2A9D8F"/>
+                </a:solidFill>
+                <a:latin typeface="Calibri" pitchFamily="34" charset="0"/>
+                <a:ea typeface="Calibri" pitchFamily="34" charset="-122"/>
+                <a:cs typeface="Calibri" pitchFamily="34" charset="-120"/>
+              </a:rPr>
+              <a:t>▶</a:t>
+            </a:r>
+            <a:endParaRPr lang="en-US" sz="2000" dirty="0"/>
+          </a:p>
+        </p:txBody>
+      </p:sp>
+      <p:sp>
+        <p:nvSpPr>
+          <p:cNvPr id="14" name="Text 12"/>
+          <p:cNvSpPr/>
+          <p:nvPr/>
+        </p:nvSpPr>
+        <p:spPr>
+          <a:xfrm>
+            <a:off x="1188720" y="2496312"/>
+            <a:ext cx="7132320" cy="411480"/>
+          </a:xfrm>
+          <a:prstGeom prst="rect">
+            <a:avLst/>
+          </a:prstGeom>
+          <a:noFill/>
+          <a:ln/>
+        </p:spPr>
+        <p:txBody>
+          <a:bodyPr wrap="square" rtlCol="0" anchor="ctr"/>
+          <a:lstStyle/>
+          <a:p>
+            <a:pPr indent="0" marL="0">
+              <a:buNone/>
+            </a:pPr>
+            <a:r>
+              <a:rPr lang="en-US" sz="1400" b="1" dirty="0">
+                <a:solidFill>
+                  <a:srgbClr val="1B2A4A"/>
+                </a:solidFill>
+                <a:latin typeface="Calibri" pitchFamily="34" charset="0"/>
+                <a:ea typeface="Calibri" pitchFamily="34" charset="-122"/>
+                <a:cs typeface="Calibri" pitchFamily="34" charset="-120"/>
+              </a:rPr>
+              <a:t>Tectonic Plates — What Are They?</a:t>
+            </a:r>
+            <a:endParaRPr lang="en-US" sz="1400" dirty="0"/>
+          </a:p>
+        </p:txBody>
+      </p:sp>
+      <p:sp>
+        <p:nvSpPr>
+          <p:cNvPr id="15" name="Text 13"/>
+          <p:cNvSpPr/>
+          <p:nvPr/>
+        </p:nvSpPr>
+        <p:spPr>
+          <a:xfrm>
+            <a:off x="1188720" y="2880360"/>
+            <a:ext cx="7132320" cy="320040"/>
+          </a:xfrm>
+          <a:prstGeom prst="rect">
+            <a:avLst/>
+          </a:prstGeom>
+          <a:noFill/>
+          <a:ln/>
+        </p:spPr>
+        <p:txBody>
+          <a:bodyPr wrap="square" rtlCol="0" anchor="ctr"/>
+          <a:lstStyle/>
+          <a:p>
+            <a:pPr indent="0" marL="0">
+              <a:buNone/>
+            </a:pPr>
+            <a:r>
+              <a:rPr lang="en-US" sz="1100" dirty="0">
+                <a:solidFill>
+                  <a:srgbClr val="6B6660"/>
+                </a:solidFill>
+                <a:latin typeface="Calibri" pitchFamily="34" charset="0"/>
+                <a:ea typeface="Calibri" pitchFamily="34" charset="-122"/>
+                <a:cs typeface="Calibri" pitchFamily="34" charset="-120"/>
+              </a:rPr>
+              <a:t>It's AumSum Time  •  6 min</a:t>
+            </a:r>
+            <a:endParaRPr lang="en-US" sz="1100" dirty="0"/>
+          </a:p>
+        </p:txBody>
+      </p:sp>
+      <p:sp>
+        <p:nvSpPr>
+          <p:cNvPr id="16" name="Shape 14"/>
+          <p:cNvSpPr/>
+          <p:nvPr/>
+        </p:nvSpPr>
+        <p:spPr>
+          <a:xfrm>
+            <a:off x="457200" y="3611880"/>
+            <a:ext cx="8229600" cy="1051560"/>
+          </a:xfrm>
+          <a:prstGeom prst="rect">
+            <a:avLst/>
+          </a:prstGeom>
+          <a:solidFill>
+            <a:srgbClr val="FFFFFF"/>
+          </a:solidFill>
+          <a:ln/>
+          <a:effectLst>
+            <a:outerShdw sx="100000" sy="100000" kx="0" ky="0" algn="bl" rotWithShape="0" blurRad="76200" dist="25400" dir="8100000">
+              <a:srgbClr val="000000">
+                <a:alpha val="12000"/>
+              </a:srgbClr>
+            </a:outerShdw>
+          </a:effectLst>
+        </p:spPr>
+      </p:sp>
+      <p:sp>
+        <p:nvSpPr>
+          <p:cNvPr id="17" name="Shape 15"/>
+          <p:cNvSpPr/>
+          <p:nvPr/>
+        </p:nvSpPr>
+        <p:spPr>
+          <a:xfrm>
+            <a:off x="457200" y="3611880"/>
+            <a:ext cx="64008" cy="1051560"/>
+          </a:xfrm>
+          <a:prstGeom prst="rect">
+            <a:avLst/>
+          </a:prstGeom>
+          <a:solidFill>
+            <a:srgbClr val="2A9D8F"/>
+          </a:solidFill>
+          <a:ln/>
+        </p:spPr>
+      </p:sp>
+      <p:sp>
+        <p:nvSpPr>
+          <p:cNvPr id="18" name="Text 16"/>
+          <p:cNvSpPr/>
+          <p:nvPr/>
+        </p:nvSpPr>
+        <p:spPr>
+          <a:xfrm>
+            <a:off x="640080" y="3703320"/>
+            <a:ext cx="457200" cy="457200"/>
+          </a:xfrm>
+          <a:prstGeom prst="rect">
+            <a:avLst/>
+          </a:prstGeom>
+          <a:noFill/>
+          <a:ln/>
+        </p:spPr>
+        <p:txBody>
+          <a:bodyPr wrap="square" rtlCol="0" anchor="ctr"/>
+          <a:lstStyle/>
+          <a:p>
+            <a:pPr algn="ctr" indent="0" marL="0">
+              <a:buNone/>
+            </a:pPr>
+            <a:r>
+              <a:rPr lang="en-US" sz="2000" dirty="0">
+                <a:solidFill>
+                  <a:srgbClr val="2A9D8F"/>
+                </a:solidFill>
+                <a:latin typeface="Calibri" pitchFamily="34" charset="0"/>
+                <a:ea typeface="Calibri" pitchFamily="34" charset="-122"/>
+                <a:cs typeface="Calibri" pitchFamily="34" charset="-120"/>
+              </a:rPr>
+              <a:t>▶</a:t>
+            </a:r>
+            <a:endParaRPr lang="en-US" sz="2000" dirty="0"/>
+          </a:p>
+        </p:txBody>
+      </p:sp>
+      <p:sp>
+        <p:nvSpPr>
+          <p:cNvPr id="19" name="Text 17"/>
+          <p:cNvSpPr/>
+          <p:nvPr/>
+        </p:nvSpPr>
+        <p:spPr>
+          <a:xfrm>
+            <a:off x="1188720" y="3685032"/>
+            <a:ext cx="7132320" cy="411480"/>
+          </a:xfrm>
+          <a:prstGeom prst="rect">
+            <a:avLst/>
+          </a:prstGeom>
+          <a:noFill/>
+          <a:ln/>
+        </p:spPr>
+        <p:txBody>
+          <a:bodyPr wrap="square" rtlCol="0" anchor="ctr"/>
+          <a:lstStyle/>
+          <a:p>
+            <a:pPr indent="0" marL="0">
+              <a:buNone/>
+            </a:pPr>
+            <a:r>
+              <a:rPr lang="en-US" sz="1400" b="1" dirty="0">
+                <a:solidFill>
+                  <a:srgbClr val="1B2A4A"/>
+                </a:solidFill>
+                <a:latin typeface="Calibri" pitchFamily="34" charset="0"/>
+                <a:ea typeface="Calibri" pitchFamily="34" charset="-122"/>
+                <a:cs typeface="Calibri" pitchFamily="34" charset="-120"/>
+              </a:rPr>
+              <a:t>How Do Tectonic Plates Move?</a:t>
+            </a:r>
+            <a:endParaRPr lang="en-US" sz="1400" dirty="0"/>
+          </a:p>
+        </p:txBody>
+      </p:sp>
+      <p:sp>
+        <p:nvSpPr>
+          <p:cNvPr id="20" name="Text 18"/>
+          <p:cNvSpPr/>
+          <p:nvPr/>
+        </p:nvSpPr>
+        <p:spPr>
+          <a:xfrm>
+            <a:off x="1188720" y="4069080"/>
+            <a:ext cx="7132320" cy="320040"/>
+          </a:xfrm>
+          <a:prstGeom prst="rect">
+            <a:avLst/>
+          </a:prstGeom>
+          <a:noFill/>
+          <a:ln/>
+        </p:spPr>
+        <p:txBody>
+          <a:bodyPr wrap="square" rtlCol="0" anchor="ctr"/>
+          <a:lstStyle/>
+          <a:p>
+            <a:pPr indent="0" marL="0">
+              <a:buNone/>
+            </a:pPr>
+            <a:r>
+              <a:rPr lang="en-US" sz="1100" dirty="0">
+                <a:solidFill>
+                  <a:srgbClr val="6B6660"/>
+                </a:solidFill>
+                <a:latin typeface="Calibri" pitchFamily="34" charset="0"/>
+                <a:ea typeface="Calibri" pitchFamily="34" charset="-122"/>
+                <a:cs typeface="Calibri" pitchFamily="34" charset="-120"/>
+              </a:rPr>
+              <a:t>TED-Ed  •  5 min</a:t>
+            </a:r>
+            <a:endParaRPr lang="en-US" sz="1100" dirty="0"/>
+          </a:p>
+        </p:txBody>
+      </p:sp>
+    </p:spTree>
+  </p:cSld>
+  <p:clrMapOvr>
+    <a:masterClrMapping/>
+  </p:clrMapOvr>
+</p:sld>
+</file>
+
+<file path=ppt/slides/slide9.xml><?xml version="1.0" encoding="utf-8"?>
+<p:sld xmlns:a="http://schemas.openxmlformats.org/drawingml/2006/main" xmlns:r="http://schemas.openxmlformats.org/officeDocument/2006/relationships" xmlns:p="http://schemas.openxmlformats.org/presentationml/2006/main">
+  <p:cSld name="Slide 9">
+    <p:spTree>
+      <p:nvGrpSpPr>
+        <p:cNvPr id="1" name=""/>
+        <p:cNvGrpSpPr/>
+        <p:nvPr/>
+      </p:nvGrpSpPr>
+      <p:grpSpPr>
+        <a:xfrm>
+          <a:off x="0" y="0"/>
+          <a:ext cx="0" cy="0"/>
+          <a:chOff x="0" y="0"/>
+          <a:chExt cx="0" cy="0"/>
+        </a:xfrm>
+      </p:grpSpPr>
+      <p:sp>
+        <p:nvSpPr>
+          <p:cNvPr id="2" name="Shape 0"/>
+          <p:cNvSpPr/>
+          <p:nvPr/>
+        </p:nvSpPr>
+        <p:spPr>
+          <a:xfrm>
+            <a:off x="0" y="0"/>
+            <a:ext cx="9144000" cy="5143500"/>
+          </a:xfrm>
+          <a:prstGeom prst="rect">
+            <a:avLst/>
+          </a:prstGeom>
+          <a:solidFill>
+            <a:srgbClr val="1B2A4A"/>
+          </a:solidFill>
+          <a:ln/>
+        </p:spPr>
+      </p:sp>
+      <p:sp>
+        <p:nvSpPr>
+          <p:cNvPr id="3" name="Shape 1"/>
+          <p:cNvSpPr/>
+          <p:nvPr/>
+        </p:nvSpPr>
+        <p:spPr>
+          <a:xfrm>
+            <a:off x="0" y="4777740"/>
+            <a:ext cx="9144000" cy="365760"/>
+          </a:xfrm>
+          <a:prstGeom prst="rect">
+            <a:avLst/>
+          </a:prstGeom>
+          <a:solidFill>
+            <a:srgbClr val="2A9D8F"/>
+          </a:solidFill>
+          <a:ln/>
+        </p:spPr>
+      </p:sp>
+      <p:sp>
+        <p:nvSpPr>
+          <p:cNvPr id="4" name="Text 2"/>
+          <p:cNvSpPr/>
+          <p:nvPr/>
+        </p:nvSpPr>
+        <p:spPr>
+          <a:xfrm>
+            <a:off x="731520" y="1371600"/>
+            <a:ext cx="7680960" cy="914400"/>
+          </a:xfrm>
+          <a:prstGeom prst="rect">
+            <a:avLst/>
+          </a:prstGeom>
+          <a:noFill/>
+          <a:ln/>
+        </p:spPr>
+        <p:txBody>
+          <a:bodyPr wrap="square" rtlCol="0" anchor="ctr"/>
+          <a:lstStyle/>
+          <a:p>
+            <a:pPr algn="ctr" indent="0" marL="0">
+              <a:buNone/>
+            </a:pPr>
+            <a:r>
+              <a:rPr lang="en-US" sz="3600" b="1" dirty="0">
+                <a:solidFill>
+                  <a:srgbClr val="FFFFFF"/>
+                </a:solidFill>
+                <a:latin typeface="Georgia" pitchFamily="34" charset="0"/>
+                <a:ea typeface="Georgia" pitchFamily="34" charset="-122"/>
+                <a:cs typeface="Georgia" pitchFamily="34" charset="-120"/>
+              </a:rPr>
+              <a:t>Review &amp; Practise</a:t>
+            </a:r>
+            <a:endParaRPr lang="en-US" sz="3600" dirty="0"/>
+          </a:p>
+        </p:txBody>
+      </p:sp>
+      <p:sp>
+        <p:nvSpPr>
+          <p:cNvPr id="5" name="Text 3"/>
+          <p:cNvSpPr/>
+          <p:nvPr/>
+        </p:nvSpPr>
+        <p:spPr>
+          <a:xfrm>
+            <a:off x="731520" y="2560320"/>
+            <a:ext cx="7680960" cy="548640"/>
+          </a:xfrm>
+          <a:prstGeom prst="rect">
+            <a:avLst/>
+          </a:prstGeom>
+          <a:noFill/>
+          <a:ln/>
+        </p:spPr>
+        <p:txBody>
+          <a:bodyPr wrap="square" rtlCol="0" anchor="ctr"/>
+          <a:lstStyle/>
+          <a:p>
+            <a:pPr algn="ctr" indent="0" marL="0">
+              <a:buNone/>
+            </a:pPr>
+            <a:r>
+              <a:rPr lang="en-US" sz="2000" dirty="0">
+                <a:solidFill>
+                  <a:srgbClr val="2A9D8F"/>
+                </a:solidFill>
+                <a:latin typeface="Calibri" pitchFamily="34" charset="0"/>
+                <a:ea typeface="Calibri" pitchFamily="34" charset="-122"/>
+                <a:cs typeface="Calibri" pitchFamily="34" charset="-120"/>
+              </a:rPr>
               <a:t>mrzocchi.com</a:t>
             </a:r>
-            <a:endParaRPr lang="en-US" sz="1100" dirty="0"/>
+            <a:endParaRPr lang="en-US" sz="2000" dirty="0"/>
           </a:p>
         </p:txBody>
       </p:sp>
